--- a/sjoskolan/vecka-43/aktuell/v43_03_Elscheman_och_dokumentation_elev.pptx
+++ b/sjoskolan/vecka-43/aktuell/v43_03_Elscheman_och_dokumentation_elev.pptx
@@ -8674,7 +8674,7 @@
                 <a:ea typeface="Calibri"/>
                 <a:cs typeface="Calibri"/>
               </a:rPr>
-              <a:t>12 V över en öppen kontakt kan vara normalt</a:t>
+              <a:t>Full matningsspänning över en öppen kontakt kan vara normalt</a:t>
             </a:r>
           </a:p>
         </p:txBody>
@@ -9323,7 +9323,7 @@
         <p:spPr>
           <a:xfrm xmlns:a="http://schemas.openxmlformats.org/drawingml/2006/main">
             <a:off x="762000" y="1571625"/>
-            <a:ext cx="7620000" cy="990600"/>
+            <a:ext cx="3977639" cy="990600"/>
           </a:xfrm>
           <a:prstGeom xmlns:a="http://schemas.openxmlformats.org/drawingml/2006/main" prst="rect">
             <a:avLst/>
@@ -9350,15 +9350,15 @@
               </a:defRPr>
             </a:pPr>
             <a:r>
-              <a:rPr sz="2175" b="0">
-                <a:solidFill>
-                  <a:srgbClr val="111111"/>
-                </a:solidFill>
-                <a:latin typeface="Calibri"/>
-                <a:ea typeface="Calibri"/>
-                <a:cs typeface="Calibri"/>
-              </a:rPr>
-              <a:t>9 V matar en ohmsk last via en öppen seriekontakt. Returen är hel och övriga ledningar ideala.</a:t>
+              <a:rPr sz="1800" b="0">
+                <a:solidFill>
+                  <a:srgbClr val="111111"/>
+                </a:solidFill>
+                <a:latin typeface="Calibri"/>
+                <a:ea typeface="Calibri"/>
+                <a:cs typeface="Calibri"/>
+              </a:rPr>
+              <a:t>9 V matar en ohmsk last via en öppen seriekontakt. Returen är hel och övriga ledningar ideala.</a:t>
             </a:r>
           </a:p>
         </p:txBody>
@@ -9380,7 +9380,7 @@
         <p:spPr>
           <a:xfrm xmlns:a="http://schemas.openxmlformats.org/drawingml/2006/main">
             <a:off x="762000" y="2705100"/>
-            <a:ext cx="7620000" cy="790575"/>
+            <a:ext cx="3977639" cy="790575"/>
           </a:xfrm>
           <a:prstGeom xmlns:a="http://schemas.openxmlformats.org/drawingml/2006/main" prst="rect">
             <a:avLst/>
@@ -9415,7 +9415,95 @@
                 <a:ea typeface="Calibri"/>
                 <a:cs typeface="Calibri"/>
               </a:rPr>
-              <a:t>I = 0     Ulast = RI     Ukontakt = 9 − Ulast</a:t>
+              <a:t>I = 0     </a:t>
+            </a:r>
+            <a:r>
+              <a:rPr sz="2325" b="1">
+                <a:solidFill>
+                  <a:srgbClr val="064F91"/>
+                </a:solidFill>
+                <a:latin typeface="Calibri"/>
+                <a:ea typeface="Calibri"/>
+                <a:cs typeface="Calibri"/>
+              </a:rPr>
+              <a:t>U</a:t>
+            </a:r>
+            <a:r>
+              <a:rPr sz="2325" b="1" baseline="-25000">
+                <a:solidFill>
+                  <a:srgbClr val="064F91"/>
+                </a:solidFill>
+                <a:latin typeface="Calibri"/>
+                <a:ea typeface="Calibri"/>
+                <a:cs typeface="Calibri"/>
+              </a:rPr>
+              <a:t>last</a:t>
+            </a:r>
+            <a:r>
+              <a:rPr sz="2325" b="1">
+                <a:solidFill>
+                  <a:srgbClr val="064F91"/>
+                </a:solidFill>
+                <a:latin typeface="Calibri"/>
+                <a:ea typeface="Calibri"/>
+                <a:cs typeface="Calibri"/>
+              </a:rPr>
+              <a:t> = RI     </a:t>
+            </a:r>
+            <a:r>
+              <a:rPr sz="2325" b="1">
+                <a:solidFill>
+                  <a:srgbClr val="064F91"/>
+                </a:solidFill>
+                <a:latin typeface="Calibri"/>
+                <a:ea typeface="Calibri"/>
+                <a:cs typeface="Calibri"/>
+              </a:rPr>
+              <a:t>U</a:t>
+            </a:r>
+            <a:r>
+              <a:rPr sz="2325" b="1" baseline="-25000">
+                <a:solidFill>
+                  <a:srgbClr val="064F91"/>
+                </a:solidFill>
+                <a:latin typeface="Calibri"/>
+                <a:ea typeface="Calibri"/>
+                <a:cs typeface="Calibri"/>
+              </a:rPr>
+              <a:t>kontakt</a:t>
+            </a:r>
+            <a:r>
+              <a:rPr sz="2325" b="1">
+                <a:solidFill>
+                  <a:srgbClr val="064F91"/>
+                </a:solidFill>
+                <a:latin typeface="Calibri"/>
+                <a:ea typeface="Calibri"/>
+                <a:cs typeface="Calibri"/>
+              </a:rPr>
+              <a:t> = 9 − </a:t>
+            </a:r>
+            <a:r>
+              <a:rPr sz="2325" b="1">
+                <a:solidFill>
+                  <a:srgbClr val="064F91"/>
+                </a:solidFill>
+                <a:latin typeface="Calibri"/>
+                <a:ea typeface="Calibri"/>
+                <a:cs typeface="Calibri"/>
+              </a:rPr>
+              <a:t>U</a:t>
+            </a:r>
+            <a:r>
+              <a:rPr sz="2325" b="1" baseline="-25000">
+                <a:solidFill>
+                  <a:srgbClr val="064F91"/>
+                </a:solidFill>
+                <a:latin typeface="Calibri"/>
+                <a:ea typeface="Calibri"/>
+                <a:cs typeface="Calibri"/>
+              </a:rPr>
+              <a:t>last</a:t>
             </a:r>
           </a:p>
         </p:txBody>
@@ -9437,7 +9525,7 @@
         <p:spPr>
           <a:xfrm xmlns:a="http://schemas.openxmlformats.org/drawingml/2006/main">
             <a:off x="762000" y="3657600"/>
-            <a:ext cx="7620000" cy="1524000"/>
+            <a:ext cx="3977639" cy="1524000"/>
           </a:xfrm>
           <a:prstGeom xmlns:a="http://schemas.openxmlformats.org/drawingml/2006/main" prst="rect">
             <a:avLst/>
@@ -9464,15 +9552,15 @@
               </a:defRPr>
             </a:pPr>
             <a:r>
-              <a:rPr sz="2063" b="0">
-                <a:solidFill>
-                  <a:srgbClr val="111111"/>
-                </a:solidFill>
-                <a:latin typeface="Calibri"/>
-                <a:ea typeface="Calibri"/>
-                <a:cs typeface="Calibri"/>
-              </a:rPr>
-              <a:t>1. Öppen kontakt hindrar strömmen: I = 0 A.</a:t>
+              <a:rPr sz="1950" b="0">
+                <a:solidFill>
+                  <a:srgbClr val="111111"/>
+                </a:solidFill>
+                <a:latin typeface="Calibri"/>
+                <a:ea typeface="Calibri"/>
+                <a:cs typeface="Calibri"/>
+              </a:rPr>
+              <a:t>1. Öppen kontakt hindrar strömmen: I = 0 A.</a:t>
             </a:r>
           </a:p>
           <a:p xmlns:a="http://schemas.openxmlformats.org/drawingml/2006/main">
@@ -9487,15 +9575,48 @@
               </a:defRPr>
             </a:pPr>
             <a:r>
-              <a:rPr sz="2063" b="0">
-                <a:solidFill>
-                  <a:srgbClr val="111111"/>
-                </a:solidFill>
-                <a:latin typeface="Calibri"/>
-                <a:ea typeface="Calibri"/>
-                <a:cs typeface="Calibri"/>
-              </a:rPr>
-              <a:t>2. Ulast = R · 0 = 0 V, oavsett lastens ändliga R.</a:t>
+              <a:rPr sz="1950" b="0">
+                <a:solidFill>
+                  <a:srgbClr val="111111"/>
+                </a:solidFill>
+                <a:latin typeface="Calibri"/>
+                <a:ea typeface="Calibri"/>
+                <a:cs typeface="Calibri"/>
+              </a:rPr>
+              <a:t>2. </a:t>
+            </a:r>
+            <a:r>
+              <a:rPr sz="1950" b="0">
+                <a:solidFill>
+                  <a:srgbClr val="111111"/>
+                </a:solidFill>
+                <a:latin typeface="Calibri"/>
+                <a:ea typeface="Calibri"/>
+                <a:cs typeface="Calibri"/>
+              </a:rPr>
+              <a:t>U</a:t>
+            </a:r>
+            <a:r>
+              <a:rPr sz="1950" b="0" baseline="-25000">
+                <a:solidFill>
+                  <a:srgbClr val="111111"/>
+                </a:solidFill>
+                <a:latin typeface="Calibri"/>
+                <a:ea typeface="Calibri"/>
+                <a:cs typeface="Calibri"/>
+              </a:rPr>
+              <a:t>last</a:t>
+            </a:r>
+            <a:r>
+              <a:rPr sz="1950" b="0">
+                <a:solidFill>
+                  <a:srgbClr val="111111"/>
+                </a:solidFill>
+                <a:latin typeface="Calibri"/>
+                <a:ea typeface="Calibri"/>
+                <a:cs typeface="Calibri"/>
+              </a:rPr>
+              <a:t> = R · 0 = 0 V, oavsett lastens ändliga R.</a:t>
             </a:r>
           </a:p>
           <a:p xmlns:a="http://schemas.openxmlformats.org/drawingml/2006/main">
@@ -9510,15 +9631,48 @@
               </a:defRPr>
             </a:pPr>
             <a:r>
-              <a:rPr sz="2063" b="0">
-                <a:solidFill>
-                  <a:srgbClr val="111111"/>
-                </a:solidFill>
-                <a:latin typeface="Calibri"/>
-                <a:ea typeface="Calibri"/>
-                <a:cs typeface="Calibri"/>
-              </a:rPr>
-              <a:t>3. Ukontakt = 9 − 0 = 9 V.</a:t>
+              <a:rPr sz="1950" b="0">
+                <a:solidFill>
+                  <a:srgbClr val="111111"/>
+                </a:solidFill>
+                <a:latin typeface="Calibri"/>
+                <a:ea typeface="Calibri"/>
+                <a:cs typeface="Calibri"/>
+              </a:rPr>
+              <a:t>3. </a:t>
+            </a:r>
+            <a:r>
+              <a:rPr sz="1950" b="0">
+                <a:solidFill>
+                  <a:srgbClr val="111111"/>
+                </a:solidFill>
+                <a:latin typeface="Calibri"/>
+                <a:ea typeface="Calibri"/>
+                <a:cs typeface="Calibri"/>
+              </a:rPr>
+              <a:t>U</a:t>
+            </a:r>
+            <a:r>
+              <a:rPr sz="1950" b="0" baseline="-25000">
+                <a:solidFill>
+                  <a:srgbClr val="111111"/>
+                </a:solidFill>
+                <a:latin typeface="Calibri"/>
+                <a:ea typeface="Calibri"/>
+                <a:cs typeface="Calibri"/>
+              </a:rPr>
+              <a:t>kontakt</a:t>
+            </a:r>
+            <a:r>
+              <a:rPr sz="1950" b="0">
+                <a:solidFill>
+                  <a:srgbClr val="111111"/>
+                </a:solidFill>
+                <a:latin typeface="Calibri"/>
+                <a:ea typeface="Calibri"/>
+                <a:cs typeface="Calibri"/>
+              </a:rPr>
+              <a:t> = 9 − 0 = 9 V.</a:t>
             </a:r>
           </a:p>
         </p:txBody>
@@ -9540,7 +9694,7 @@
         <p:spPr>
           <a:xfrm xmlns:a="http://schemas.openxmlformats.org/drawingml/2006/main">
             <a:off x="762000" y="5372100"/>
-            <a:ext cx="7620000" cy="685800"/>
+            <a:ext cx="3977639" cy="685800"/>
           </a:xfrm>
           <a:prstGeom xmlns:a="http://schemas.openxmlformats.org/drawingml/2006/main" prst="rect">
             <a:avLst/>
@@ -9567,15 +9721,15 @@
               </a:defRPr>
             </a:pPr>
             <a:r>
-              <a:rPr sz="1913" b="0">
-                <a:solidFill>
-                  <a:srgbClr val="111111"/>
-                </a:solidFill>
-                <a:latin typeface="Calibri"/>
-                <a:ea typeface="Calibri"/>
-                <a:cs typeface="Calibri"/>
-              </a:rPr>
-              <a:t>Kontaktens matningssida har 9 V och lastsidan 0 V. Stor kontaktspänning kan alltså tyda på avbrott.</a:t>
+              <a:rPr sz="1550" b="0">
+                <a:solidFill>
+                  <a:srgbClr val="111111"/>
+                </a:solidFill>
+                <a:latin typeface="Calibri"/>
+                <a:ea typeface="Calibri"/>
+                <a:cs typeface="Calibri"/>
+              </a:rPr>
+              <a:t>Kontaktens matningssida har 9 V och lastsidan 0 V. Stor kontaktspänning kan alltså tyda på avbrott.</a:t>
             </a:r>
           </a:p>
         </p:txBody>
@@ -9637,6 +9791,30 @@
           </a:p>
         </p:txBody>
       </p:sp>
+      <p:pic xmlns:a="http://schemas.openxmlformats.org/drawingml/2006/main" xmlns:r="http://schemas.openxmlformats.org/officeDocument/2006/relationships">
+        <p:nvPicPr>
+          <p:cNvPr id="16" name="Figur: 9 V-krets med öppen seriekontakt och ohm" descr="9 V-krets med öppen seriekontakt och ohmsk last: 9 V över kontakten, 0 V över lasten och ingen ström"/>
+          <p:cNvPicPr>
+            <a:picLocks noChangeAspect="1"/>
+          </p:cNvPicPr>
+          <p:nvPr/>
+        </p:nvPicPr>
+        <p:blipFill>
+          <a:blip r:embed="rId3"/>
+          <a:stretch>
+            <a:fillRect/>
+          </a:stretch>
+        </p:blipFill>
+        <p:spPr>
+          <a:xfrm>
+            <a:off x="4892040" y="1645920"/>
+            <a:ext cx="3886200" cy="2709112"/>
+          </a:xfrm>
+          <a:prstGeom prst="rect">
+            <a:avLst/>
+          </a:prstGeom>
+        </p:spPr>
+      </p:pic>
     </p:spTree>
     <p:extLst>
       <p:ext uri="{BB962C8B-B14F-4D97-AF65-F5344CB8AC3E}">
@@ -9792,7 +9970,40 @@
                 <a:ea typeface="Calibri"/>
                 <a:cs typeface="Calibri"/>
               </a:rPr>
-              <a:t>Öppen matningsväg ger Ispole = 0</a:t>
+              <a:t>Öppen matningsväg ger </a:t>
+            </a:r>
+            <a:r>
+              <a:rPr sz="2400" b="1">
+                <a:solidFill>
+                  <a:srgbClr val="064F91"/>
+                </a:solidFill>
+                <a:latin typeface="Calibri"/>
+                <a:ea typeface="Calibri"/>
+                <a:cs typeface="Calibri"/>
+              </a:rPr>
+              <a:t>I</a:t>
+            </a:r>
+            <a:r>
+              <a:rPr sz="2400" b="1" baseline="-25000">
+                <a:solidFill>
+                  <a:srgbClr val="064F91"/>
+                </a:solidFill>
+                <a:latin typeface="Calibri"/>
+                <a:ea typeface="Calibri"/>
+                <a:cs typeface="Calibri"/>
+              </a:rPr>
+              <a:t>spole</a:t>
+            </a:r>
+            <a:r>
+              <a:rPr sz="2400" b="1">
+                <a:solidFill>
+                  <a:srgbClr val="064F91"/>
+                </a:solidFill>
+                <a:latin typeface="Calibri"/>
+                <a:ea typeface="Calibri"/>
+                <a:cs typeface="Calibri"/>
+              </a:rPr>
+              <a:t> = 0</a:t>
             </a:r>
           </a:p>
           <a:p xmlns:a="http://schemas.openxmlformats.org/drawingml/2006/main">
@@ -9815,7 +10026,84 @@
                 <a:ea typeface="Calibri"/>
                 <a:cs typeface="Calibri"/>
               </a:rPr>
-              <a:t>Uspole = Rspole · Ispole</a:t>
+              <a:t>U</a:t>
+            </a:r>
+            <a:r>
+              <a:rPr sz="2400" b="1" baseline="-25000">
+                <a:solidFill>
+                  <a:srgbClr val="064F91"/>
+                </a:solidFill>
+                <a:latin typeface="Calibri"/>
+                <a:ea typeface="Calibri"/>
+                <a:cs typeface="Calibri"/>
+              </a:rPr>
+              <a:t>spole</a:t>
+            </a:r>
+            <a:r>
+              <a:rPr sz="2400" b="1">
+                <a:solidFill>
+                  <a:srgbClr val="064F91"/>
+                </a:solidFill>
+                <a:latin typeface="Calibri"/>
+                <a:ea typeface="Calibri"/>
+                <a:cs typeface="Calibri"/>
+              </a:rPr>
+              <a:t> = </a:t>
+            </a:r>
+            <a:r>
+              <a:rPr sz="2400" b="1">
+                <a:solidFill>
+                  <a:srgbClr val="064F91"/>
+                </a:solidFill>
+                <a:latin typeface="Calibri"/>
+                <a:ea typeface="Calibri"/>
+                <a:cs typeface="Calibri"/>
+              </a:rPr>
+              <a:t>R</a:t>
+            </a:r>
+            <a:r>
+              <a:rPr sz="2400" b="1" baseline="-25000">
+                <a:solidFill>
+                  <a:srgbClr val="064F91"/>
+                </a:solidFill>
+                <a:latin typeface="Calibri"/>
+                <a:ea typeface="Calibri"/>
+                <a:cs typeface="Calibri"/>
+              </a:rPr>
+              <a:t>spole</a:t>
+            </a:r>
+            <a:r>
+              <a:rPr sz="2400" b="1">
+                <a:solidFill>
+                  <a:srgbClr val="064F91"/>
+                </a:solidFill>
+                <a:latin typeface="Calibri"/>
+                <a:ea typeface="Calibri"/>
+                <a:cs typeface="Calibri"/>
+              </a:rPr>
+              <a:t> · </a:t>
+            </a:r>
+            <a:r>
+              <a:rPr sz="2400" b="1">
+                <a:solidFill>
+                  <a:srgbClr val="064F91"/>
+                </a:solidFill>
+                <a:latin typeface="Calibri"/>
+                <a:ea typeface="Calibri"/>
+                <a:cs typeface="Calibri"/>
+              </a:rPr>
+              <a:t>I</a:t>
+            </a:r>
+            <a:r>
+              <a:rPr sz="2400" b="1" baseline="-25000">
+                <a:solidFill>
+                  <a:srgbClr val="064F91"/>
+                </a:solidFill>
+                <a:latin typeface="Calibri"/>
+                <a:ea typeface="Calibri"/>
+                <a:cs typeface="Calibri"/>
+              </a:rPr>
+              <a:t>spole</a:t>
             </a:r>
           </a:p>
         </p:txBody>
@@ -10227,7 +10515,7 @@
         <p:spPr>
           <a:xfrm xmlns:a="http://schemas.openxmlformats.org/drawingml/2006/main">
             <a:off x="762000" y="2533650"/>
-            <a:ext cx="7620000" cy="2286000"/>
+            <a:ext cx="3886200" cy="2606040"/>
           </a:xfrm>
           <a:prstGeom xmlns:a="http://schemas.openxmlformats.org/drawingml/2006/main" prst="rect">
             <a:avLst/>
@@ -10263,7 +10551,7 @@
                 <a:ea typeface="Calibri"/>
                 <a:cs typeface="Calibri"/>
               </a:rPr>
-              <a:t>I 12 V-hållkretsen är STOPP sluten, START öppen och K1 opåverkad. Returen är hel. Vilken ideal spänning finns över K1-spolen?</a:t>
+              <a:t>I 12 V-hållkretsen är STOPP sluten, START öppen och K1 opåverkad. Returen är hel. Vilken ideal spänning finns över K1-spolen?</a:t>
             </a:r>
           </a:p>
         </p:txBody>
@@ -10384,6 +10672,30 @@
           </a:p>
         </p:txBody>
       </p:sp>
+      <p:pic xmlns:a="http://schemas.openxmlformats.org/drawingml/2006/main" xmlns:r="http://schemas.openxmlformats.org/officeDocument/2006/relationships">
+        <p:nvPicPr>
+          <p:cNvPr id="9" name="Figur: Hållkrets i vila med S0 sluten och S1 öp" descr="Hållkrets i vila med S0 sluten och S1 öppen; spänningen över K1-spolen okänd"/>
+          <p:cNvPicPr>
+            <a:picLocks noChangeAspect="1"/>
+          </p:cNvPicPr>
+          <p:nvPr/>
+        </p:nvPicPr>
+        <p:blipFill>
+          <a:blip r:embed="rId3"/>
+          <a:stretch>
+            <a:fillRect/>
+          </a:stretch>
+        </p:blipFill>
+        <p:spPr>
+          <a:xfrm>
+            <a:off x="4846320" y="2331720"/>
+            <a:ext cx="3931920" cy="2740984"/>
+          </a:xfrm>
+          <a:prstGeom prst="rect">
+            <a:avLst/>
+          </a:prstGeom>
+        </p:spPr>
+      </p:pic>
     </p:spTree>
     <p:extLst>
       <p:ext uri="{BB962C8B-B14F-4D97-AF65-F5344CB8AC3E}">
@@ -10539,7 +10851,84 @@
                 <a:ea typeface="Calibri"/>
                 <a:cs typeface="Calibri"/>
               </a:rPr>
-              <a:t>Uspole = Vmatningssida − Vretur</a:t>
+              <a:t>U</a:t>
+            </a:r>
+            <a:r>
+              <a:rPr sz="2400" b="1" baseline="-25000">
+                <a:solidFill>
+                  <a:srgbClr val="064F91"/>
+                </a:solidFill>
+                <a:latin typeface="Calibri"/>
+                <a:ea typeface="Calibri"/>
+                <a:cs typeface="Calibri"/>
+              </a:rPr>
+              <a:t>spole</a:t>
+            </a:r>
+            <a:r>
+              <a:rPr sz="2400" b="1">
+                <a:solidFill>
+                  <a:srgbClr val="064F91"/>
+                </a:solidFill>
+                <a:latin typeface="Calibri"/>
+                <a:ea typeface="Calibri"/>
+                <a:cs typeface="Calibri"/>
+              </a:rPr>
+              <a:t> = </a:t>
+            </a:r>
+            <a:r>
+              <a:rPr sz="2400" b="1">
+                <a:solidFill>
+                  <a:srgbClr val="064F91"/>
+                </a:solidFill>
+                <a:latin typeface="Calibri"/>
+                <a:ea typeface="Calibri"/>
+                <a:cs typeface="Calibri"/>
+              </a:rPr>
+              <a:t>V</a:t>
+            </a:r>
+            <a:r>
+              <a:rPr sz="2400" b="1" baseline="-25000">
+                <a:solidFill>
+                  <a:srgbClr val="064F91"/>
+                </a:solidFill>
+                <a:latin typeface="Calibri"/>
+                <a:ea typeface="Calibri"/>
+                <a:cs typeface="Calibri"/>
+              </a:rPr>
+              <a:t>matningssida</a:t>
+            </a:r>
+            <a:r>
+              <a:rPr sz="2400" b="1">
+                <a:solidFill>
+                  <a:srgbClr val="064F91"/>
+                </a:solidFill>
+                <a:latin typeface="Calibri"/>
+                <a:ea typeface="Calibri"/>
+                <a:cs typeface="Calibri"/>
+              </a:rPr>
+              <a:t> − </a:t>
+            </a:r>
+            <a:r>
+              <a:rPr sz="2400" b="1">
+                <a:solidFill>
+                  <a:srgbClr val="064F91"/>
+                </a:solidFill>
+                <a:latin typeface="Calibri"/>
+                <a:ea typeface="Calibri"/>
+                <a:cs typeface="Calibri"/>
+              </a:rPr>
+              <a:t>V</a:t>
+            </a:r>
+            <a:r>
+              <a:rPr sz="2400" b="1" baseline="-25000">
+                <a:solidFill>
+                  <a:srgbClr val="064F91"/>
+                </a:solidFill>
+                <a:latin typeface="Calibri"/>
+                <a:ea typeface="Calibri"/>
+                <a:cs typeface="Calibri"/>
+              </a:rPr>
+              <a:t>retur</a:t>
             </a:r>
           </a:p>
         </p:txBody>
@@ -10951,7 +11340,7 @@
         <p:spPr>
           <a:xfrm xmlns:a="http://schemas.openxmlformats.org/drawingml/2006/main">
             <a:off x="762000" y="2533650"/>
-            <a:ext cx="7620000" cy="2286000"/>
+            <a:ext cx="3886200" cy="2606040"/>
           </a:xfrm>
           <a:prstGeom xmlns:a="http://schemas.openxmlformats.org/drawingml/2006/main" prst="rect">
             <a:avLst/>
@@ -11108,6 +11497,30 @@
           </a:p>
         </p:txBody>
       </p:sp>
+      <p:pic xmlns:a="http://schemas.openxmlformats.org/drawingml/2006/main" xmlns:r="http://schemas.openxmlformats.org/officeDocument/2006/relationships">
+        <p:nvPicPr>
+          <p:cNvPr id="9" name="Figur: Hållkrets där S1 hålls sluten; spänninge" descr="Hållkrets där S1 hålls sluten; spänningen över K1-spolen okänd"/>
+          <p:cNvPicPr>
+            <a:picLocks noChangeAspect="1"/>
+          </p:cNvPicPr>
+          <p:nvPr/>
+        </p:nvPicPr>
+        <p:blipFill>
+          <a:blip r:embed="rId3"/>
+          <a:stretch>
+            <a:fillRect/>
+          </a:stretch>
+        </p:blipFill>
+        <p:spPr>
+          <a:xfrm>
+            <a:off x="4846320" y="2331720"/>
+            <a:ext cx="3931920" cy="2740984"/>
+          </a:xfrm>
+          <a:prstGeom prst="rect">
+            <a:avLst/>
+          </a:prstGeom>
+        </p:spPr>
+      </p:pic>
     </p:spTree>
     <p:extLst>
       <p:ext uri="{BB962C8B-B14F-4D97-AF65-F5344CB8AC3E}">
@@ -11263,7 +11676,84 @@
                 <a:ea typeface="Calibri"/>
                 <a:cs typeface="Calibri"/>
               </a:rPr>
-              <a:t>Uöppen kontakt = Vföre − Vefter</a:t>
+              <a:t>U</a:t>
+            </a:r>
+            <a:r>
+              <a:rPr sz="2400" b="1" baseline="-25000">
+                <a:solidFill>
+                  <a:srgbClr val="064F91"/>
+                </a:solidFill>
+                <a:latin typeface="Calibri"/>
+                <a:ea typeface="Calibri"/>
+                <a:cs typeface="Calibri"/>
+              </a:rPr>
+              <a:t>öppen kontakt</a:t>
+            </a:r>
+            <a:r>
+              <a:rPr sz="2400" b="1">
+                <a:solidFill>
+                  <a:srgbClr val="064F91"/>
+                </a:solidFill>
+                <a:latin typeface="Calibri"/>
+                <a:ea typeface="Calibri"/>
+                <a:cs typeface="Calibri"/>
+              </a:rPr>
+              <a:t> = </a:t>
+            </a:r>
+            <a:r>
+              <a:rPr sz="2400" b="1">
+                <a:solidFill>
+                  <a:srgbClr val="064F91"/>
+                </a:solidFill>
+                <a:latin typeface="Calibri"/>
+                <a:ea typeface="Calibri"/>
+                <a:cs typeface="Calibri"/>
+              </a:rPr>
+              <a:t>V</a:t>
+            </a:r>
+            <a:r>
+              <a:rPr sz="2400" b="1" baseline="-25000">
+                <a:solidFill>
+                  <a:srgbClr val="064F91"/>
+                </a:solidFill>
+                <a:latin typeface="Calibri"/>
+                <a:ea typeface="Calibri"/>
+                <a:cs typeface="Calibri"/>
+              </a:rPr>
+              <a:t>före</a:t>
+            </a:r>
+            <a:r>
+              <a:rPr sz="2400" b="1">
+                <a:solidFill>
+                  <a:srgbClr val="064F91"/>
+                </a:solidFill>
+                <a:latin typeface="Calibri"/>
+                <a:ea typeface="Calibri"/>
+                <a:cs typeface="Calibri"/>
+              </a:rPr>
+              <a:t> − </a:t>
+            </a:r>
+            <a:r>
+              <a:rPr sz="2400" b="1">
+                <a:solidFill>
+                  <a:srgbClr val="064F91"/>
+                </a:solidFill>
+                <a:latin typeface="Calibri"/>
+                <a:ea typeface="Calibri"/>
+                <a:cs typeface="Calibri"/>
+              </a:rPr>
+              <a:t>V</a:t>
+            </a:r>
+            <a:r>
+              <a:rPr sz="2400" b="1" baseline="-25000">
+                <a:solidFill>
+                  <a:srgbClr val="064F91"/>
+                </a:solidFill>
+                <a:latin typeface="Calibri"/>
+                <a:ea typeface="Calibri"/>
+                <a:cs typeface="Calibri"/>
+              </a:rPr>
+              <a:t>efter</a:t>
             </a:r>
           </a:p>
         </p:txBody>
@@ -12189,7 +12679,7 @@
         <p:spPr>
           <a:xfrm xmlns:a="http://schemas.openxmlformats.org/drawingml/2006/main">
             <a:off x="762000" y="2533650"/>
-            <a:ext cx="7620000" cy="2286000"/>
+            <a:ext cx="3886200" cy="2606040"/>
           </a:xfrm>
           <a:prstGeom xmlns:a="http://schemas.openxmlformats.org/drawingml/2006/main" prst="rect">
             <a:avLst/>
@@ -12225,7 +12715,7 @@
                 <a:ea typeface="Calibri"/>
                 <a:cs typeface="Calibri"/>
               </a:rPr>
-              <a:t>START hålls sluten medan STOPP öppnas. Matningen är 12 V och returen är hel. Vilken ideal spänning ligger över den öppna STOPP-kontakten?</a:t>
+              <a:t>START hålls sluten medan STOPP öppnas. Matningen är 12 V och returen är hel. Vilken ideal spänning ligger över den öppna STOPP-kontakten?</a:t>
             </a:r>
           </a:p>
         </p:txBody>
@@ -12346,6 +12836,30 @@
           </a:p>
         </p:txBody>
       </p:sp>
+      <p:pic xmlns:a="http://schemas.openxmlformats.org/drawingml/2006/main" xmlns:r="http://schemas.openxmlformats.org/officeDocument/2006/relationships">
+        <p:nvPicPr>
+          <p:cNvPr id="9" name="Figur: Hållkrets där S1 hålls sluten och S0 öpp" descr="Hållkrets där S1 hålls sluten och S0 öppnas; spänningen över S0 okänd"/>
+          <p:cNvPicPr>
+            <a:picLocks noChangeAspect="1"/>
+          </p:cNvPicPr>
+          <p:nvPr/>
+        </p:nvPicPr>
+        <p:blipFill>
+          <a:blip r:embed="rId3"/>
+          <a:stretch>
+            <a:fillRect/>
+          </a:stretch>
+        </p:blipFill>
+        <p:spPr>
+          <a:xfrm>
+            <a:off x="4846320" y="2331720"/>
+            <a:ext cx="3931920" cy="2740984"/>
+          </a:xfrm>
+          <a:prstGeom prst="rect">
+            <a:avLst/>
+          </a:prstGeom>
+        </p:spPr>
+      </p:pic>
     </p:spTree>
     <p:extLst>
       <p:ext uri="{BB962C8B-B14F-4D97-AF65-F5344CB8AC3E}">
@@ -14431,64 +14945,6 @@
                 <a:hlinkClick xmlns:r="http://schemas.openxmlformats.org/officeDocument/2006/relationships" r:id="R038515475d024d6c"/>
               </a:rPr>
               <a:t>Schneider Electric: samordning av skydd</a:t>
-            </a:r>
-          </a:p>
-        </p:txBody>
-      </p:sp>
-      <p:sp>
-        <p:nvSpPr>
-          <p:cNvPr id="7" name="Källor och lärarstöd finns även i bildanteckningarna.">
-            <a:extLst xmlns:a="http://schemas.openxmlformats.org/drawingml/2006/main">
-              <a:ext uri="{FF2B5EF4-FFF2-40B4-BE49-F238E27FC236}">
-                <a16:creationId xmlns:a16="http://schemas.microsoft.com/office/drawing/2014/main" id="{6135691D-EF4B-49D0-8B55-27F3057DE1C2}"/>
-              </a:ext>
-            </a:extLst>
-          </p:cNvPr>
-          <p:cNvSpPr>
-            <a:spLocks xmlns:a="http://schemas.openxmlformats.org/drawingml/2006/main" noGrp="1"/>
-          </p:cNvSpPr>
-          <p:nvPr/>
-        </p:nvSpPr>
-        <p:spPr>
-          <a:xfrm xmlns:a="http://schemas.openxmlformats.org/drawingml/2006/main">
-            <a:off x="762000" y="5676900"/>
-            <a:ext cx="7620000" cy="352425"/>
-          </a:xfrm>
-          <a:prstGeom xmlns:a="http://schemas.openxmlformats.org/drawingml/2006/main" prst="rect">
-            <a:avLst/>
-          </a:prstGeom>
-          <a:noFill xmlns:a="http://schemas.openxmlformats.org/drawingml/2006/main"/>
-          <a:ln xmlns:a="http://schemas.openxmlformats.org/drawingml/2006/main" w="0">
-            <a:noFill/>
-          </a:ln>
-        </p:spPr>
-        <p:txBody>
-          <a:bodyPr xmlns:a="http://schemas.openxmlformats.org/drawingml/2006/main" wrap="square" lIns="0" tIns="0" rIns="0" bIns="0" anchor="t">
-            <a:noAutofit/>
-          </a:bodyPr>
-          <a:lstStyle xmlns:a="http://schemas.openxmlformats.org/drawingml/2006/main"/>
-          <a:p xmlns:a="http://schemas.openxmlformats.org/drawingml/2006/main">
-            <a:pPr algn="l">
-              <a:buNone/>
-              <a:defRPr sz="1800" b="0">
-                <a:solidFill>
-                  <a:srgbClr val="111111"/>
-                </a:solidFill>
-                <a:latin typeface="Calibri"/>
-                <a:ea typeface="Calibri"/>
-                <a:cs typeface="Calibri"/>
-              </a:defRPr>
-            </a:pPr>
-            <a:r>
-              <a:rPr sz="1800" b="0">
-                <a:solidFill>
-                  <a:srgbClr val="111111"/>
-                </a:solidFill>
-                <a:latin typeface="Calibri"/>
-                <a:ea typeface="Calibri"/>
-                <a:cs typeface="Calibri"/>
-              </a:rPr>
-              <a:t>Källor och lärarstöd finns även i bildanteckningarna.</a:t>
             </a:r>
           </a:p>
         </p:txBody>

--- a/sjoskolan/vecka-43/aktuell/v43_03_Elscheman_och_dokumentation_elev.pptx
+++ b/sjoskolan/vecka-43/aktuell/v43_03_Elscheman_och_dokumentation_elev.pptx
@@ -8674,7 +8674,7 @@
                 <a:ea typeface="Calibri"/>
                 <a:cs typeface="Calibri"/>
               </a:rPr>
-              <a:t>Full matningsspänning över en öppen kontakt kan vara normalt</a:t>
+              <a:t>Vad bör en öppen kontakt visa i ditt driftläge?</a:t>
             </a:r>
           </a:p>
         </p:txBody>
@@ -9481,7 +9481,7 @@
                 <a:ea typeface="Calibri"/>
                 <a:cs typeface="Calibri"/>
               </a:rPr>
-              <a:t> = 9 − </a:t>
+              <a:t> = 9 V − </a:t>
             </a:r>
             <a:r>
               <a:rPr sz="2325" b="1">
@@ -9721,15 +9721,15 @@
               </a:defRPr>
             </a:pPr>
             <a:r>
-              <a:rPr sz="1550" b="0">
-                <a:solidFill>
-                  <a:srgbClr val="111111"/>
-                </a:solidFill>
-                <a:latin typeface="Calibri"/>
-                <a:ea typeface="Calibri"/>
-                <a:cs typeface="Calibri"/>
-              </a:rPr>
-              <a:t>Kontaktens matningssida har 9 V och lastsidan 0 V. Stor kontaktspänning kan alltså tyda på avbrott.</a:t>
+              <a:rPr sz="1913" b="0">
+                <a:solidFill>
+                  <a:srgbClr val="111111"/>
+                </a:solidFill>
+                <a:latin typeface="Calibri"/>
+                <a:ea typeface="Calibri"/>
+                <a:cs typeface="Calibri"/>
+              </a:rPr>
+              <a:t>Stor spänning över en kontakt kan tyda på avbrott.</a:t>
             </a:r>
           </a:p>
         </p:txBody>
@@ -10160,7 +10160,7 @@
                 <a:ea typeface="Calibri"/>
                 <a:cs typeface="Calibri"/>
               </a:rPr>
-              <a:t>Returen håller spolens ena sida på 0 V. Utan ström blir spänningsfallet över den ideala resistiva spolen noll.</a:t>
+              <a:t>Vilka punkter är förbundna med matningen och vilka med returen?</a:t>
             </a:r>
           </a:p>
         </p:txBody>
@@ -10985,7 +10985,7 @@
                 <a:ea typeface="Calibri"/>
                 <a:cs typeface="Calibri"/>
               </a:rPr>
-              <a:t>Slutna ideala kontakter har försumbart spänningsfall. Hela källspänningen kan då ligga över spolen.</a:t>
+              <a:t>Slutna ideala kontakter har försumbart spänningsfall. Vilken potential har spolens två sidor?</a:t>
             </a:r>
           </a:p>
         </p:txBody>
@@ -11810,7 +11810,7 @@
                 <a:ea typeface="Calibri"/>
                 <a:cs typeface="Calibri"/>
               </a:rPr>
-              <a:t>Öppen serieväg ger I = 0. Lasten får då inget resistivt spänningsfall och dess anslutning når returpotential.</a:t>
+              <a:t>Öppen serieväg ger I = 0. Vad betyder det för spänningsfallet i spolen?</a:t>
             </a:r>
           </a:p>
         </p:txBody>
@@ -20940,30 +20940,7 @@
                 <a:ea typeface="Calibri"/>
                 <a:cs typeface="Calibri"/>
               </a:rPr>
-              <a:t>2. K1 drar och dess NO-hjälpkontakt sluter.</a:t>
-            </a:r>
-          </a:p>
-          <a:p xmlns:a="http://schemas.openxmlformats.org/drawingml/2006/main">
-            <a:pPr algn="l">
-              <a:defRPr sz="2063" b="0">
-                <a:solidFill>
-                  <a:srgbClr val="111111"/>
-                </a:solidFill>
-                <a:latin typeface="Calibri"/>
-                <a:ea typeface="Calibri"/>
-                <a:cs typeface="Calibri"/>
-              </a:defRPr>
-            </a:pPr>
-            <a:r>
-              <a:rPr sz="2063" b="0">
-                <a:solidFill>
-                  <a:srgbClr val="111111"/>
-                </a:solidFill>
-                <a:latin typeface="Calibri"/>
-                <a:ea typeface="Calibri"/>
-                <a:cs typeface="Calibri"/>
-              </a:rPr>
-              <a:t>3. START släpps, men K1:s slutna kontakt behåller vägen.</a:t>
+              <a:t>2. K1 drar.</a:t>
             </a:r>
           </a:p>
         </p:txBody>
@@ -21020,7 +20997,7 @@
                 <a:ea typeface="Calibri"/>
                 <a:cs typeface="Calibri"/>
               </a:rPr>
-              <a:t>När STOPP öppnar bryts den gemensamma vägen och K1 släpper. Detta återställer viloläget.</a:t>
+              <a:t>Vad som händer när START släpps och när STOPP trycks utreds i övningarna. Vid strömavbrott släpper K1.</a:t>
             </a:r>
           </a:p>
         </p:txBody>

--- a/sjoskolan/vecka-43/aktuell/v43_03_Elscheman_och_dokumentation_elev.pptx
+++ b/sjoskolan/vecka-43/aktuell/v43_03_Elscheman_och_dokumentation_elev.pptx
@@ -3842,7 +3842,7 @@
                 <a:ea typeface="Calibri"/>
                 <a:cs typeface="Calibri"/>
               </a:rPr>
-              <a:t>NO = normalt öppen     NC = normalt sluten</a:t>
+              <a:t>NO = normalt öppen; NC = normalt sluten</a:t>
             </a:r>
           </a:p>
         </p:txBody>
@@ -3899,7 +3899,7 @@
                 <a:ea typeface="Calibri"/>
                 <a:cs typeface="Calibri"/>
               </a:rPr>
-              <a:t>Normalläget avser den angivna opåverkade apparaten. En kontakt visas då i sitt utgångsläge.</a:t>
+              <a:t>I schemat ritas kontakten i det läge den har när apparaten inte är påverkad.</a:t>
             </a:r>
           </a:p>
         </p:txBody>
@@ -3956,7 +3956,7 @@
                 <a:ea typeface="Calibri"/>
                 <a:cs typeface="Calibri"/>
               </a:rPr>
-              <a:t>Förutsättningar: Inget startkommando eller manöverpåverkan antas i frågan.</a:t>
+              <a:t>Förutsättningar: Ingen har tryckt på något och spolen är strömlös.</a:t>
             </a:r>
           </a:p>
         </p:txBody>
@@ -4290,7 +4290,7 @@
                 <a:ea typeface="Calibri"/>
                 <a:cs typeface="Calibri"/>
               </a:rPr>
-              <a:t>Vad betyder NO och NC när en apparat visas i opåverkat tillstånd?</a:t>
+              <a:t>Vad betyder NO och NC när en apparat är ritad i opåverkat läge?</a:t>
             </a:r>
           </a:p>
         </p:txBody>
@@ -4623,7 +4623,7 @@
                 <a:ea typeface="Calibri"/>
                 <a:cs typeface="Calibri"/>
               </a:rPr>
-              <a:t>En reläspole och dess kontakter kan ritas på olika ställen men ha samma objekt-ID.</a:t>
+              <a:t>Ett reläs spole och kontakter kan ritas på olika ställen men har samma beteckning.</a:t>
             </a:r>
           </a:p>
         </p:txBody>
@@ -4680,7 +4680,7 @@
                 <a:ea typeface="Calibri"/>
                 <a:cs typeface="Calibri"/>
               </a:rPr>
-              <a:t>Förutsättningar: K1 förekommer vid spole och kontakt på olika schemasidor.</a:t>
+              <a:t>Förutsättningar: K1 står vid en spole och vid en kontakt, på olika schemasidor.</a:t>
             </a:r>
           </a:p>
         </p:txBody>
@@ -4737,7 +4737,7 @@
                 <a:ea typeface="Calibri"/>
                 <a:cs typeface="Calibri"/>
               </a:rPr>
-              <a:t>Arbetsgång: Förklara sambandet mellan symbolerna och hur korsreferensen hjälper dig hitta den andra delen.</a:t>
+              <a:t>Arbetsgång: Förklara hur symbolerna hör ihop och hur korsreferensen hjälper dig att hitta den andra delen.</a:t>
             </a:r>
           </a:p>
         </p:txBody>
@@ -5347,7 +5347,7 @@
                 <a:ea typeface="Calibri"/>
                 <a:cs typeface="Calibri"/>
               </a:rPr>
-              <a:t>När K1 drar sluter dess NO-kontakt. Den kan behålla matningen när START återgår till öppet läge.</a:t>
+              <a:t>När K1 drar sluter dess NO-kontakt, och den kan hålla kvar matningen när START går tillbaka till öppet läge.</a:t>
             </a:r>
           </a:p>
         </p:txBody>
@@ -5404,7 +5404,7 @@
                 <a:ea typeface="Calibri"/>
                 <a:cs typeface="Calibri"/>
               </a:rPr>
-              <a:t>Förutsättningar: S0 och returen är hela. K1:s kontakt ligger parallellt med S1 START.</a:t>
+              <a:t>Förutsättningar: S0 och returen är hela. K1:s kontakt ligger parallellt med START-knappen S1.</a:t>
             </a:r>
           </a:p>
         </p:txBody>
@@ -5461,7 +5461,7 @@
                 <a:ea typeface="Calibri"/>
                 <a:cs typeface="Calibri"/>
               </a:rPr>
-              <a:t>Arbetsgång: Följ strömvägen före start, under start och efter att S1 släpps.</a:t>
+              <a:t>Arbetsgång: Följ strömvägen före start, under start och efter att S1 har släppts.</a:t>
             </a:r>
           </a:p>
         </p:txBody>
@@ -6071,7 +6071,7 @@
                 <a:ea typeface="Calibri"/>
                 <a:cs typeface="Calibri"/>
               </a:rPr>
-              <a:t>Om S0 ligger före förgreningen måste både START-vägen och hållvägen passera S0.</a:t>
+              <a:t>Om S0 ligger före förgreningen måste både START-vägen och hållvägen gå genom S0.</a:t>
             </a:r>
           </a:p>
         </p:txBody>
@@ -6128,7 +6128,7 @@
                 <a:ea typeface="Calibri"/>
                 <a:cs typeface="Calibri"/>
               </a:rPr>
-              <a:t>Förutsättningar: STOPP är NC i vila. START och hållkontakt ligger parallellt efter STOPP.</a:t>
+              <a:t>Förutsättningar: STOPP är sluten (NC) i vila. START och hållkontakten ligger parallellt efter STOPP.</a:t>
             </a:r>
           </a:p>
         </p:txBody>
@@ -6185,7 +6185,7 @@
                 <a:ea typeface="Calibri"/>
                 <a:cs typeface="Calibri"/>
               </a:rPr>
-              <a:t>Arbetsgång: Följ båda vägarna när S0 öppnar. Motivera varför placeringen gör att båda bryts.</a:t>
+              <a:t>Arbetsgång: Följ båda vägarna när S0 öppnar och förklara varför båda då bryts.</a:t>
             </a:r>
           </a:p>
         </p:txBody>
@@ -6795,7 +6795,7 @@
                 <a:ea typeface="Calibri"/>
                 <a:cs typeface="Calibri"/>
               </a:rPr>
-              <a:t>En plintlista kopplar terminalbeteckningar till ledare och apparater.</a:t>
+              <a:t>En plintlista kopplar plintnummer till ledare och apparater.</a:t>
             </a:r>
           </a:p>
         </p:txBody>
@@ -6852,7 +6852,7 @@
                 <a:ea typeface="Calibri"/>
                 <a:cs typeface="Calibri"/>
               </a:rPr>
-              <a:t>Förutsättningar: Uppgiften är att hitta en ledares faktiska anslutningsplint.</a:t>
+              <a:t>Förutsättningar: Du ska hitta den plint som ledaren faktiskt är ansluten till.</a:t>
             </a:r>
           </a:p>
         </p:txBody>
@@ -6909,7 +6909,7 @@
                 <a:ea typeface="Calibri"/>
                 <a:cs typeface="Calibri"/>
               </a:rPr>
-              <a:t>Arbetsgång: Välj underlag som visar fysisk förbindning och förklara vad funktionsschemat tillför.</a:t>
+              <a:t>Arbetsgång: Välj det underlag som visar hur ledarna faktiskt är dragna och förklara vad kretsschemat tillför.</a:t>
             </a:r>
           </a:p>
         </p:txBody>
@@ -9970,40 +9970,7 @@
                 <a:ea typeface="Calibri"/>
                 <a:cs typeface="Calibri"/>
               </a:rPr>
-              <a:t>Öppen matningsväg ger </a:t>
-            </a:r>
-            <a:r>
-              <a:rPr sz="2400" b="1">
-                <a:solidFill>
-                  <a:srgbClr val="064F91"/>
-                </a:solidFill>
-                <a:latin typeface="Calibri"/>
-                <a:ea typeface="Calibri"/>
-                <a:cs typeface="Calibri"/>
-              </a:rPr>
-              <a:t>I</a:t>
-            </a:r>
-            <a:r>
-              <a:rPr sz="2400" b="1" baseline="-25000">
-                <a:solidFill>
-                  <a:srgbClr val="064F91"/>
-                </a:solidFill>
-                <a:latin typeface="Calibri"/>
-                <a:ea typeface="Calibri"/>
-                <a:cs typeface="Calibri"/>
-              </a:rPr>
-              <a:t>spole</a:t>
-            </a:r>
-            <a:r>
-              <a:rPr sz="2400" b="1">
-                <a:solidFill>
-                  <a:srgbClr val="064F91"/>
-                </a:solidFill>
-                <a:latin typeface="Calibri"/>
-                <a:ea typeface="Calibri"/>
-                <a:cs typeface="Calibri"/>
-              </a:rPr>
-              <a:t> = 0</a:t>
+              <a:t>Öppen matningsväg ger Ispole = 0</a:t>
             </a:r>
           </a:p>
           <a:p xmlns:a="http://schemas.openxmlformats.org/drawingml/2006/main">
@@ -10026,84 +9993,7 @@
                 <a:ea typeface="Calibri"/>
                 <a:cs typeface="Calibri"/>
               </a:rPr>
-              <a:t>U</a:t>
-            </a:r>
-            <a:r>
-              <a:rPr sz="2400" b="1" baseline="-25000">
-                <a:solidFill>
-                  <a:srgbClr val="064F91"/>
-                </a:solidFill>
-                <a:latin typeface="Calibri"/>
-                <a:ea typeface="Calibri"/>
-                <a:cs typeface="Calibri"/>
-              </a:rPr>
-              <a:t>spole</a:t>
-            </a:r>
-            <a:r>
-              <a:rPr sz="2400" b="1">
-                <a:solidFill>
-                  <a:srgbClr val="064F91"/>
-                </a:solidFill>
-                <a:latin typeface="Calibri"/>
-                <a:ea typeface="Calibri"/>
-                <a:cs typeface="Calibri"/>
-              </a:rPr>
-              <a:t> = </a:t>
-            </a:r>
-            <a:r>
-              <a:rPr sz="2400" b="1">
-                <a:solidFill>
-                  <a:srgbClr val="064F91"/>
-                </a:solidFill>
-                <a:latin typeface="Calibri"/>
-                <a:ea typeface="Calibri"/>
-                <a:cs typeface="Calibri"/>
-              </a:rPr>
-              <a:t>R</a:t>
-            </a:r>
-            <a:r>
-              <a:rPr sz="2400" b="1" baseline="-25000">
-                <a:solidFill>
-                  <a:srgbClr val="064F91"/>
-                </a:solidFill>
-                <a:latin typeface="Calibri"/>
-                <a:ea typeface="Calibri"/>
-                <a:cs typeface="Calibri"/>
-              </a:rPr>
-              <a:t>spole</a:t>
-            </a:r>
-            <a:r>
-              <a:rPr sz="2400" b="1">
-                <a:solidFill>
-                  <a:srgbClr val="064F91"/>
-                </a:solidFill>
-                <a:latin typeface="Calibri"/>
-                <a:ea typeface="Calibri"/>
-                <a:cs typeface="Calibri"/>
-              </a:rPr>
-              <a:t> · </a:t>
-            </a:r>
-            <a:r>
-              <a:rPr sz="2400" b="1">
-                <a:solidFill>
-                  <a:srgbClr val="064F91"/>
-                </a:solidFill>
-                <a:latin typeface="Calibri"/>
-                <a:ea typeface="Calibri"/>
-                <a:cs typeface="Calibri"/>
-              </a:rPr>
-              <a:t>I</a:t>
-            </a:r>
-            <a:r>
-              <a:rPr sz="2400" b="1" baseline="-25000">
-                <a:solidFill>
-                  <a:srgbClr val="064F91"/>
-                </a:solidFill>
-                <a:latin typeface="Calibri"/>
-                <a:ea typeface="Calibri"/>
-                <a:cs typeface="Calibri"/>
-              </a:rPr>
-              <a:t>spole</a:t>
+              <a:t>Uspole = Rspole · Ispole</a:t>
             </a:r>
           </a:p>
         </p:txBody>
@@ -10217,7 +10107,7 @@
                 <a:ea typeface="Calibri"/>
                 <a:cs typeface="Calibri"/>
               </a:rPr>
-              <a:t>Förutsättningar: 12 V-krets, STOPP sluten, START öppen, K1 i vila och hel retur. Ingen annan matning finns.</a:t>
+              <a:t>Förutsättningar: 12 V, STOPP sluten, START öppen, K1 i vila och hel retur. Det finns ingen annan matning.</a:t>
             </a:r>
           </a:p>
         </p:txBody>
@@ -10551,7 +10441,7 @@
                 <a:ea typeface="Calibri"/>
                 <a:cs typeface="Calibri"/>
               </a:rPr>
-              <a:t>I 12 V-hållkretsen är STOPP sluten, START öppen och K1 opåverkad. Returen är hel. Vilken ideal spänning finns över K1-spolen?</a:t>
+              <a:t>I 12 V-hållkretsen är STOPP sluten, START öppen och K1 opåverkad. Returen är hel. Vilken spänning ligger över K1-spolen (idealt)?</a:t>
             </a:r>
           </a:p>
         </p:txBody>
@@ -10851,84 +10741,7 @@
                 <a:ea typeface="Calibri"/>
                 <a:cs typeface="Calibri"/>
               </a:rPr>
-              <a:t>U</a:t>
-            </a:r>
-            <a:r>
-              <a:rPr sz="2400" b="1" baseline="-25000">
-                <a:solidFill>
-                  <a:srgbClr val="064F91"/>
-                </a:solidFill>
-                <a:latin typeface="Calibri"/>
-                <a:ea typeface="Calibri"/>
-                <a:cs typeface="Calibri"/>
-              </a:rPr>
-              <a:t>spole</a:t>
-            </a:r>
-            <a:r>
-              <a:rPr sz="2400" b="1">
-                <a:solidFill>
-                  <a:srgbClr val="064F91"/>
-                </a:solidFill>
-                <a:latin typeface="Calibri"/>
-                <a:ea typeface="Calibri"/>
-                <a:cs typeface="Calibri"/>
-              </a:rPr>
-              <a:t> = </a:t>
-            </a:r>
-            <a:r>
-              <a:rPr sz="2400" b="1">
-                <a:solidFill>
-                  <a:srgbClr val="064F91"/>
-                </a:solidFill>
-                <a:latin typeface="Calibri"/>
-                <a:ea typeface="Calibri"/>
-                <a:cs typeface="Calibri"/>
-              </a:rPr>
-              <a:t>V</a:t>
-            </a:r>
-            <a:r>
-              <a:rPr sz="2400" b="1" baseline="-25000">
-                <a:solidFill>
-                  <a:srgbClr val="064F91"/>
-                </a:solidFill>
-                <a:latin typeface="Calibri"/>
-                <a:ea typeface="Calibri"/>
-                <a:cs typeface="Calibri"/>
-              </a:rPr>
-              <a:t>matningssida</a:t>
-            </a:r>
-            <a:r>
-              <a:rPr sz="2400" b="1">
-                <a:solidFill>
-                  <a:srgbClr val="064F91"/>
-                </a:solidFill>
-                <a:latin typeface="Calibri"/>
-                <a:ea typeface="Calibri"/>
-                <a:cs typeface="Calibri"/>
-              </a:rPr>
-              <a:t> − </a:t>
-            </a:r>
-            <a:r>
-              <a:rPr sz="2400" b="1">
-                <a:solidFill>
-                  <a:srgbClr val="064F91"/>
-                </a:solidFill>
-                <a:latin typeface="Calibri"/>
-                <a:ea typeface="Calibri"/>
-                <a:cs typeface="Calibri"/>
-              </a:rPr>
-              <a:t>V</a:t>
-            </a:r>
-            <a:r>
-              <a:rPr sz="2400" b="1" baseline="-25000">
-                <a:solidFill>
-                  <a:srgbClr val="064F91"/>
-                </a:solidFill>
-                <a:latin typeface="Calibri"/>
-                <a:ea typeface="Calibri"/>
-                <a:cs typeface="Calibri"/>
-              </a:rPr>
-              <a:t>retur</a:t>
+              <a:t>Uspole = Vmatningssida − Vretur</a:t>
             </a:r>
           </a:p>
         </p:txBody>
@@ -11042,7 +10855,7 @@
                 <a:ea typeface="Calibri"/>
                 <a:cs typeface="Calibri"/>
               </a:rPr>
-              <a:t>Förutsättningar: 12 V-krets, START och STOPP slutna, hel retur.</a:t>
+              <a:t>Förutsättningar: 12 V, START och STOPP slutna, hel retur.</a:t>
             </a:r>
           </a:p>
         </p:txBody>
@@ -11376,7 +11189,7 @@
                 <a:ea typeface="Calibri"/>
                 <a:cs typeface="Calibri"/>
               </a:rPr>
-              <a:t>Samma krets. START sluts, STOPP och retur är hela. Vilken ideal spänning finns över K1-spolen?</a:t>
+              <a:t>Samma krets. START sluts, och STOPP och returen är hela. Vilken spänning ligger över K1-spolen (idealt)?</a:t>
             </a:r>
           </a:p>
         </p:txBody>
@@ -11676,84 +11489,7 @@
                 <a:ea typeface="Calibri"/>
                 <a:cs typeface="Calibri"/>
               </a:rPr>
-              <a:t>U</a:t>
-            </a:r>
-            <a:r>
-              <a:rPr sz="2400" b="1" baseline="-25000">
-                <a:solidFill>
-                  <a:srgbClr val="064F91"/>
-                </a:solidFill>
-                <a:latin typeface="Calibri"/>
-                <a:ea typeface="Calibri"/>
-                <a:cs typeface="Calibri"/>
-              </a:rPr>
-              <a:t>öppen kontakt</a:t>
-            </a:r>
-            <a:r>
-              <a:rPr sz="2400" b="1">
-                <a:solidFill>
-                  <a:srgbClr val="064F91"/>
-                </a:solidFill>
-                <a:latin typeface="Calibri"/>
-                <a:ea typeface="Calibri"/>
-                <a:cs typeface="Calibri"/>
-              </a:rPr>
-              <a:t> = </a:t>
-            </a:r>
-            <a:r>
-              <a:rPr sz="2400" b="1">
-                <a:solidFill>
-                  <a:srgbClr val="064F91"/>
-                </a:solidFill>
-                <a:latin typeface="Calibri"/>
-                <a:ea typeface="Calibri"/>
-                <a:cs typeface="Calibri"/>
-              </a:rPr>
-              <a:t>V</a:t>
-            </a:r>
-            <a:r>
-              <a:rPr sz="2400" b="1" baseline="-25000">
-                <a:solidFill>
-                  <a:srgbClr val="064F91"/>
-                </a:solidFill>
-                <a:latin typeface="Calibri"/>
-                <a:ea typeface="Calibri"/>
-                <a:cs typeface="Calibri"/>
-              </a:rPr>
-              <a:t>före</a:t>
-            </a:r>
-            <a:r>
-              <a:rPr sz="2400" b="1">
-                <a:solidFill>
-                  <a:srgbClr val="064F91"/>
-                </a:solidFill>
-                <a:latin typeface="Calibri"/>
-                <a:ea typeface="Calibri"/>
-                <a:cs typeface="Calibri"/>
-              </a:rPr>
-              <a:t> − </a:t>
-            </a:r>
-            <a:r>
-              <a:rPr sz="2400" b="1">
-                <a:solidFill>
-                  <a:srgbClr val="064F91"/>
-                </a:solidFill>
-                <a:latin typeface="Calibri"/>
-                <a:ea typeface="Calibri"/>
-                <a:cs typeface="Calibri"/>
-              </a:rPr>
-              <a:t>V</a:t>
-            </a:r>
-            <a:r>
-              <a:rPr sz="2400" b="1" baseline="-25000">
-                <a:solidFill>
-                  <a:srgbClr val="064F91"/>
-                </a:solidFill>
-                <a:latin typeface="Calibri"/>
-                <a:ea typeface="Calibri"/>
-                <a:cs typeface="Calibri"/>
-              </a:rPr>
-              <a:t>efter</a:t>
+              <a:t>Uöppen kontakt = Vföre − Vefter</a:t>
             </a:r>
           </a:p>
         </p:txBody>
@@ -11867,7 +11603,7 @@
                 <a:ea typeface="Calibri"/>
                 <a:cs typeface="Calibri"/>
               </a:rPr>
-              <a:t>Förutsättningar: 12 V, START sluten, STOPP öppen och hel retur genom spolen. Ideala ledningar och kontakter.</a:t>
+              <a:t>Förutsättningar: 12 V, START sluten, STOPP öppen och hel retur genom spolen. Ledningar och kontakter är ideala.</a:t>
             </a:r>
           </a:p>
         </p:txBody>
@@ -12715,7 +12451,7 @@
                 <a:ea typeface="Calibri"/>
                 <a:cs typeface="Calibri"/>
               </a:rPr>
-              <a:t>START hålls sluten medan STOPP öppnas. Matningen är 12 V och returen är hel. Vilken ideal spänning ligger över den öppna STOPP-kontakten?</a:t>
+              <a:t>START hålls sluten medan STOPP öppnas. Matningen är 12 V och returen är hel. Vilken spänning ligger över den öppna STOPP-kontakten (idealt)?</a:t>
             </a:r>
           </a:p>
         </p:txBody>
@@ -13072,7 +12808,7 @@
                 <a:ea typeface="Calibri"/>
                 <a:cs typeface="Calibri"/>
               </a:rPr>
-              <a:t>En avvikelse mellan ritning och anläggning kan göra tolkningen osäker.</a:t>
+              <a:t>När ritningen och anläggningen inte stämmer går det inte att lita på tolkningen.</a:t>
             </a:r>
           </a:p>
         </p:txBody>
@@ -13129,7 +12865,7 @@
                 <a:ea typeface="Calibri"/>
                 <a:cs typeface="Calibri"/>
               </a:rPr>
-              <a:t>Förutsättningar: Ritningen saknar revision. K2 finns fysiskt men saknas i schemat.</a:t>
+              <a:t>Förutsättningar: Ritningen saknar revisionsuppgift. K2 finns i anläggningen men inte i schemat.</a:t>
             </a:r>
           </a:p>
         </p:txBody>
@@ -13186,7 +12922,7 @@
                 <a:ea typeface="Calibri"/>
                 <a:cs typeface="Calibri"/>
               </a:rPr>
-              <a:t>Arbetsgång: Beskriv osäkerheten och vem som behöver klarlägga giltighet och uppdatering före vidare beslut.</a:t>
+              <a:t>Arbetsgång: Beskriv osäkerheten och vem som måste reda ut vilken ritning som gäller och uppdatera den innan arbetet fortsätter.</a:t>
             </a:r>
           </a:p>
         </p:txBody>
@@ -13463,7 +13199,7 @@
                 <a:ea typeface="Calibri"/>
                 <a:cs typeface="Calibri"/>
               </a:rPr>
-              <a:t>En ritning saknar revision och apparaten K2 finns på plats men inte i schemat. Vilken slutsats och åtgärd är rimlig?</a:t>
+              <a:t>En ritning saknar revisionsuppgift, och apparaten K2 finns på plats men inte i schemat. Vilken slutsats drar du och vad gör du?</a:t>
             </a:r>
           </a:p>
         </p:txBody>
@@ -13796,7 +13532,7 @@
                 <a:ea typeface="Calibri"/>
                 <a:cs typeface="Calibri"/>
               </a:rPr>
-              <a:t>K1 drar vid matad spole och släpper utan matning. NO-hållkontakten följer K1.</a:t>
+              <a:t>K1 drar när spolen får spänning och släpper när den blir strömlös. Hållkontakten följer K1.</a:t>
             </a:r>
           </a:p>
         </p:txBody>
@@ -13853,7 +13589,7 @@
                 <a:ea typeface="Calibri"/>
                 <a:cs typeface="Calibri"/>
               </a:rPr>
-              <a:t>Förutsättningar: S0 STOPP är NC och ligger i serie med S1 START parallellt med K1 NO. Returen är hel.</a:t>
+              <a:t>Förutsättningar: STOPP-knappen S0 (NC) ligger i serie med START-knappen S1, som i sin tur ligger parallellt med K1:s hållkontakt (NO). Returen är hel.</a:t>
             </a:r>
           </a:p>
         </p:txBody>
@@ -13910,7 +13646,7 @@
                 <a:ea typeface="Calibri"/>
                 <a:cs typeface="Calibri"/>
               </a:rPr>
-              <a:t>Arbetsgång: Beskriv kontaktlägen och strömväg i varje tillstånd. Förklara vad som förändras när en knapp släpps.</a:t>
+              <a:t>Arbetsgång: Beskriv kontakternas lägen och strömvägen i varje läge och förklara vad som ändras när en knapp släpps.</a:t>
             </a:r>
           </a:p>
         </p:txBody>

--- a/sjoskolan/vecka-43/aktuell/v43_03_Elscheman_och_dokumentation_elev.pptx
+++ b/sjoskolan/vecka-43/aktuell/v43_03_Elscheman_och_dokumentation_elev.pptx
@@ -3785,7 +3785,7 @@
                 <a:ea typeface="Calibri"/>
                 <a:cs typeface="Calibri"/>
               </a:rPr>
-              <a:t>Stöd till övning 1</a:t>
+              <a:t>Stöd till övning 3.1</a:t>
             </a:r>
           </a:p>
         </p:txBody>
@@ -4174,7 +4174,7 @@
                 <a:ea typeface="Calibri"/>
                 <a:cs typeface="Calibri"/>
               </a:rPr>
-              <a:t>Övning 1</a:t>
+              <a:t>Övning 3.1</a:t>
             </a:r>
           </a:p>
         </p:txBody>
@@ -4509,7 +4509,7 @@
                 <a:ea typeface="Calibri"/>
                 <a:cs typeface="Calibri"/>
               </a:rPr>
-              <a:t>Stöd till övning 2</a:t>
+              <a:t>Stöd till övning 3.2</a:t>
             </a:r>
           </a:p>
         </p:txBody>
@@ -4898,7 +4898,7 @@
                 <a:ea typeface="Calibri"/>
                 <a:cs typeface="Calibri"/>
               </a:rPr>
-              <a:t>Övning 2</a:t>
+              <a:t>Övning 3.2</a:t>
             </a:r>
           </a:p>
         </p:txBody>
@@ -5233,7 +5233,7 @@
                 <a:ea typeface="Calibri"/>
                 <a:cs typeface="Calibri"/>
               </a:rPr>
-              <a:t>Stöd till övning 3</a:t>
+              <a:t>Stöd till övning 3.3</a:t>
             </a:r>
           </a:p>
         </p:txBody>
@@ -5622,7 +5622,7 @@
                 <a:ea typeface="Calibri"/>
                 <a:cs typeface="Calibri"/>
               </a:rPr>
-              <a:t>Övning 3</a:t>
+              <a:t>Övning 3.3</a:t>
             </a:r>
           </a:p>
         </p:txBody>
@@ -5957,7 +5957,7 @@
                 <a:ea typeface="Calibri"/>
                 <a:cs typeface="Calibri"/>
               </a:rPr>
-              <a:t>Stöd till övning 4</a:t>
+              <a:t>Stöd till övning 3.4</a:t>
             </a:r>
           </a:p>
         </p:txBody>
@@ -6346,7 +6346,7 @@
                 <a:ea typeface="Calibri"/>
                 <a:cs typeface="Calibri"/>
               </a:rPr>
-              <a:t>Övning 4</a:t>
+              <a:t>Övning 3.4</a:t>
             </a:r>
           </a:p>
         </p:txBody>
@@ -6681,7 +6681,7 @@
                 <a:ea typeface="Calibri"/>
                 <a:cs typeface="Calibri"/>
               </a:rPr>
-              <a:t>Stöd till övning 5</a:t>
+              <a:t>Stöd till övning 3.5</a:t>
             </a:r>
           </a:p>
         </p:txBody>
@@ -7070,7 +7070,7 @@
                 <a:ea typeface="Calibri"/>
                 <a:cs typeface="Calibri"/>
               </a:rPr>
-              <a:t>Övning 5</a:t>
+              <a:t>Övning 3.5</a:t>
             </a:r>
           </a:p>
         </p:txBody>
@@ -9913,7 +9913,7 @@
                 <a:ea typeface="Calibri"/>
                 <a:cs typeface="Calibri"/>
               </a:rPr>
-              <a:t>Stöd till övning 6</a:t>
+              <a:t>Stöd till övning 3.6</a:t>
             </a:r>
           </a:p>
         </p:txBody>
@@ -10325,7 +10325,7 @@
                 <a:ea typeface="Calibri"/>
                 <a:cs typeface="Calibri"/>
               </a:rPr>
-              <a:t>Övning 6</a:t>
+              <a:t>Övning 3.6</a:t>
             </a:r>
           </a:p>
         </p:txBody>
@@ -10684,7 +10684,7 @@
                 <a:ea typeface="Calibri"/>
                 <a:cs typeface="Calibri"/>
               </a:rPr>
-              <a:t>Stöd till övning 7</a:t>
+              <a:t>Stöd till övning 3.7</a:t>
             </a:r>
           </a:p>
         </p:txBody>
@@ -11073,7 +11073,7 @@
                 <a:ea typeface="Calibri"/>
                 <a:cs typeface="Calibri"/>
               </a:rPr>
-              <a:t>Övning 7</a:t>
+              <a:t>Övning 3.7</a:t>
             </a:r>
           </a:p>
         </p:txBody>
@@ -11432,7 +11432,7 @@
                 <a:ea typeface="Calibri"/>
                 <a:cs typeface="Calibri"/>
               </a:rPr>
-              <a:t>Stöd till övning 8</a:t>
+              <a:t>Stöd till övning 3.8</a:t>
             </a:r>
           </a:p>
         </p:txBody>
@@ -12335,7 +12335,7 @@
                 <a:ea typeface="Calibri"/>
                 <a:cs typeface="Calibri"/>
               </a:rPr>
-              <a:t>Övning 8</a:t>
+              <a:t>Övning 3.8</a:t>
             </a:r>
           </a:p>
         </p:txBody>
@@ -12694,7 +12694,7 @@
                 <a:ea typeface="Calibri"/>
                 <a:cs typeface="Calibri"/>
               </a:rPr>
-              <a:t>Stöd till övning 9</a:t>
+              <a:t>Stöd till övning 3.9</a:t>
             </a:r>
           </a:p>
         </p:txBody>
@@ -13083,7 +13083,7 @@
                 <a:ea typeface="Calibri"/>
                 <a:cs typeface="Calibri"/>
               </a:rPr>
-              <a:t>Övning 9</a:t>
+              <a:t>Övning 3.9</a:t>
             </a:r>
           </a:p>
         </p:txBody>
@@ -13418,7 +13418,7 @@
                 <a:ea typeface="Calibri"/>
                 <a:cs typeface="Calibri"/>
               </a:rPr>
-              <a:t>Stöd till övning 10</a:t>
+              <a:t>Stöd till övning 3.10</a:t>
             </a:r>
           </a:p>
         </p:txBody>
@@ -13807,7 +13807,7 @@
                 <a:ea typeface="Calibri"/>
                 <a:cs typeface="Calibri"/>
               </a:rPr>
-              <a:t>Övning 10</a:t>
+              <a:t>Övning 3.10</a:t>
             </a:r>
           </a:p>
         </p:txBody>

--- a/sjoskolan/vecka-43/aktuell/v43_03_Elscheman_och_dokumentation_elev.pptx
+++ b/sjoskolan/vecka-43/aktuell/v43_03_Elscheman_och_dokumentation_elev.pptx
@@ -3512,6 +3512,10 @@
             <a:noFill/>
           </a:ln>
         </p:spPr>
+        <p:txBody xmlns:a="http://schemas.openxmlformats.org/drawingml/2006/main">
+          <a:bodyPr/>
+          <a:p/>
+        </p:txBody>
       </p:sp>
       <p:sp>
         <p:nvSpPr>
@@ -7964,7 +7968,7 @@
                 <a:ea typeface="Calibri"/>
                 <a:cs typeface="Calibri"/>
               </a:rPr>
-              <a:t>Teori och exempel följs av övning 6–10.</a:t>
+              <a:t>Teori och exempel följs av övning 3.6–3.10.</a:t>
             </a:r>
           </a:p>
           <a:p xmlns:a="http://schemas.openxmlformats.org/drawingml/2006/main">
@@ -11957,7 +11961,7 @@
                 <a:ea typeface="Calibri"/>
                 <a:cs typeface="Calibri"/>
               </a:rPr>
-              <a:t>15 min övning 1, 2, 4, 5 min återkoppling</a:t>
+              <a:t>15 min övning 3.1, 3.2 och 3.4, 5 min återkoppling</a:t>
             </a:r>
           </a:p>
         </p:txBody>
@@ -12071,7 +12075,7 @@
                 <a:ea typeface="Calibri"/>
                 <a:cs typeface="Calibri"/>
               </a:rPr>
-              <a:t>20 min teori och exempel, 15 min övning 6, 7, 8</a:t>
+              <a:t>20 min teori och exempel, 15 min övning 3.6, 3.7 och 3.8</a:t>
             </a:r>
           </a:p>
           <a:p xmlns:a="http://schemas.openxmlformats.org/drawingml/2006/main">
@@ -15844,932 +15848,6 @@
       </p:sp>
       <p:sp>
         <p:nvSpPr>
-          <p:cNvPr id="4" name="">
-            <a:extLst xmlns:a="http://schemas.openxmlformats.org/drawingml/2006/main">
-              <a:ext uri="{FF2B5EF4-FFF2-40B4-BE49-F238E27FC236}">
-                <a16:creationId xmlns:a16="http://schemas.microsoft.com/office/drawing/2014/main" id="{216FD707-6A50-469B-A20C-743AFEFFB8A2}"/>
-              </a:ext>
-            </a:extLst>
-          </p:cNvPr>
-          <p:cNvSpPr>
-            <a:spLocks xmlns:a="http://schemas.openxmlformats.org/drawingml/2006/main" noGrp="1"/>
-          </p:cNvSpPr>
-          <p:nvPr/>
-        </p:nvSpPr>
-        <p:spPr>
-          <a:xfrm xmlns:a="http://schemas.openxmlformats.org/drawingml/2006/main" flipH="0" flipV="0">
-            <a:off x="2100461" y="2978547"/>
-            <a:ext cx="419695" cy="0"/>
-          </a:xfrm>
-          <a:prstGeom xmlns:a="http://schemas.openxmlformats.org/drawingml/2006/main" prst="line">
-            <a:avLst/>
-          </a:prstGeom>
-          <a:noFill xmlns:a="http://schemas.openxmlformats.org/drawingml/2006/main"/>
-          <a:ln xmlns:a="http://schemas.openxmlformats.org/drawingml/2006/main" w="20955">
-            <a:solidFill>
-              <a:srgbClr val="111111"/>
-            </a:solidFill>
-          </a:ln>
-        </p:spPr>
-      </p:sp>
-      <p:sp>
-        <p:nvSpPr>
-          <p:cNvPr id="5" name="">
-            <a:extLst xmlns:a="http://schemas.openxmlformats.org/drawingml/2006/main">
-              <a:ext uri="{FF2B5EF4-FFF2-40B4-BE49-F238E27FC236}">
-                <a16:creationId xmlns:a16="http://schemas.microsoft.com/office/drawing/2014/main" id="{515EA29E-3E56-4C7B-8461-A52D38DED0ED}"/>
-              </a:ext>
-            </a:extLst>
-          </p:cNvPr>
-          <p:cNvSpPr>
-            <a:spLocks xmlns:a="http://schemas.openxmlformats.org/drawingml/2006/main" noGrp="1"/>
-          </p:cNvSpPr>
-          <p:nvPr/>
-        </p:nvSpPr>
-        <p:spPr>
-          <a:xfrm xmlns:a="http://schemas.openxmlformats.org/drawingml/2006/main">
-            <a:off x="2520156" y="2875955"/>
-            <a:ext cx="466328" cy="205184"/>
-          </a:xfrm>
-          <a:prstGeom xmlns:a="http://schemas.openxmlformats.org/drawingml/2006/main" prst="rect">
-            <a:avLst/>
-          </a:prstGeom>
-          <a:solidFill xmlns:a="http://schemas.openxmlformats.org/drawingml/2006/main">
-            <a:srgbClr val="FFFFFF"/>
-          </a:solidFill>
-          <a:ln xmlns:a="http://schemas.openxmlformats.org/drawingml/2006/main" w="19050">
-            <a:solidFill>
-              <a:srgbClr val="111111"/>
-            </a:solidFill>
-          </a:ln>
-        </p:spPr>
-      </p:sp>
-      <p:sp>
-        <p:nvSpPr>
-          <p:cNvPr id="6" name="">
-            <a:extLst xmlns:a="http://schemas.openxmlformats.org/drawingml/2006/main">
-              <a:ext uri="{FF2B5EF4-FFF2-40B4-BE49-F238E27FC236}">
-                <a16:creationId xmlns:a16="http://schemas.microsoft.com/office/drawing/2014/main" id="{CBFD6120-E293-4D68-A1F9-96E3CBC0EDFF}"/>
-              </a:ext>
-            </a:extLst>
-          </p:cNvPr>
-          <p:cNvSpPr>
-            <a:spLocks xmlns:a="http://schemas.openxmlformats.org/drawingml/2006/main" noGrp="1"/>
-          </p:cNvSpPr>
-          <p:nvPr/>
-        </p:nvSpPr>
-        <p:spPr>
-          <a:xfrm xmlns:a="http://schemas.openxmlformats.org/drawingml/2006/main" flipH="0" flipV="0">
-            <a:off x="2986484" y="2978547"/>
-            <a:ext cx="419695" cy="0"/>
-          </a:xfrm>
-          <a:prstGeom xmlns:a="http://schemas.openxmlformats.org/drawingml/2006/main" prst="line">
-            <a:avLst/>
-          </a:prstGeom>
-          <a:noFill xmlns:a="http://schemas.openxmlformats.org/drawingml/2006/main"/>
-          <a:ln xmlns:a="http://schemas.openxmlformats.org/drawingml/2006/main" w="20955">
-            <a:solidFill>
-              <a:srgbClr val="111111"/>
-            </a:solidFill>
-          </a:ln>
-        </p:spPr>
-      </p:sp>
-      <p:sp>
-        <p:nvSpPr>
-          <p:cNvPr id="7" name="Resistor">
-            <a:extLst xmlns:a="http://schemas.openxmlformats.org/drawingml/2006/main">
-              <a:ext uri="{FF2B5EF4-FFF2-40B4-BE49-F238E27FC236}">
-                <a16:creationId xmlns:a16="http://schemas.microsoft.com/office/drawing/2014/main" id="{CD5D6BF2-E39C-4FFC-9F6E-930330B59D9A}"/>
-              </a:ext>
-            </a:extLst>
-          </p:cNvPr>
-          <p:cNvSpPr>
-            <a:spLocks xmlns:a="http://schemas.openxmlformats.org/drawingml/2006/main" noGrp="1"/>
-          </p:cNvSpPr>
-          <p:nvPr/>
-        </p:nvSpPr>
-        <p:spPr>
-          <a:xfrm xmlns:a="http://schemas.openxmlformats.org/drawingml/2006/main">
-            <a:off x="1988542" y="2521545"/>
-            <a:ext cx="1529556" cy="335756"/>
-          </a:xfrm>
-          <a:prstGeom xmlns:a="http://schemas.openxmlformats.org/drawingml/2006/main" prst="rect">
-            <a:avLst/>
-          </a:prstGeom>
-          <a:noFill xmlns:a="http://schemas.openxmlformats.org/drawingml/2006/main"/>
-          <a:ln xmlns:a="http://schemas.openxmlformats.org/drawingml/2006/main" w="0">
-            <a:noFill/>
-          </a:ln>
-        </p:spPr>
-        <p:txBody>
-          <a:bodyPr xmlns:a="http://schemas.openxmlformats.org/drawingml/2006/main" wrap="square" lIns="0" tIns="0" rIns="0" bIns="0" anchor="t">
-            <a:noAutofit/>
-          </a:bodyPr>
-          <a:lstStyle xmlns:a="http://schemas.openxmlformats.org/drawingml/2006/main"/>
-          <a:p xmlns:a="http://schemas.openxmlformats.org/drawingml/2006/main">
-            <a:pPr algn="ctr">
-              <a:buNone/>
-              <a:defRPr sz="1763" b="0">
-                <a:solidFill>
-                  <a:srgbClr val="111111"/>
-                </a:solidFill>
-                <a:latin typeface="Calibri"/>
-                <a:ea typeface="Calibri"/>
-                <a:cs typeface="Calibri"/>
-              </a:defRPr>
-            </a:pPr>
-            <a:r>
-              <a:rPr sz="1763" b="0">
-                <a:solidFill>
-                  <a:srgbClr val="111111"/>
-                </a:solidFill>
-                <a:latin typeface="Calibri"/>
-                <a:ea typeface="Calibri"/>
-                <a:cs typeface="Calibri"/>
-              </a:rPr>
-              <a:t>Resistor</a:t>
-            </a:r>
-          </a:p>
-        </p:txBody>
-      </p:sp>
-      <p:sp>
-        <p:nvSpPr>
-          <p:cNvPr id="8" name="">
-            <a:extLst xmlns:a="http://schemas.openxmlformats.org/drawingml/2006/main">
-              <a:ext uri="{FF2B5EF4-FFF2-40B4-BE49-F238E27FC236}">
-                <a16:creationId xmlns:a16="http://schemas.microsoft.com/office/drawing/2014/main" id="{8B5FEF54-077A-43C6-A821-BBC2A8A02D0A}"/>
-              </a:ext>
-            </a:extLst>
-          </p:cNvPr>
-          <p:cNvSpPr>
-            <a:spLocks xmlns:a="http://schemas.openxmlformats.org/drawingml/2006/main" noGrp="1"/>
-          </p:cNvSpPr>
-          <p:nvPr/>
-        </p:nvSpPr>
-        <p:spPr>
-          <a:xfrm xmlns:a="http://schemas.openxmlformats.org/drawingml/2006/main" flipH="0" flipV="0">
-            <a:off x="4292203" y="2978547"/>
-            <a:ext cx="279797" cy="0"/>
-          </a:xfrm>
-          <a:prstGeom xmlns:a="http://schemas.openxmlformats.org/drawingml/2006/main" prst="line">
-            <a:avLst/>
-          </a:prstGeom>
-          <a:noFill xmlns:a="http://schemas.openxmlformats.org/drawingml/2006/main"/>
-          <a:ln xmlns:a="http://schemas.openxmlformats.org/drawingml/2006/main" w="20955">
-            <a:solidFill>
-              <a:srgbClr val="111111"/>
-            </a:solidFill>
-          </a:ln>
-        </p:spPr>
-      </p:sp>
-      <p:sp>
-        <p:nvSpPr>
-          <p:cNvPr id="9" name="">
-            <a:extLst xmlns:a="http://schemas.openxmlformats.org/drawingml/2006/main">
-              <a:ext uri="{FF2B5EF4-FFF2-40B4-BE49-F238E27FC236}">
-                <a16:creationId xmlns:a16="http://schemas.microsoft.com/office/drawing/2014/main" id="{74F6D69B-BED5-4F9A-9495-A19C4169E4F5}"/>
-              </a:ext>
-            </a:extLst>
-          </p:cNvPr>
-          <p:cNvSpPr>
-            <a:spLocks xmlns:a="http://schemas.openxmlformats.org/drawingml/2006/main" noGrp="1"/>
-          </p:cNvSpPr>
-          <p:nvPr/>
-        </p:nvSpPr>
-        <p:spPr>
-          <a:xfrm xmlns:a="http://schemas.openxmlformats.org/drawingml/2006/main">
-            <a:off x="4534694" y="2941241"/>
-            <a:ext cx="74613" cy="74613"/>
-          </a:xfrm>
-          <a:prstGeom xmlns:a="http://schemas.openxmlformats.org/drawingml/2006/main" prst="ellipse">
-            <a:avLst/>
-          </a:prstGeom>
-          <a:solidFill xmlns:a="http://schemas.openxmlformats.org/drawingml/2006/main">
-            <a:srgbClr val="111111"/>
-          </a:solidFill>
-          <a:ln xmlns:a="http://schemas.openxmlformats.org/drawingml/2006/main" w="0">
-            <a:solidFill>
-              <a:srgbClr val="111111"/>
-            </a:solidFill>
-          </a:ln>
-        </p:spPr>
-      </p:sp>
-      <p:sp>
-        <p:nvSpPr>
-          <p:cNvPr id="10" name="">
-            <a:extLst xmlns:a="http://schemas.openxmlformats.org/drawingml/2006/main">
-              <a:ext uri="{FF2B5EF4-FFF2-40B4-BE49-F238E27FC236}">
-                <a16:creationId xmlns:a16="http://schemas.microsoft.com/office/drawing/2014/main" id="{F1EF4445-8E7C-4E0A-A577-43CFB39D731D}"/>
-              </a:ext>
-            </a:extLst>
-          </p:cNvPr>
-          <p:cNvSpPr>
-            <a:spLocks xmlns:a="http://schemas.openxmlformats.org/drawingml/2006/main" noGrp="1"/>
-          </p:cNvSpPr>
-          <p:nvPr/>
-        </p:nvSpPr>
-        <p:spPr>
-          <a:xfrm xmlns:a="http://schemas.openxmlformats.org/drawingml/2006/main">
-            <a:off x="5094287" y="2941241"/>
-            <a:ext cx="74613" cy="74613"/>
-          </a:xfrm>
-          <a:prstGeom xmlns:a="http://schemas.openxmlformats.org/drawingml/2006/main" prst="ellipse">
-            <a:avLst/>
-          </a:prstGeom>
-          <a:solidFill xmlns:a="http://schemas.openxmlformats.org/drawingml/2006/main">
-            <a:srgbClr val="111111"/>
-          </a:solidFill>
-          <a:ln xmlns:a="http://schemas.openxmlformats.org/drawingml/2006/main" w="0">
-            <a:solidFill>
-              <a:srgbClr val="111111"/>
-            </a:solidFill>
-          </a:ln>
-        </p:spPr>
-      </p:sp>
-      <p:sp>
-        <p:nvSpPr>
-          <p:cNvPr id="11" name="">
-            <a:extLst xmlns:a="http://schemas.openxmlformats.org/drawingml/2006/main">
-              <a:ext uri="{FF2B5EF4-FFF2-40B4-BE49-F238E27FC236}">
-                <a16:creationId xmlns:a16="http://schemas.microsoft.com/office/drawing/2014/main" id="{2B98E315-09CE-4AC1-BE84-E0C84CDE1B4D}"/>
-              </a:ext>
-            </a:extLst>
-          </p:cNvPr>
-          <p:cNvSpPr>
-            <a:spLocks xmlns:a="http://schemas.openxmlformats.org/drawingml/2006/main" noGrp="1"/>
-          </p:cNvSpPr>
-          <p:nvPr/>
-        </p:nvSpPr>
-        <p:spPr>
-          <a:xfrm xmlns:a="http://schemas.openxmlformats.org/drawingml/2006/main" flipH="0" flipV="1">
-            <a:off x="4572000" y="2680097"/>
-            <a:ext cx="559594" cy="298450"/>
-          </a:xfrm>
-          <a:prstGeom xmlns:a="http://schemas.openxmlformats.org/drawingml/2006/main" prst="line">
-            <a:avLst/>
-          </a:prstGeom>
-          <a:noFill xmlns:a="http://schemas.openxmlformats.org/drawingml/2006/main"/>
-          <a:ln xmlns:a="http://schemas.openxmlformats.org/drawingml/2006/main" w="20955">
-            <a:solidFill>
-              <a:srgbClr val="111111"/>
-            </a:solidFill>
-          </a:ln>
-        </p:spPr>
-      </p:sp>
-      <p:sp>
-        <p:nvSpPr>
-          <p:cNvPr id="12" name="">
-            <a:extLst xmlns:a="http://schemas.openxmlformats.org/drawingml/2006/main">
-              <a:ext uri="{FF2B5EF4-FFF2-40B4-BE49-F238E27FC236}">
-                <a16:creationId xmlns:a16="http://schemas.microsoft.com/office/drawing/2014/main" id="{880A3263-E6C3-4A45-B2EE-E75C079707AE}"/>
-              </a:ext>
-            </a:extLst>
-          </p:cNvPr>
-          <p:cNvSpPr>
-            <a:spLocks xmlns:a="http://schemas.openxmlformats.org/drawingml/2006/main" noGrp="1"/>
-          </p:cNvSpPr>
-          <p:nvPr/>
-        </p:nvSpPr>
-        <p:spPr>
-          <a:xfrm xmlns:a="http://schemas.openxmlformats.org/drawingml/2006/main" flipH="0" flipV="0">
-            <a:off x="5131594" y="2978547"/>
-            <a:ext cx="279797" cy="0"/>
-          </a:xfrm>
-          <a:prstGeom xmlns:a="http://schemas.openxmlformats.org/drawingml/2006/main" prst="line">
-            <a:avLst/>
-          </a:prstGeom>
-          <a:noFill xmlns:a="http://schemas.openxmlformats.org/drawingml/2006/main"/>
-          <a:ln xmlns:a="http://schemas.openxmlformats.org/drawingml/2006/main" w="20955">
-            <a:solidFill>
-              <a:srgbClr val="111111"/>
-            </a:solidFill>
-          </a:ln>
-        </p:spPr>
-      </p:sp>
-      <p:sp>
-        <p:nvSpPr>
-          <p:cNvPr id="13" name="NO-kontakt">
-            <a:extLst xmlns:a="http://schemas.openxmlformats.org/drawingml/2006/main">
-              <a:ext uri="{FF2B5EF4-FFF2-40B4-BE49-F238E27FC236}">
-                <a16:creationId xmlns:a16="http://schemas.microsoft.com/office/drawing/2014/main" id="{D1B625F3-E936-4DE4-9CC0-C62F1E5C7571}"/>
-              </a:ext>
-            </a:extLst>
-          </p:cNvPr>
-          <p:cNvSpPr>
-            <a:spLocks xmlns:a="http://schemas.openxmlformats.org/drawingml/2006/main" noGrp="1"/>
-          </p:cNvSpPr>
-          <p:nvPr/>
-        </p:nvSpPr>
-        <p:spPr>
-          <a:xfrm xmlns:a="http://schemas.openxmlformats.org/drawingml/2006/main">
-            <a:off x="4142978" y="3258344"/>
-            <a:ext cx="1492250" cy="335756"/>
-          </a:xfrm>
-          <a:prstGeom xmlns:a="http://schemas.openxmlformats.org/drawingml/2006/main" prst="rect">
-            <a:avLst/>
-          </a:prstGeom>
-          <a:noFill xmlns:a="http://schemas.openxmlformats.org/drawingml/2006/main"/>
-          <a:ln xmlns:a="http://schemas.openxmlformats.org/drawingml/2006/main" w="0">
-            <a:noFill/>
-          </a:ln>
-        </p:spPr>
-        <p:txBody>
-          <a:bodyPr xmlns:a="http://schemas.openxmlformats.org/drawingml/2006/main" wrap="square" lIns="0" tIns="0" rIns="0" bIns="0" anchor="t">
-            <a:noAutofit/>
-          </a:bodyPr>
-          <a:lstStyle xmlns:a="http://schemas.openxmlformats.org/drawingml/2006/main"/>
-          <a:p xmlns:a="http://schemas.openxmlformats.org/drawingml/2006/main">
-            <a:pPr algn="ctr">
-              <a:buNone/>
-              <a:defRPr sz="1763" b="0">
-                <a:solidFill>
-                  <a:srgbClr val="111111"/>
-                </a:solidFill>
-                <a:latin typeface="Calibri"/>
-                <a:ea typeface="Calibri"/>
-                <a:cs typeface="Calibri"/>
-              </a:defRPr>
-            </a:pPr>
-            <a:r>
-              <a:rPr sz="1763" b="0">
-                <a:solidFill>
-                  <a:srgbClr val="111111"/>
-                </a:solidFill>
-                <a:latin typeface="Calibri"/>
-                <a:ea typeface="Calibri"/>
-                <a:cs typeface="Calibri"/>
-              </a:rPr>
-              <a:t>NO-kontakt</a:t>
-            </a:r>
-          </a:p>
-        </p:txBody>
-      </p:sp>
-      <p:sp>
-        <p:nvSpPr>
-          <p:cNvPr id="14" name="">
-            <a:extLst xmlns:a="http://schemas.openxmlformats.org/drawingml/2006/main">
-              <a:ext uri="{FF2B5EF4-FFF2-40B4-BE49-F238E27FC236}">
-                <a16:creationId xmlns:a16="http://schemas.microsoft.com/office/drawing/2014/main" id="{DCADD683-6845-4B4C-9D9B-9C7C4B19D94F}"/>
-              </a:ext>
-            </a:extLst>
-          </p:cNvPr>
-          <p:cNvSpPr>
-            <a:spLocks xmlns:a="http://schemas.openxmlformats.org/drawingml/2006/main" noGrp="1"/>
-          </p:cNvSpPr>
-          <p:nvPr/>
-        </p:nvSpPr>
-        <p:spPr>
-          <a:xfrm xmlns:a="http://schemas.openxmlformats.org/drawingml/2006/main">
-            <a:off x="6362700" y="2717403"/>
-            <a:ext cx="522287" cy="522287"/>
-          </a:xfrm>
-          <a:prstGeom xmlns:a="http://schemas.openxmlformats.org/drawingml/2006/main" prst="ellipse">
-            <a:avLst/>
-          </a:prstGeom>
-          <a:solidFill xmlns:a="http://schemas.openxmlformats.org/drawingml/2006/main">
-            <a:srgbClr val="FFFFFF"/>
-          </a:solidFill>
-          <a:ln xmlns:a="http://schemas.openxmlformats.org/drawingml/2006/main" w="19050">
-            <a:solidFill>
-              <a:srgbClr val="111111"/>
-            </a:solidFill>
-          </a:ln>
-        </p:spPr>
-      </p:sp>
-      <p:sp>
-        <p:nvSpPr>
-          <p:cNvPr id="15" name="V">
-            <a:extLst xmlns:a="http://schemas.openxmlformats.org/drawingml/2006/main">
-              <a:ext uri="{FF2B5EF4-FFF2-40B4-BE49-F238E27FC236}">
-                <a16:creationId xmlns:a16="http://schemas.microsoft.com/office/drawing/2014/main" id="{FEF4B0D2-424F-42FF-8489-79D8FC896599}"/>
-              </a:ext>
-            </a:extLst>
-          </p:cNvPr>
-          <p:cNvSpPr>
-            <a:spLocks xmlns:a="http://schemas.openxmlformats.org/drawingml/2006/main" noGrp="1"/>
-          </p:cNvSpPr>
-          <p:nvPr/>
-        </p:nvSpPr>
-        <p:spPr>
-          <a:xfrm xmlns:a="http://schemas.openxmlformats.org/drawingml/2006/main">
-            <a:off x="6465292" y="2801342"/>
-            <a:ext cx="317103" cy="335756"/>
-          </a:xfrm>
-          <a:prstGeom xmlns:a="http://schemas.openxmlformats.org/drawingml/2006/main" prst="rect">
-            <a:avLst/>
-          </a:prstGeom>
-          <a:noFill xmlns:a="http://schemas.openxmlformats.org/drawingml/2006/main"/>
-          <a:ln xmlns:a="http://schemas.openxmlformats.org/drawingml/2006/main" w="0">
-            <a:noFill/>
-          </a:ln>
-        </p:spPr>
-        <p:txBody>
-          <a:bodyPr xmlns:a="http://schemas.openxmlformats.org/drawingml/2006/main" wrap="square" lIns="0" tIns="0" rIns="0" bIns="0" anchor="t">
-            <a:noAutofit/>
-          </a:bodyPr>
-          <a:lstStyle xmlns:a="http://schemas.openxmlformats.org/drawingml/2006/main"/>
-          <a:p xmlns:a="http://schemas.openxmlformats.org/drawingml/2006/main">
-            <a:pPr algn="ctr">
-              <a:buNone/>
-              <a:defRPr sz="1763" b="0">
-                <a:solidFill>
-                  <a:srgbClr val="111111"/>
-                </a:solidFill>
-                <a:latin typeface="Calibri"/>
-                <a:ea typeface="Calibri"/>
-                <a:cs typeface="Calibri"/>
-              </a:defRPr>
-            </a:pPr>
-            <a:r>
-              <a:rPr sz="1763" b="0">
-                <a:solidFill>
-                  <a:srgbClr val="111111"/>
-                </a:solidFill>
-                <a:latin typeface="Calibri"/>
-                <a:ea typeface="Calibri"/>
-                <a:cs typeface="Calibri"/>
-              </a:rPr>
-              <a:t>V</a:t>
-            </a:r>
-          </a:p>
-        </p:txBody>
-      </p:sp>
-      <p:sp>
-        <p:nvSpPr>
-          <p:cNvPr id="16" name="Voltmeter">
-            <a:extLst xmlns:a="http://schemas.openxmlformats.org/drawingml/2006/main">
-              <a:ext uri="{FF2B5EF4-FFF2-40B4-BE49-F238E27FC236}">
-                <a16:creationId xmlns:a16="http://schemas.microsoft.com/office/drawing/2014/main" id="{CF1EC89F-BFD4-4630-8142-7BB46647A608}"/>
-              </a:ext>
-            </a:extLst>
-          </p:cNvPr>
-          <p:cNvSpPr>
-            <a:spLocks xmlns:a="http://schemas.openxmlformats.org/drawingml/2006/main" noGrp="1"/>
-          </p:cNvSpPr>
-          <p:nvPr/>
-        </p:nvSpPr>
-        <p:spPr>
-          <a:xfrm xmlns:a="http://schemas.openxmlformats.org/drawingml/2006/main">
-            <a:off x="6017617" y="3332956"/>
-            <a:ext cx="1305719" cy="335756"/>
-          </a:xfrm>
-          <a:prstGeom xmlns:a="http://schemas.openxmlformats.org/drawingml/2006/main" prst="rect">
-            <a:avLst/>
-          </a:prstGeom>
-          <a:noFill xmlns:a="http://schemas.openxmlformats.org/drawingml/2006/main"/>
-          <a:ln xmlns:a="http://schemas.openxmlformats.org/drawingml/2006/main" w="0">
-            <a:noFill/>
-          </a:ln>
-        </p:spPr>
-        <p:txBody>
-          <a:bodyPr xmlns:a="http://schemas.openxmlformats.org/drawingml/2006/main" wrap="square" lIns="0" tIns="0" rIns="0" bIns="0" anchor="t">
-            <a:noAutofit/>
-          </a:bodyPr>
-          <a:lstStyle xmlns:a="http://schemas.openxmlformats.org/drawingml/2006/main"/>
-          <a:p xmlns:a="http://schemas.openxmlformats.org/drawingml/2006/main">
-            <a:pPr algn="ctr">
-              <a:buNone/>
-              <a:defRPr sz="1763" b="0">
-                <a:solidFill>
-                  <a:srgbClr val="111111"/>
-                </a:solidFill>
-                <a:latin typeface="Calibri"/>
-                <a:ea typeface="Calibri"/>
-                <a:cs typeface="Calibri"/>
-              </a:defRPr>
-            </a:pPr>
-            <a:r>
-              <a:rPr sz="1763" b="0">
-                <a:solidFill>
-                  <a:srgbClr val="111111"/>
-                </a:solidFill>
-                <a:latin typeface="Calibri"/>
-                <a:ea typeface="Calibri"/>
-                <a:cs typeface="Calibri"/>
-              </a:rPr>
-              <a:t>Voltmeter</a:t>
-            </a:r>
-          </a:p>
-        </p:txBody>
-      </p:sp>
-      <p:sp>
-        <p:nvSpPr>
-          <p:cNvPr id="17" name="">
-            <a:extLst xmlns:a="http://schemas.openxmlformats.org/drawingml/2006/main">
-              <a:ext uri="{FF2B5EF4-FFF2-40B4-BE49-F238E27FC236}">
-                <a16:creationId xmlns:a16="http://schemas.microsoft.com/office/drawing/2014/main" id="{4A605A8E-424B-4653-818D-5FC69DBC6128}"/>
-              </a:ext>
-            </a:extLst>
-          </p:cNvPr>
-          <p:cNvSpPr>
-            <a:spLocks xmlns:a="http://schemas.openxmlformats.org/drawingml/2006/main" noGrp="1"/>
-          </p:cNvSpPr>
-          <p:nvPr/>
-        </p:nvSpPr>
-        <p:spPr>
-          <a:xfrm xmlns:a="http://schemas.openxmlformats.org/drawingml/2006/main">
-            <a:off x="2473523" y="3976489"/>
-            <a:ext cx="559594" cy="261144"/>
-          </a:xfrm>
-          <a:prstGeom xmlns:a="http://schemas.openxmlformats.org/drawingml/2006/main" prst="rect">
-            <a:avLst/>
-          </a:prstGeom>
-          <a:solidFill xmlns:a="http://schemas.openxmlformats.org/drawingml/2006/main">
-            <a:srgbClr val="FFFFFF"/>
-          </a:solidFill>
-          <a:ln xmlns:a="http://schemas.openxmlformats.org/drawingml/2006/main" w="19050">
-            <a:solidFill>
-              <a:srgbClr val="111111"/>
-            </a:solidFill>
-          </a:ln>
-        </p:spPr>
-      </p:sp>
-      <p:sp>
-        <p:nvSpPr>
-          <p:cNvPr id="18" name="">
-            <a:extLst xmlns:a="http://schemas.openxmlformats.org/drawingml/2006/main">
-              <a:ext uri="{FF2B5EF4-FFF2-40B4-BE49-F238E27FC236}">
-                <a16:creationId xmlns:a16="http://schemas.microsoft.com/office/drawing/2014/main" id="{284BC4BF-10C7-4D78-BADC-27B464660239}"/>
-              </a:ext>
-            </a:extLst>
-          </p:cNvPr>
-          <p:cNvSpPr>
-            <a:spLocks xmlns:a="http://schemas.openxmlformats.org/drawingml/2006/main" noGrp="1"/>
-          </p:cNvSpPr>
-          <p:nvPr/>
-        </p:nvSpPr>
-        <p:spPr>
-          <a:xfrm xmlns:a="http://schemas.openxmlformats.org/drawingml/2006/main" flipH="0" flipV="0">
-            <a:off x="2100461" y="4107061"/>
-            <a:ext cx="1305719" cy="0"/>
-          </a:xfrm>
-          <a:prstGeom xmlns:a="http://schemas.openxmlformats.org/drawingml/2006/main" prst="line">
-            <a:avLst/>
-          </a:prstGeom>
-          <a:noFill xmlns:a="http://schemas.openxmlformats.org/drawingml/2006/main"/>
-          <a:ln xmlns:a="http://schemas.openxmlformats.org/drawingml/2006/main" w="20955">
-            <a:solidFill>
-              <a:srgbClr val="111111"/>
-            </a:solidFill>
-          </a:ln>
-        </p:spPr>
-      </p:sp>
-      <p:sp>
-        <p:nvSpPr>
-          <p:cNvPr id="19" name="Säkring">
-            <a:extLst xmlns:a="http://schemas.openxmlformats.org/drawingml/2006/main">
-              <a:ext uri="{FF2B5EF4-FFF2-40B4-BE49-F238E27FC236}">
-                <a16:creationId xmlns:a16="http://schemas.microsoft.com/office/drawing/2014/main" id="{E0DC7F65-D46A-4C77-8742-2FC06DC6716E}"/>
-              </a:ext>
-            </a:extLst>
-          </p:cNvPr>
-          <p:cNvSpPr>
-            <a:spLocks xmlns:a="http://schemas.openxmlformats.org/drawingml/2006/main" noGrp="1"/>
-          </p:cNvSpPr>
-          <p:nvPr/>
-        </p:nvSpPr>
-        <p:spPr>
-          <a:xfrm xmlns:a="http://schemas.openxmlformats.org/drawingml/2006/main">
-            <a:off x="2100461" y="4358878"/>
-            <a:ext cx="1305719" cy="335756"/>
-          </a:xfrm>
-          <a:prstGeom xmlns:a="http://schemas.openxmlformats.org/drawingml/2006/main" prst="rect">
-            <a:avLst/>
-          </a:prstGeom>
-          <a:noFill xmlns:a="http://schemas.openxmlformats.org/drawingml/2006/main"/>
-          <a:ln xmlns:a="http://schemas.openxmlformats.org/drawingml/2006/main" w="0">
-            <a:noFill/>
-          </a:ln>
-        </p:spPr>
-        <p:txBody>
-          <a:bodyPr xmlns:a="http://schemas.openxmlformats.org/drawingml/2006/main" wrap="square" lIns="0" tIns="0" rIns="0" bIns="0" anchor="t">
-            <a:noAutofit/>
-          </a:bodyPr>
-          <a:lstStyle xmlns:a="http://schemas.openxmlformats.org/drawingml/2006/main"/>
-          <a:p xmlns:a="http://schemas.openxmlformats.org/drawingml/2006/main">
-            <a:pPr algn="ctr">
-              <a:buNone/>
-              <a:defRPr sz="1763" b="0">
-                <a:solidFill>
-                  <a:srgbClr val="111111"/>
-                </a:solidFill>
-                <a:latin typeface="Calibri"/>
-                <a:ea typeface="Calibri"/>
-                <a:cs typeface="Calibri"/>
-              </a:defRPr>
-            </a:pPr>
-            <a:r>
-              <a:rPr sz="1763" b="0">
-                <a:solidFill>
-                  <a:srgbClr val="111111"/>
-                </a:solidFill>
-                <a:latin typeface="Calibri"/>
-                <a:ea typeface="Calibri"/>
-                <a:cs typeface="Calibri"/>
-              </a:rPr>
-              <a:t>Säkring</a:t>
-            </a:r>
-          </a:p>
-        </p:txBody>
-      </p:sp>
-      <p:sp>
-        <p:nvSpPr>
-          <p:cNvPr id="20" name="">
-            <a:extLst xmlns:a="http://schemas.openxmlformats.org/drawingml/2006/main">
-              <a:ext uri="{FF2B5EF4-FFF2-40B4-BE49-F238E27FC236}">
-                <a16:creationId xmlns:a16="http://schemas.microsoft.com/office/drawing/2014/main" id="{D73F991C-082E-4C93-AFC8-9D877C330FF3}"/>
-              </a:ext>
-            </a:extLst>
-          </p:cNvPr>
-          <p:cNvSpPr>
-            <a:spLocks xmlns:a="http://schemas.openxmlformats.org/drawingml/2006/main" noGrp="1"/>
-          </p:cNvSpPr>
-          <p:nvPr/>
-        </p:nvSpPr>
-        <p:spPr>
-          <a:xfrm xmlns:a="http://schemas.openxmlformats.org/drawingml/2006/main">
-            <a:off x="4478734" y="3864570"/>
-            <a:ext cx="792758" cy="494308"/>
-          </a:xfrm>
-          <a:prstGeom xmlns:a="http://schemas.openxmlformats.org/drawingml/2006/main" prst="rect">
-            <a:avLst/>
-          </a:prstGeom>
-          <a:solidFill xmlns:a="http://schemas.openxmlformats.org/drawingml/2006/main">
-            <a:srgbClr val="FFFFFF"/>
-          </a:solidFill>
-          <a:ln xmlns:a="http://schemas.openxmlformats.org/drawingml/2006/main" w="19050">
-            <a:solidFill>
-              <a:srgbClr val="111111"/>
-            </a:solidFill>
-          </a:ln>
-        </p:spPr>
-      </p:sp>
-      <p:sp>
-        <p:nvSpPr>
-          <p:cNvPr id="21" name="K1">
-            <a:extLst xmlns:a="http://schemas.openxmlformats.org/drawingml/2006/main">
-              <a:ext uri="{FF2B5EF4-FFF2-40B4-BE49-F238E27FC236}">
-                <a16:creationId xmlns:a16="http://schemas.microsoft.com/office/drawing/2014/main" id="{A1766F0A-6568-4B3A-9F63-F1B21627F9AC}"/>
-              </a:ext>
-            </a:extLst>
-          </p:cNvPr>
-          <p:cNvSpPr>
-            <a:spLocks xmlns:a="http://schemas.openxmlformats.org/drawingml/2006/main" noGrp="1"/>
-          </p:cNvSpPr>
-          <p:nvPr/>
-        </p:nvSpPr>
-        <p:spPr>
-          <a:xfrm xmlns:a="http://schemas.openxmlformats.org/drawingml/2006/main">
-            <a:off x="4637286" y="3967163"/>
-            <a:ext cx="466328" cy="335756"/>
-          </a:xfrm>
-          <a:prstGeom xmlns:a="http://schemas.openxmlformats.org/drawingml/2006/main" prst="rect">
-            <a:avLst/>
-          </a:prstGeom>
-          <a:noFill xmlns:a="http://schemas.openxmlformats.org/drawingml/2006/main"/>
-          <a:ln xmlns:a="http://schemas.openxmlformats.org/drawingml/2006/main" w="0">
-            <a:noFill/>
-          </a:ln>
-        </p:spPr>
-        <p:txBody>
-          <a:bodyPr xmlns:a="http://schemas.openxmlformats.org/drawingml/2006/main" wrap="square" lIns="0" tIns="0" rIns="0" bIns="0" anchor="t">
-            <a:noAutofit/>
-          </a:bodyPr>
-          <a:lstStyle xmlns:a="http://schemas.openxmlformats.org/drawingml/2006/main"/>
-          <a:p xmlns:a="http://schemas.openxmlformats.org/drawingml/2006/main">
-            <a:pPr algn="ctr">
-              <a:buNone/>
-              <a:defRPr sz="1763" b="0">
-                <a:solidFill>
-                  <a:srgbClr val="111111"/>
-                </a:solidFill>
-                <a:latin typeface="Calibri"/>
-                <a:ea typeface="Calibri"/>
-                <a:cs typeface="Calibri"/>
-              </a:defRPr>
-            </a:pPr>
-            <a:r>
-              <a:rPr sz="1763" b="0">
-                <a:solidFill>
-                  <a:srgbClr val="111111"/>
-                </a:solidFill>
-                <a:latin typeface="Calibri"/>
-                <a:ea typeface="Calibri"/>
-                <a:cs typeface="Calibri"/>
-              </a:rPr>
-              <a:t>K1</a:t>
-            </a:r>
-          </a:p>
-        </p:txBody>
-      </p:sp>
-      <p:sp>
-        <p:nvSpPr>
-          <p:cNvPr id="22" name="Reläspole">
-            <a:extLst xmlns:a="http://schemas.openxmlformats.org/drawingml/2006/main">
-              <a:ext uri="{FF2B5EF4-FFF2-40B4-BE49-F238E27FC236}">
-                <a16:creationId xmlns:a16="http://schemas.microsoft.com/office/drawing/2014/main" id="{9193C6D3-929B-4253-91F2-CC763F2AE881}"/>
-              </a:ext>
-            </a:extLst>
-          </p:cNvPr>
-          <p:cNvSpPr>
-            <a:spLocks xmlns:a="http://schemas.openxmlformats.org/drawingml/2006/main" noGrp="1"/>
-          </p:cNvSpPr>
-          <p:nvPr/>
-        </p:nvSpPr>
-        <p:spPr>
-          <a:xfrm xmlns:a="http://schemas.openxmlformats.org/drawingml/2006/main">
-            <a:off x="4236244" y="4396184"/>
-            <a:ext cx="1305719" cy="335756"/>
-          </a:xfrm>
-          <a:prstGeom xmlns:a="http://schemas.openxmlformats.org/drawingml/2006/main" prst="rect">
-            <a:avLst/>
-          </a:prstGeom>
-          <a:noFill xmlns:a="http://schemas.openxmlformats.org/drawingml/2006/main"/>
-          <a:ln xmlns:a="http://schemas.openxmlformats.org/drawingml/2006/main" w="0">
-            <a:noFill/>
-          </a:ln>
-        </p:spPr>
-        <p:txBody>
-          <a:bodyPr xmlns:a="http://schemas.openxmlformats.org/drawingml/2006/main" wrap="square" lIns="0" tIns="0" rIns="0" bIns="0" anchor="t">
-            <a:noAutofit/>
-          </a:bodyPr>
-          <a:lstStyle xmlns:a="http://schemas.openxmlformats.org/drawingml/2006/main"/>
-          <a:p xmlns:a="http://schemas.openxmlformats.org/drawingml/2006/main">
-            <a:pPr algn="ctr">
-              <a:buNone/>
-              <a:defRPr sz="1763" b="0">
-                <a:solidFill>
-                  <a:srgbClr val="111111"/>
-                </a:solidFill>
-                <a:latin typeface="Calibri"/>
-                <a:ea typeface="Calibri"/>
-                <a:cs typeface="Calibri"/>
-              </a:defRPr>
-            </a:pPr>
-            <a:r>
-              <a:rPr sz="1763" b="0">
-                <a:solidFill>
-                  <a:srgbClr val="111111"/>
-                </a:solidFill>
-                <a:latin typeface="Calibri"/>
-                <a:ea typeface="Calibri"/>
-                <a:cs typeface="Calibri"/>
-              </a:rPr>
-              <a:t>Reläspole</a:t>
-            </a:r>
-          </a:p>
-        </p:txBody>
-      </p:sp>
-      <p:sp>
-        <p:nvSpPr>
-          <p:cNvPr id="23" name="">
-            <a:extLst xmlns:a="http://schemas.openxmlformats.org/drawingml/2006/main">
-              <a:ext uri="{FF2B5EF4-FFF2-40B4-BE49-F238E27FC236}">
-                <a16:creationId xmlns:a16="http://schemas.microsoft.com/office/drawing/2014/main" id="{79BA7258-CE72-4937-8094-20588C13B6F1}"/>
-              </a:ext>
-            </a:extLst>
-          </p:cNvPr>
-          <p:cNvSpPr>
-            <a:spLocks xmlns:a="http://schemas.openxmlformats.org/drawingml/2006/main" noGrp="1"/>
-          </p:cNvSpPr>
-          <p:nvPr/>
-        </p:nvSpPr>
-        <p:spPr>
-          <a:xfrm xmlns:a="http://schemas.openxmlformats.org/drawingml/2006/main">
-            <a:off x="6362700" y="3892550"/>
-            <a:ext cx="522287" cy="522287"/>
-          </a:xfrm>
-          <a:prstGeom xmlns:a="http://schemas.openxmlformats.org/drawingml/2006/main" prst="ellipse">
-            <a:avLst/>
-          </a:prstGeom>
-          <a:solidFill xmlns:a="http://schemas.openxmlformats.org/drawingml/2006/main">
-            <a:srgbClr val="FFFFFF"/>
-          </a:solidFill>
-          <a:ln xmlns:a="http://schemas.openxmlformats.org/drawingml/2006/main" w="19050">
-            <a:solidFill>
-              <a:srgbClr val="111111"/>
-            </a:solidFill>
-          </a:ln>
-        </p:spPr>
-      </p:sp>
-      <p:sp>
-        <p:nvSpPr>
-          <p:cNvPr id="24" name="A">
-            <a:extLst xmlns:a="http://schemas.openxmlformats.org/drawingml/2006/main">
-              <a:ext uri="{FF2B5EF4-FFF2-40B4-BE49-F238E27FC236}">
-                <a16:creationId xmlns:a16="http://schemas.microsoft.com/office/drawing/2014/main" id="{66CDCED5-E6F2-4A14-B307-D75EA7D12C09}"/>
-              </a:ext>
-            </a:extLst>
-          </p:cNvPr>
-          <p:cNvSpPr>
-            <a:spLocks xmlns:a="http://schemas.openxmlformats.org/drawingml/2006/main" noGrp="1"/>
-          </p:cNvSpPr>
-          <p:nvPr/>
-        </p:nvSpPr>
-        <p:spPr>
-          <a:xfrm xmlns:a="http://schemas.openxmlformats.org/drawingml/2006/main">
-            <a:off x="6465292" y="3976489"/>
-            <a:ext cx="317103" cy="335756"/>
-          </a:xfrm>
-          <a:prstGeom xmlns:a="http://schemas.openxmlformats.org/drawingml/2006/main" prst="rect">
-            <a:avLst/>
-          </a:prstGeom>
-          <a:noFill xmlns:a="http://schemas.openxmlformats.org/drawingml/2006/main"/>
-          <a:ln xmlns:a="http://schemas.openxmlformats.org/drawingml/2006/main" w="0">
-            <a:noFill/>
-          </a:ln>
-        </p:spPr>
-        <p:txBody>
-          <a:bodyPr xmlns:a="http://schemas.openxmlformats.org/drawingml/2006/main" wrap="square" lIns="0" tIns="0" rIns="0" bIns="0" anchor="t">
-            <a:noAutofit/>
-          </a:bodyPr>
-          <a:lstStyle xmlns:a="http://schemas.openxmlformats.org/drawingml/2006/main"/>
-          <a:p xmlns:a="http://schemas.openxmlformats.org/drawingml/2006/main">
-            <a:pPr algn="ctr">
-              <a:buNone/>
-              <a:defRPr sz="1763" b="0">
-                <a:solidFill>
-                  <a:srgbClr val="111111"/>
-                </a:solidFill>
-                <a:latin typeface="Calibri"/>
-                <a:ea typeface="Calibri"/>
-                <a:cs typeface="Calibri"/>
-              </a:defRPr>
-            </a:pPr>
-            <a:r>
-              <a:rPr sz="1763" b="0">
-                <a:solidFill>
-                  <a:srgbClr val="111111"/>
-                </a:solidFill>
-                <a:latin typeface="Calibri"/>
-                <a:ea typeface="Calibri"/>
-                <a:cs typeface="Calibri"/>
-              </a:rPr>
-              <a:t>A</a:t>
-            </a:r>
-          </a:p>
-        </p:txBody>
-      </p:sp>
-      <p:sp>
-        <p:nvSpPr>
-          <p:cNvPr id="25" name="Amperemeter">
-            <a:extLst xmlns:a="http://schemas.openxmlformats.org/drawingml/2006/main">
-              <a:ext uri="{FF2B5EF4-FFF2-40B4-BE49-F238E27FC236}">
-                <a16:creationId xmlns:a16="http://schemas.microsoft.com/office/drawing/2014/main" id="{48ECC7B8-70AE-402A-9492-A172B404A66E}"/>
-              </a:ext>
-            </a:extLst>
-          </p:cNvPr>
-          <p:cNvSpPr>
-            <a:spLocks xmlns:a="http://schemas.openxmlformats.org/drawingml/2006/main" noGrp="1"/>
-          </p:cNvSpPr>
-          <p:nvPr/>
-        </p:nvSpPr>
-        <p:spPr>
-          <a:xfrm xmlns:a="http://schemas.openxmlformats.org/drawingml/2006/main">
-            <a:off x="5877719" y="4452144"/>
-            <a:ext cx="1492250" cy="335756"/>
-          </a:xfrm>
-          <a:prstGeom xmlns:a="http://schemas.openxmlformats.org/drawingml/2006/main" prst="rect">
-            <a:avLst/>
-          </a:prstGeom>
-          <a:noFill xmlns:a="http://schemas.openxmlformats.org/drawingml/2006/main"/>
-          <a:ln xmlns:a="http://schemas.openxmlformats.org/drawingml/2006/main" w="0">
-            <a:noFill/>
-          </a:ln>
-        </p:spPr>
-        <p:txBody>
-          <a:bodyPr xmlns:a="http://schemas.openxmlformats.org/drawingml/2006/main" wrap="square" lIns="0" tIns="0" rIns="0" bIns="0" anchor="t">
-            <a:noAutofit/>
-          </a:bodyPr>
-          <a:lstStyle xmlns:a="http://schemas.openxmlformats.org/drawingml/2006/main"/>
-          <a:p xmlns:a="http://schemas.openxmlformats.org/drawingml/2006/main">
-            <a:pPr algn="ctr">
-              <a:buNone/>
-              <a:defRPr sz="1763" b="0">
-                <a:solidFill>
-                  <a:srgbClr val="111111"/>
-                </a:solidFill>
-                <a:latin typeface="Calibri"/>
-                <a:ea typeface="Calibri"/>
-                <a:cs typeface="Calibri"/>
-              </a:defRPr>
-            </a:pPr>
-            <a:r>
-              <a:rPr sz="1763" b="0">
-                <a:solidFill>
-                  <a:srgbClr val="111111"/>
-                </a:solidFill>
-                <a:latin typeface="Calibri"/>
-                <a:ea typeface="Calibri"/>
-                <a:cs typeface="Calibri"/>
-              </a:rPr>
-              <a:t>Amperemeter</a:t>
-            </a:r>
-          </a:p>
-        </p:txBody>
-      </p:sp>
-      <p:sp>
-        <p:nvSpPr>
           <p:cNvPr id="26" name="Symboler visar komponenternas funktion">
             <a:extLst xmlns:a="http://schemas.openxmlformats.org/drawingml/2006/main">
               <a:ext uri="{FF2B5EF4-FFF2-40B4-BE49-F238E27FC236}">
@@ -16966,6 +16044,30 @@
           </a:p>
         </p:txBody>
       </p:sp>
+      <p:pic xmlns:a="http://schemas.openxmlformats.org/drawingml/2006/main" xmlns:r="http://schemas.openxmlformats.org/officeDocument/2006/relationships">
+        <p:nvPicPr>
+          <p:cNvPr id="31" name="schema-symboler" descr="Grafiska symboler: motstånd, NO-kontakt, spänningsmätare, säkring, reläspole K1 och strömmätare."/>
+          <p:cNvPicPr>
+            <a:picLocks noChangeAspect="1"/>
+          </p:cNvPicPr>
+          <p:nvPr/>
+        </p:nvPicPr>
+        <p:blipFill>
+          <a:blip r:embed="rId3"/>
+          <a:stretch>
+            <a:fillRect/>
+          </a:stretch>
+        </p:blipFill>
+        <p:spPr>
+          <a:xfrm>
+            <a:off x="1799924" y="2395728"/>
+            <a:ext cx="5544151" cy="2340863"/>
+          </a:xfrm>
+          <a:prstGeom prst="rect">
+            <a:avLst/>
+          </a:prstGeom>
+        </p:spPr>
+      </p:pic>
     </p:spTree>
     <p:extLst>
       <p:ext uri="{BB962C8B-B14F-4D97-AF65-F5344CB8AC3E}">
@@ -17154,1600 +16256,6 @@
       </p:sp>
       <p:sp>
         <p:nvSpPr>
-          <p:cNvPr id="4" name="L1">
-            <a:extLst xmlns:a="http://schemas.openxmlformats.org/drawingml/2006/main">
-              <a:ext uri="{FF2B5EF4-FFF2-40B4-BE49-F238E27FC236}">
-                <a16:creationId xmlns:a16="http://schemas.microsoft.com/office/drawing/2014/main" id="{CE397EA6-97C2-41FD-A109-9877DF62A0E7}"/>
-              </a:ext>
-            </a:extLst>
-          </p:cNvPr>
-          <p:cNvSpPr>
-            <a:spLocks xmlns:a="http://schemas.openxmlformats.org/drawingml/2006/main" noGrp="1"/>
-          </p:cNvSpPr>
-          <p:nvPr/>
-        </p:nvSpPr>
-        <p:spPr>
-          <a:xfrm xmlns:a="http://schemas.openxmlformats.org/drawingml/2006/main">
-            <a:off x="1494234" y="2670770"/>
-            <a:ext cx="466328" cy="335756"/>
-          </a:xfrm>
-          <a:prstGeom xmlns:a="http://schemas.openxmlformats.org/drawingml/2006/main" prst="rect">
-            <a:avLst/>
-          </a:prstGeom>
-          <a:noFill xmlns:a="http://schemas.openxmlformats.org/drawingml/2006/main"/>
-          <a:ln xmlns:a="http://schemas.openxmlformats.org/drawingml/2006/main" w="0">
-            <a:noFill/>
-          </a:ln>
-        </p:spPr>
-        <p:txBody>
-          <a:bodyPr xmlns:a="http://schemas.openxmlformats.org/drawingml/2006/main" wrap="square" lIns="0" tIns="0" rIns="0" bIns="0" anchor="t">
-            <a:noAutofit/>
-          </a:bodyPr>
-          <a:lstStyle xmlns:a="http://schemas.openxmlformats.org/drawingml/2006/main"/>
-          <a:p xmlns:a="http://schemas.openxmlformats.org/drawingml/2006/main">
-            <a:pPr algn="ctr">
-              <a:buNone/>
-              <a:defRPr sz="1763" b="0">
-                <a:solidFill>
-                  <a:srgbClr val="111111"/>
-                </a:solidFill>
-                <a:latin typeface="Calibri"/>
-                <a:ea typeface="Calibri"/>
-                <a:cs typeface="Calibri"/>
-              </a:defRPr>
-            </a:pPr>
-            <a:r>
-              <a:rPr sz="1763" b="0">
-                <a:solidFill>
-                  <a:srgbClr val="111111"/>
-                </a:solidFill>
-                <a:latin typeface="Calibri"/>
-                <a:ea typeface="Calibri"/>
-                <a:cs typeface="Calibri"/>
-              </a:rPr>
-              <a:t>L1</a:t>
-            </a:r>
-          </a:p>
-        </p:txBody>
-      </p:sp>
-      <p:sp>
-        <p:nvSpPr>
-          <p:cNvPr id="5" name="">
-            <a:extLst xmlns:a="http://schemas.openxmlformats.org/drawingml/2006/main">
-              <a:ext uri="{FF2B5EF4-FFF2-40B4-BE49-F238E27FC236}">
-                <a16:creationId xmlns:a16="http://schemas.microsoft.com/office/drawing/2014/main" id="{182DB192-5A81-407A-A86C-3C42061E0D4B}"/>
-              </a:ext>
-            </a:extLst>
-          </p:cNvPr>
-          <p:cNvSpPr>
-            <a:spLocks xmlns:a="http://schemas.openxmlformats.org/drawingml/2006/main" noGrp="1"/>
-          </p:cNvSpPr>
-          <p:nvPr/>
-        </p:nvSpPr>
-        <p:spPr>
-          <a:xfrm xmlns:a="http://schemas.openxmlformats.org/drawingml/2006/main" flipH="0" flipV="0">
-            <a:off x="1913930" y="2819995"/>
-            <a:ext cx="652859" cy="0"/>
-          </a:xfrm>
-          <a:prstGeom xmlns:a="http://schemas.openxmlformats.org/drawingml/2006/main" prst="line">
-            <a:avLst/>
-          </a:prstGeom>
-          <a:noFill xmlns:a="http://schemas.openxmlformats.org/drawingml/2006/main"/>
-          <a:ln xmlns:a="http://schemas.openxmlformats.org/drawingml/2006/main" w="20955">
-            <a:solidFill>
-              <a:srgbClr val="111111"/>
-            </a:solidFill>
-          </a:ln>
-        </p:spPr>
-      </p:sp>
-      <p:sp>
-        <p:nvSpPr>
-          <p:cNvPr id="6" name="">
-            <a:extLst xmlns:a="http://schemas.openxmlformats.org/drawingml/2006/main">
-              <a:ext uri="{FF2B5EF4-FFF2-40B4-BE49-F238E27FC236}">
-                <a16:creationId xmlns:a16="http://schemas.microsoft.com/office/drawing/2014/main" id="{53B3C4A3-ADBC-472C-80DA-8EF729905B11}"/>
-              </a:ext>
-            </a:extLst>
-          </p:cNvPr>
-          <p:cNvSpPr>
-            <a:spLocks xmlns:a="http://schemas.openxmlformats.org/drawingml/2006/main" noGrp="1"/>
-          </p:cNvSpPr>
-          <p:nvPr/>
-        </p:nvSpPr>
-        <p:spPr>
-          <a:xfrm xmlns:a="http://schemas.openxmlformats.org/drawingml/2006/main">
-            <a:off x="2566789" y="2736056"/>
-            <a:ext cx="419695" cy="167878"/>
-          </a:xfrm>
-          <a:prstGeom xmlns:a="http://schemas.openxmlformats.org/drawingml/2006/main" prst="rect">
-            <a:avLst/>
-          </a:prstGeom>
-          <a:solidFill xmlns:a="http://schemas.openxmlformats.org/drawingml/2006/main">
-            <a:srgbClr val="FFFFFF"/>
-          </a:solidFill>
-          <a:ln xmlns:a="http://schemas.openxmlformats.org/drawingml/2006/main" w="19050">
-            <a:solidFill>
-              <a:srgbClr val="111111"/>
-            </a:solidFill>
-          </a:ln>
-        </p:spPr>
-      </p:sp>
-      <p:sp>
-        <p:nvSpPr>
-          <p:cNvPr id="7" name="">
-            <a:extLst xmlns:a="http://schemas.openxmlformats.org/drawingml/2006/main">
-              <a:ext uri="{FF2B5EF4-FFF2-40B4-BE49-F238E27FC236}">
-                <a16:creationId xmlns:a16="http://schemas.microsoft.com/office/drawing/2014/main" id="{48EA6307-DF4F-4FD9-98E4-D0AE505AF64F}"/>
-              </a:ext>
-            </a:extLst>
-          </p:cNvPr>
-          <p:cNvSpPr>
-            <a:spLocks xmlns:a="http://schemas.openxmlformats.org/drawingml/2006/main" noGrp="1"/>
-          </p:cNvSpPr>
-          <p:nvPr/>
-        </p:nvSpPr>
-        <p:spPr>
-          <a:xfrm xmlns:a="http://schemas.openxmlformats.org/drawingml/2006/main" flipH="0" flipV="0">
-            <a:off x="2566789" y="2819995"/>
-            <a:ext cx="419695" cy="0"/>
-          </a:xfrm>
-          <a:prstGeom xmlns:a="http://schemas.openxmlformats.org/drawingml/2006/main" prst="line">
-            <a:avLst/>
-          </a:prstGeom>
-          <a:noFill xmlns:a="http://schemas.openxmlformats.org/drawingml/2006/main"/>
-          <a:ln xmlns:a="http://schemas.openxmlformats.org/drawingml/2006/main" w="20955">
-            <a:solidFill>
-              <a:srgbClr val="111111"/>
-            </a:solidFill>
-          </a:ln>
-        </p:spPr>
-      </p:sp>
-      <p:sp>
-        <p:nvSpPr>
-          <p:cNvPr id="8" name="">
-            <a:extLst xmlns:a="http://schemas.openxmlformats.org/drawingml/2006/main">
-              <a:ext uri="{FF2B5EF4-FFF2-40B4-BE49-F238E27FC236}">
-                <a16:creationId xmlns:a16="http://schemas.microsoft.com/office/drawing/2014/main" id="{F653E3F7-7021-4E5D-A7F6-2CA24C5D3E63}"/>
-              </a:ext>
-            </a:extLst>
-          </p:cNvPr>
-          <p:cNvSpPr>
-            <a:spLocks xmlns:a="http://schemas.openxmlformats.org/drawingml/2006/main" noGrp="1"/>
-          </p:cNvSpPr>
-          <p:nvPr/>
-        </p:nvSpPr>
-        <p:spPr>
-          <a:xfrm xmlns:a="http://schemas.openxmlformats.org/drawingml/2006/main" flipH="0" flipV="0">
-            <a:off x="2986484" y="2819995"/>
-            <a:ext cx="979289" cy="0"/>
-          </a:xfrm>
-          <a:prstGeom xmlns:a="http://schemas.openxmlformats.org/drawingml/2006/main" prst="line">
-            <a:avLst/>
-          </a:prstGeom>
-          <a:noFill xmlns:a="http://schemas.openxmlformats.org/drawingml/2006/main"/>
-          <a:ln xmlns:a="http://schemas.openxmlformats.org/drawingml/2006/main" w="20955">
-            <a:solidFill>
-              <a:srgbClr val="111111"/>
-            </a:solidFill>
-          </a:ln>
-        </p:spPr>
-      </p:sp>
-      <p:sp>
-        <p:nvSpPr>
-          <p:cNvPr id="9" name="">
-            <a:extLst xmlns:a="http://schemas.openxmlformats.org/drawingml/2006/main">
-              <a:ext uri="{FF2B5EF4-FFF2-40B4-BE49-F238E27FC236}">
-                <a16:creationId xmlns:a16="http://schemas.microsoft.com/office/drawing/2014/main" id="{A18EADBC-0451-4BA1-AFCB-891E6ED42D4E}"/>
-              </a:ext>
-            </a:extLst>
-          </p:cNvPr>
-          <p:cNvSpPr>
-            <a:spLocks xmlns:a="http://schemas.openxmlformats.org/drawingml/2006/main" noGrp="1"/>
-          </p:cNvSpPr>
-          <p:nvPr/>
-        </p:nvSpPr>
-        <p:spPr>
-          <a:xfrm xmlns:a="http://schemas.openxmlformats.org/drawingml/2006/main">
-            <a:off x="3928467" y="2782689"/>
-            <a:ext cx="74613" cy="74613"/>
-          </a:xfrm>
-          <a:prstGeom xmlns:a="http://schemas.openxmlformats.org/drawingml/2006/main" prst="ellipse">
-            <a:avLst/>
-          </a:prstGeom>
-          <a:solidFill xmlns:a="http://schemas.openxmlformats.org/drawingml/2006/main">
-            <a:srgbClr val="111111"/>
-          </a:solidFill>
-          <a:ln xmlns:a="http://schemas.openxmlformats.org/drawingml/2006/main" w="0">
-            <a:solidFill>
-              <a:srgbClr val="111111"/>
-            </a:solidFill>
-          </a:ln>
-        </p:spPr>
-      </p:sp>
-      <p:sp>
-        <p:nvSpPr>
-          <p:cNvPr id="10" name="">
-            <a:extLst xmlns:a="http://schemas.openxmlformats.org/drawingml/2006/main">
-              <a:ext uri="{FF2B5EF4-FFF2-40B4-BE49-F238E27FC236}">
-                <a16:creationId xmlns:a16="http://schemas.microsoft.com/office/drawing/2014/main" id="{221890C8-3347-4874-B754-D603D3E5BE39}"/>
-              </a:ext>
-            </a:extLst>
-          </p:cNvPr>
-          <p:cNvSpPr>
-            <a:spLocks xmlns:a="http://schemas.openxmlformats.org/drawingml/2006/main" noGrp="1"/>
-          </p:cNvSpPr>
-          <p:nvPr/>
-        </p:nvSpPr>
-        <p:spPr>
-          <a:xfrm xmlns:a="http://schemas.openxmlformats.org/drawingml/2006/main">
-            <a:off x="4348163" y="2782689"/>
-            <a:ext cx="74613" cy="74613"/>
-          </a:xfrm>
-          <a:prstGeom xmlns:a="http://schemas.openxmlformats.org/drawingml/2006/main" prst="ellipse">
-            <a:avLst/>
-          </a:prstGeom>
-          <a:solidFill xmlns:a="http://schemas.openxmlformats.org/drawingml/2006/main">
-            <a:srgbClr val="111111"/>
-          </a:solidFill>
-          <a:ln xmlns:a="http://schemas.openxmlformats.org/drawingml/2006/main" w="0">
-            <a:solidFill>
-              <a:srgbClr val="111111"/>
-            </a:solidFill>
-          </a:ln>
-        </p:spPr>
-      </p:sp>
-      <p:sp>
-        <p:nvSpPr>
-          <p:cNvPr id="11" name="">
-            <a:extLst xmlns:a="http://schemas.openxmlformats.org/drawingml/2006/main">
-              <a:ext uri="{FF2B5EF4-FFF2-40B4-BE49-F238E27FC236}">
-                <a16:creationId xmlns:a16="http://schemas.microsoft.com/office/drawing/2014/main" id="{50D2F924-74A1-460E-9424-5FEB504B3EC6}"/>
-              </a:ext>
-            </a:extLst>
-          </p:cNvPr>
-          <p:cNvSpPr>
-            <a:spLocks xmlns:a="http://schemas.openxmlformats.org/drawingml/2006/main" noGrp="1"/>
-          </p:cNvSpPr>
-          <p:nvPr/>
-        </p:nvSpPr>
-        <p:spPr>
-          <a:xfrm xmlns:a="http://schemas.openxmlformats.org/drawingml/2006/main" flipH="0" flipV="1">
-            <a:off x="3965773" y="2614811"/>
-            <a:ext cx="419695" cy="205184"/>
-          </a:xfrm>
-          <a:prstGeom xmlns:a="http://schemas.openxmlformats.org/drawingml/2006/main" prst="line">
-            <a:avLst/>
-          </a:prstGeom>
-          <a:noFill xmlns:a="http://schemas.openxmlformats.org/drawingml/2006/main"/>
-          <a:ln xmlns:a="http://schemas.openxmlformats.org/drawingml/2006/main" w="20955">
-            <a:solidFill>
-              <a:srgbClr val="111111"/>
-            </a:solidFill>
-          </a:ln>
-        </p:spPr>
-      </p:sp>
-      <p:sp>
-        <p:nvSpPr>
-          <p:cNvPr id="12" name="">
-            <a:extLst xmlns:a="http://schemas.openxmlformats.org/drawingml/2006/main">
-              <a:ext uri="{FF2B5EF4-FFF2-40B4-BE49-F238E27FC236}">
-                <a16:creationId xmlns:a16="http://schemas.microsoft.com/office/drawing/2014/main" id="{39ACA5BB-830F-45EB-BF19-34F6BBCEAED2}"/>
-              </a:ext>
-            </a:extLst>
-          </p:cNvPr>
-          <p:cNvSpPr>
-            <a:spLocks xmlns:a="http://schemas.openxmlformats.org/drawingml/2006/main" noGrp="1"/>
-          </p:cNvSpPr>
-          <p:nvPr/>
-        </p:nvSpPr>
-        <p:spPr>
-          <a:xfrm xmlns:a="http://schemas.openxmlformats.org/drawingml/2006/main" flipH="0" flipV="0">
-            <a:off x="4385469" y="2819995"/>
-            <a:ext cx="559594" cy="0"/>
-          </a:xfrm>
-          <a:prstGeom xmlns:a="http://schemas.openxmlformats.org/drawingml/2006/main" prst="line">
-            <a:avLst/>
-          </a:prstGeom>
-          <a:noFill xmlns:a="http://schemas.openxmlformats.org/drawingml/2006/main"/>
-          <a:ln xmlns:a="http://schemas.openxmlformats.org/drawingml/2006/main" w="20955">
-            <a:solidFill>
-              <a:srgbClr val="111111"/>
-            </a:solidFill>
-          </a:ln>
-        </p:spPr>
-      </p:sp>
-      <p:sp>
-        <p:nvSpPr>
-          <p:cNvPr id="13" name="">
-            <a:extLst xmlns:a="http://schemas.openxmlformats.org/drawingml/2006/main">
-              <a:ext uri="{FF2B5EF4-FFF2-40B4-BE49-F238E27FC236}">
-                <a16:creationId xmlns:a16="http://schemas.microsoft.com/office/drawing/2014/main" id="{B123DF07-205E-4CF8-AB5B-4DD76623E0C3}"/>
-              </a:ext>
-            </a:extLst>
-          </p:cNvPr>
-          <p:cNvSpPr>
-            <a:spLocks xmlns:a="http://schemas.openxmlformats.org/drawingml/2006/main" noGrp="1"/>
-          </p:cNvSpPr>
-          <p:nvPr/>
-        </p:nvSpPr>
-        <p:spPr>
-          <a:xfrm xmlns:a="http://schemas.openxmlformats.org/drawingml/2006/main">
-            <a:off x="4945063" y="2717403"/>
-            <a:ext cx="512961" cy="205184"/>
-          </a:xfrm>
-          <a:prstGeom xmlns:a="http://schemas.openxmlformats.org/drawingml/2006/main" prst="rect">
-            <a:avLst/>
-          </a:prstGeom>
-          <a:solidFill xmlns:a="http://schemas.openxmlformats.org/drawingml/2006/main">
-            <a:srgbClr val="FFFFFF"/>
-          </a:solidFill>
-          <a:ln xmlns:a="http://schemas.openxmlformats.org/drawingml/2006/main" w="19050">
-            <a:solidFill>
-              <a:srgbClr val="111111"/>
-            </a:solidFill>
-          </a:ln>
-        </p:spPr>
-      </p:sp>
-      <p:sp>
-        <p:nvSpPr>
-          <p:cNvPr id="14" name="">
-            <a:extLst xmlns:a="http://schemas.openxmlformats.org/drawingml/2006/main">
-              <a:ext uri="{FF2B5EF4-FFF2-40B4-BE49-F238E27FC236}">
-                <a16:creationId xmlns:a16="http://schemas.microsoft.com/office/drawing/2014/main" id="{F3685A44-E388-481C-ADDB-B9C39A72D087}"/>
-              </a:ext>
-            </a:extLst>
-          </p:cNvPr>
-          <p:cNvSpPr>
-            <a:spLocks xmlns:a="http://schemas.openxmlformats.org/drawingml/2006/main" noGrp="1"/>
-          </p:cNvSpPr>
-          <p:nvPr/>
-        </p:nvSpPr>
-        <p:spPr>
-          <a:xfrm xmlns:a="http://schemas.openxmlformats.org/drawingml/2006/main" flipH="0" flipV="0">
-            <a:off x="5458023" y="2819995"/>
-            <a:ext cx="1072555" cy="0"/>
-          </a:xfrm>
-          <a:prstGeom xmlns:a="http://schemas.openxmlformats.org/drawingml/2006/main" prst="line">
-            <a:avLst/>
-          </a:prstGeom>
-          <a:noFill xmlns:a="http://schemas.openxmlformats.org/drawingml/2006/main"/>
-          <a:ln xmlns:a="http://schemas.openxmlformats.org/drawingml/2006/main" w="20955">
-            <a:solidFill>
-              <a:srgbClr val="111111"/>
-            </a:solidFill>
-          </a:ln>
-        </p:spPr>
-      </p:sp>
-      <p:sp>
-        <p:nvSpPr>
-          <p:cNvPr id="15" name="L2">
-            <a:extLst xmlns:a="http://schemas.openxmlformats.org/drawingml/2006/main">
-              <a:ext uri="{FF2B5EF4-FFF2-40B4-BE49-F238E27FC236}">
-                <a16:creationId xmlns:a16="http://schemas.microsoft.com/office/drawing/2014/main" id="{1058D3D6-E3F2-4B4D-A170-52B089A13745}"/>
-              </a:ext>
-            </a:extLst>
-          </p:cNvPr>
-          <p:cNvSpPr>
-            <a:spLocks xmlns:a="http://schemas.openxmlformats.org/drawingml/2006/main" noGrp="1"/>
-          </p:cNvSpPr>
-          <p:nvPr/>
-        </p:nvSpPr>
-        <p:spPr>
-          <a:xfrm xmlns:a="http://schemas.openxmlformats.org/drawingml/2006/main">
-            <a:off x="1494234" y="3183731"/>
-            <a:ext cx="466328" cy="335756"/>
-          </a:xfrm>
-          <a:prstGeom xmlns:a="http://schemas.openxmlformats.org/drawingml/2006/main" prst="rect">
-            <a:avLst/>
-          </a:prstGeom>
-          <a:noFill xmlns:a="http://schemas.openxmlformats.org/drawingml/2006/main"/>
-          <a:ln xmlns:a="http://schemas.openxmlformats.org/drawingml/2006/main" w="0">
-            <a:noFill/>
-          </a:ln>
-        </p:spPr>
-        <p:txBody>
-          <a:bodyPr xmlns:a="http://schemas.openxmlformats.org/drawingml/2006/main" wrap="square" lIns="0" tIns="0" rIns="0" bIns="0" anchor="t">
-            <a:noAutofit/>
-          </a:bodyPr>
-          <a:lstStyle xmlns:a="http://schemas.openxmlformats.org/drawingml/2006/main"/>
-          <a:p xmlns:a="http://schemas.openxmlformats.org/drawingml/2006/main">
-            <a:pPr algn="ctr">
-              <a:buNone/>
-              <a:defRPr sz="1763" b="0">
-                <a:solidFill>
-                  <a:srgbClr val="111111"/>
-                </a:solidFill>
-                <a:latin typeface="Calibri"/>
-                <a:ea typeface="Calibri"/>
-                <a:cs typeface="Calibri"/>
-              </a:defRPr>
-            </a:pPr>
-            <a:r>
-              <a:rPr sz="1763" b="0">
-                <a:solidFill>
-                  <a:srgbClr val="111111"/>
-                </a:solidFill>
-                <a:latin typeface="Calibri"/>
-                <a:ea typeface="Calibri"/>
-                <a:cs typeface="Calibri"/>
-              </a:rPr>
-              <a:t>L2</a:t>
-            </a:r>
-          </a:p>
-        </p:txBody>
-      </p:sp>
-      <p:sp>
-        <p:nvSpPr>
-          <p:cNvPr id="16" name="">
-            <a:extLst xmlns:a="http://schemas.openxmlformats.org/drawingml/2006/main">
-              <a:ext uri="{FF2B5EF4-FFF2-40B4-BE49-F238E27FC236}">
-                <a16:creationId xmlns:a16="http://schemas.microsoft.com/office/drawing/2014/main" id="{B5B75FBC-1C47-49AE-84E6-11A54D2463F7}"/>
-              </a:ext>
-            </a:extLst>
-          </p:cNvPr>
-          <p:cNvSpPr>
-            <a:spLocks xmlns:a="http://schemas.openxmlformats.org/drawingml/2006/main" noGrp="1"/>
-          </p:cNvSpPr>
-          <p:nvPr/>
-        </p:nvSpPr>
-        <p:spPr>
-          <a:xfrm xmlns:a="http://schemas.openxmlformats.org/drawingml/2006/main" flipH="0" flipV="0">
-            <a:off x="1913930" y="3332956"/>
-            <a:ext cx="652859" cy="0"/>
-          </a:xfrm>
-          <a:prstGeom xmlns:a="http://schemas.openxmlformats.org/drawingml/2006/main" prst="line">
-            <a:avLst/>
-          </a:prstGeom>
-          <a:noFill xmlns:a="http://schemas.openxmlformats.org/drawingml/2006/main"/>
-          <a:ln xmlns:a="http://schemas.openxmlformats.org/drawingml/2006/main" w="20955">
-            <a:solidFill>
-              <a:srgbClr val="111111"/>
-            </a:solidFill>
-          </a:ln>
-        </p:spPr>
-      </p:sp>
-      <p:sp>
-        <p:nvSpPr>
-          <p:cNvPr id="17" name="">
-            <a:extLst xmlns:a="http://schemas.openxmlformats.org/drawingml/2006/main">
-              <a:ext uri="{FF2B5EF4-FFF2-40B4-BE49-F238E27FC236}">
-                <a16:creationId xmlns:a16="http://schemas.microsoft.com/office/drawing/2014/main" id="{9BB698DC-2FDC-4997-9FE3-2A82E236791D}"/>
-              </a:ext>
-            </a:extLst>
-          </p:cNvPr>
-          <p:cNvSpPr>
-            <a:spLocks xmlns:a="http://schemas.openxmlformats.org/drawingml/2006/main" noGrp="1"/>
-          </p:cNvSpPr>
-          <p:nvPr/>
-        </p:nvSpPr>
-        <p:spPr>
-          <a:xfrm xmlns:a="http://schemas.openxmlformats.org/drawingml/2006/main">
-            <a:off x="2566789" y="3249017"/>
-            <a:ext cx="419695" cy="167878"/>
-          </a:xfrm>
-          <a:prstGeom xmlns:a="http://schemas.openxmlformats.org/drawingml/2006/main" prst="rect">
-            <a:avLst/>
-          </a:prstGeom>
-          <a:solidFill xmlns:a="http://schemas.openxmlformats.org/drawingml/2006/main">
-            <a:srgbClr val="FFFFFF"/>
-          </a:solidFill>
-          <a:ln xmlns:a="http://schemas.openxmlformats.org/drawingml/2006/main" w="19050">
-            <a:solidFill>
-              <a:srgbClr val="111111"/>
-            </a:solidFill>
-          </a:ln>
-        </p:spPr>
-      </p:sp>
-      <p:sp>
-        <p:nvSpPr>
-          <p:cNvPr id="18" name="">
-            <a:extLst xmlns:a="http://schemas.openxmlformats.org/drawingml/2006/main">
-              <a:ext uri="{FF2B5EF4-FFF2-40B4-BE49-F238E27FC236}">
-                <a16:creationId xmlns:a16="http://schemas.microsoft.com/office/drawing/2014/main" id="{B954D5C9-F25F-4C04-9F3A-248A85187928}"/>
-              </a:ext>
-            </a:extLst>
-          </p:cNvPr>
-          <p:cNvSpPr>
-            <a:spLocks xmlns:a="http://schemas.openxmlformats.org/drawingml/2006/main" noGrp="1"/>
-          </p:cNvSpPr>
-          <p:nvPr/>
-        </p:nvSpPr>
-        <p:spPr>
-          <a:xfrm xmlns:a="http://schemas.openxmlformats.org/drawingml/2006/main" flipH="0" flipV="0">
-            <a:off x="2566789" y="3332956"/>
-            <a:ext cx="419695" cy="0"/>
-          </a:xfrm>
-          <a:prstGeom xmlns:a="http://schemas.openxmlformats.org/drawingml/2006/main" prst="line">
-            <a:avLst/>
-          </a:prstGeom>
-          <a:noFill xmlns:a="http://schemas.openxmlformats.org/drawingml/2006/main"/>
-          <a:ln xmlns:a="http://schemas.openxmlformats.org/drawingml/2006/main" w="20955">
-            <a:solidFill>
-              <a:srgbClr val="111111"/>
-            </a:solidFill>
-          </a:ln>
-        </p:spPr>
-      </p:sp>
-      <p:sp>
-        <p:nvSpPr>
-          <p:cNvPr id="19" name="">
-            <a:extLst xmlns:a="http://schemas.openxmlformats.org/drawingml/2006/main">
-              <a:ext uri="{FF2B5EF4-FFF2-40B4-BE49-F238E27FC236}">
-                <a16:creationId xmlns:a16="http://schemas.microsoft.com/office/drawing/2014/main" id="{46FE069E-A193-44F0-83AF-9173EED1045F}"/>
-              </a:ext>
-            </a:extLst>
-          </p:cNvPr>
-          <p:cNvSpPr>
-            <a:spLocks xmlns:a="http://schemas.openxmlformats.org/drawingml/2006/main" noGrp="1"/>
-          </p:cNvSpPr>
-          <p:nvPr/>
-        </p:nvSpPr>
-        <p:spPr>
-          <a:xfrm xmlns:a="http://schemas.openxmlformats.org/drawingml/2006/main" flipH="0" flipV="0">
-            <a:off x="2986484" y="3332956"/>
-            <a:ext cx="979289" cy="0"/>
-          </a:xfrm>
-          <a:prstGeom xmlns:a="http://schemas.openxmlformats.org/drawingml/2006/main" prst="line">
-            <a:avLst/>
-          </a:prstGeom>
-          <a:noFill xmlns:a="http://schemas.openxmlformats.org/drawingml/2006/main"/>
-          <a:ln xmlns:a="http://schemas.openxmlformats.org/drawingml/2006/main" w="20955">
-            <a:solidFill>
-              <a:srgbClr val="111111"/>
-            </a:solidFill>
-          </a:ln>
-        </p:spPr>
-      </p:sp>
-      <p:sp>
-        <p:nvSpPr>
-          <p:cNvPr id="20" name="">
-            <a:extLst xmlns:a="http://schemas.openxmlformats.org/drawingml/2006/main">
-              <a:ext uri="{FF2B5EF4-FFF2-40B4-BE49-F238E27FC236}">
-                <a16:creationId xmlns:a16="http://schemas.microsoft.com/office/drawing/2014/main" id="{A168F281-6E61-4A4B-BC99-4FD9EED0B765}"/>
-              </a:ext>
-            </a:extLst>
-          </p:cNvPr>
-          <p:cNvSpPr>
-            <a:spLocks xmlns:a="http://schemas.openxmlformats.org/drawingml/2006/main" noGrp="1"/>
-          </p:cNvSpPr>
-          <p:nvPr/>
-        </p:nvSpPr>
-        <p:spPr>
-          <a:xfrm xmlns:a="http://schemas.openxmlformats.org/drawingml/2006/main">
-            <a:off x="3928467" y="3295650"/>
-            <a:ext cx="74613" cy="74613"/>
-          </a:xfrm>
-          <a:prstGeom xmlns:a="http://schemas.openxmlformats.org/drawingml/2006/main" prst="ellipse">
-            <a:avLst/>
-          </a:prstGeom>
-          <a:solidFill xmlns:a="http://schemas.openxmlformats.org/drawingml/2006/main">
-            <a:srgbClr val="111111"/>
-          </a:solidFill>
-          <a:ln xmlns:a="http://schemas.openxmlformats.org/drawingml/2006/main" w="0">
-            <a:solidFill>
-              <a:srgbClr val="111111"/>
-            </a:solidFill>
-          </a:ln>
-        </p:spPr>
-      </p:sp>
-      <p:sp>
-        <p:nvSpPr>
-          <p:cNvPr id="21" name="">
-            <a:extLst xmlns:a="http://schemas.openxmlformats.org/drawingml/2006/main">
-              <a:ext uri="{FF2B5EF4-FFF2-40B4-BE49-F238E27FC236}">
-                <a16:creationId xmlns:a16="http://schemas.microsoft.com/office/drawing/2014/main" id="{71A97245-D791-4E68-8051-F67A8C67A349}"/>
-              </a:ext>
-            </a:extLst>
-          </p:cNvPr>
-          <p:cNvSpPr>
-            <a:spLocks xmlns:a="http://schemas.openxmlformats.org/drawingml/2006/main" noGrp="1"/>
-          </p:cNvSpPr>
-          <p:nvPr/>
-        </p:nvSpPr>
-        <p:spPr>
-          <a:xfrm xmlns:a="http://schemas.openxmlformats.org/drawingml/2006/main">
-            <a:off x="4348163" y="3295650"/>
-            <a:ext cx="74613" cy="74613"/>
-          </a:xfrm>
-          <a:prstGeom xmlns:a="http://schemas.openxmlformats.org/drawingml/2006/main" prst="ellipse">
-            <a:avLst/>
-          </a:prstGeom>
-          <a:solidFill xmlns:a="http://schemas.openxmlformats.org/drawingml/2006/main">
-            <a:srgbClr val="111111"/>
-          </a:solidFill>
-          <a:ln xmlns:a="http://schemas.openxmlformats.org/drawingml/2006/main" w="0">
-            <a:solidFill>
-              <a:srgbClr val="111111"/>
-            </a:solidFill>
-          </a:ln>
-        </p:spPr>
-      </p:sp>
-      <p:sp>
-        <p:nvSpPr>
-          <p:cNvPr id="22" name="">
-            <a:extLst xmlns:a="http://schemas.openxmlformats.org/drawingml/2006/main">
-              <a:ext uri="{FF2B5EF4-FFF2-40B4-BE49-F238E27FC236}">
-                <a16:creationId xmlns:a16="http://schemas.microsoft.com/office/drawing/2014/main" id="{63850932-7B6F-4277-AB94-9B828360F29D}"/>
-              </a:ext>
-            </a:extLst>
-          </p:cNvPr>
-          <p:cNvSpPr>
-            <a:spLocks xmlns:a="http://schemas.openxmlformats.org/drawingml/2006/main" noGrp="1"/>
-          </p:cNvSpPr>
-          <p:nvPr/>
-        </p:nvSpPr>
-        <p:spPr>
-          <a:xfrm xmlns:a="http://schemas.openxmlformats.org/drawingml/2006/main" flipH="0" flipV="1">
-            <a:off x="3965773" y="3127772"/>
-            <a:ext cx="419695" cy="205184"/>
-          </a:xfrm>
-          <a:prstGeom xmlns:a="http://schemas.openxmlformats.org/drawingml/2006/main" prst="line">
-            <a:avLst/>
-          </a:prstGeom>
-          <a:noFill xmlns:a="http://schemas.openxmlformats.org/drawingml/2006/main"/>
-          <a:ln xmlns:a="http://schemas.openxmlformats.org/drawingml/2006/main" w="20955">
-            <a:solidFill>
-              <a:srgbClr val="111111"/>
-            </a:solidFill>
-          </a:ln>
-        </p:spPr>
-      </p:sp>
-      <p:sp>
-        <p:nvSpPr>
-          <p:cNvPr id="23" name="">
-            <a:extLst xmlns:a="http://schemas.openxmlformats.org/drawingml/2006/main">
-              <a:ext uri="{FF2B5EF4-FFF2-40B4-BE49-F238E27FC236}">
-                <a16:creationId xmlns:a16="http://schemas.microsoft.com/office/drawing/2014/main" id="{21251787-F0BE-4CEB-96F2-F6364F92B3ED}"/>
-              </a:ext>
-            </a:extLst>
-          </p:cNvPr>
-          <p:cNvSpPr>
-            <a:spLocks xmlns:a="http://schemas.openxmlformats.org/drawingml/2006/main" noGrp="1"/>
-          </p:cNvSpPr>
-          <p:nvPr/>
-        </p:nvSpPr>
-        <p:spPr>
-          <a:xfrm xmlns:a="http://schemas.openxmlformats.org/drawingml/2006/main" flipH="0" flipV="0">
-            <a:off x="4385469" y="3332956"/>
-            <a:ext cx="559594" cy="0"/>
-          </a:xfrm>
-          <a:prstGeom xmlns:a="http://schemas.openxmlformats.org/drawingml/2006/main" prst="line">
-            <a:avLst/>
-          </a:prstGeom>
-          <a:noFill xmlns:a="http://schemas.openxmlformats.org/drawingml/2006/main"/>
-          <a:ln xmlns:a="http://schemas.openxmlformats.org/drawingml/2006/main" w="20955">
-            <a:solidFill>
-              <a:srgbClr val="111111"/>
-            </a:solidFill>
-          </a:ln>
-        </p:spPr>
-      </p:sp>
-      <p:sp>
-        <p:nvSpPr>
-          <p:cNvPr id="24" name="">
-            <a:extLst xmlns:a="http://schemas.openxmlformats.org/drawingml/2006/main">
-              <a:ext uri="{FF2B5EF4-FFF2-40B4-BE49-F238E27FC236}">
-                <a16:creationId xmlns:a16="http://schemas.microsoft.com/office/drawing/2014/main" id="{68DB2BF6-0046-4A25-A04F-3255A59D9056}"/>
-              </a:ext>
-            </a:extLst>
-          </p:cNvPr>
-          <p:cNvSpPr>
-            <a:spLocks xmlns:a="http://schemas.openxmlformats.org/drawingml/2006/main" noGrp="1"/>
-          </p:cNvSpPr>
-          <p:nvPr/>
-        </p:nvSpPr>
-        <p:spPr>
-          <a:xfrm xmlns:a="http://schemas.openxmlformats.org/drawingml/2006/main">
-            <a:off x="4945063" y="3230364"/>
-            <a:ext cx="512961" cy="205184"/>
-          </a:xfrm>
-          <a:prstGeom xmlns:a="http://schemas.openxmlformats.org/drawingml/2006/main" prst="rect">
-            <a:avLst/>
-          </a:prstGeom>
-          <a:solidFill xmlns:a="http://schemas.openxmlformats.org/drawingml/2006/main">
-            <a:srgbClr val="FFFFFF"/>
-          </a:solidFill>
-          <a:ln xmlns:a="http://schemas.openxmlformats.org/drawingml/2006/main" w="19050">
-            <a:solidFill>
-              <a:srgbClr val="111111"/>
-            </a:solidFill>
-          </a:ln>
-        </p:spPr>
-      </p:sp>
-      <p:sp>
-        <p:nvSpPr>
-          <p:cNvPr id="25" name="">
-            <a:extLst xmlns:a="http://schemas.openxmlformats.org/drawingml/2006/main">
-              <a:ext uri="{FF2B5EF4-FFF2-40B4-BE49-F238E27FC236}">
-                <a16:creationId xmlns:a16="http://schemas.microsoft.com/office/drawing/2014/main" id="{67DC5514-0A55-4E43-B5A8-9638755150E3}"/>
-              </a:ext>
-            </a:extLst>
-          </p:cNvPr>
-          <p:cNvSpPr>
-            <a:spLocks xmlns:a="http://schemas.openxmlformats.org/drawingml/2006/main" noGrp="1"/>
-          </p:cNvSpPr>
-          <p:nvPr/>
-        </p:nvSpPr>
-        <p:spPr>
-          <a:xfrm xmlns:a="http://schemas.openxmlformats.org/drawingml/2006/main" flipH="0" flipV="0">
-            <a:off x="5458023" y="3332956"/>
-            <a:ext cx="1072555" cy="0"/>
-          </a:xfrm>
-          <a:prstGeom xmlns:a="http://schemas.openxmlformats.org/drawingml/2006/main" prst="line">
-            <a:avLst/>
-          </a:prstGeom>
-          <a:noFill xmlns:a="http://schemas.openxmlformats.org/drawingml/2006/main"/>
-          <a:ln xmlns:a="http://schemas.openxmlformats.org/drawingml/2006/main" w="20955">
-            <a:solidFill>
-              <a:srgbClr val="111111"/>
-            </a:solidFill>
-          </a:ln>
-        </p:spPr>
-      </p:sp>
-      <p:sp>
-        <p:nvSpPr>
-          <p:cNvPr id="26" name="L3">
-            <a:extLst xmlns:a="http://schemas.openxmlformats.org/drawingml/2006/main">
-              <a:ext uri="{FF2B5EF4-FFF2-40B4-BE49-F238E27FC236}">
-                <a16:creationId xmlns:a16="http://schemas.microsoft.com/office/drawing/2014/main" id="{E18CAEEA-E3E4-48ED-A8A9-C65240B481FA}"/>
-              </a:ext>
-            </a:extLst>
-          </p:cNvPr>
-          <p:cNvSpPr>
-            <a:spLocks xmlns:a="http://schemas.openxmlformats.org/drawingml/2006/main" noGrp="1"/>
-          </p:cNvSpPr>
-          <p:nvPr/>
-        </p:nvSpPr>
-        <p:spPr>
-          <a:xfrm xmlns:a="http://schemas.openxmlformats.org/drawingml/2006/main">
-            <a:off x="1494234" y="3696692"/>
-            <a:ext cx="466328" cy="335756"/>
-          </a:xfrm>
-          <a:prstGeom xmlns:a="http://schemas.openxmlformats.org/drawingml/2006/main" prst="rect">
-            <a:avLst/>
-          </a:prstGeom>
-          <a:noFill xmlns:a="http://schemas.openxmlformats.org/drawingml/2006/main"/>
-          <a:ln xmlns:a="http://schemas.openxmlformats.org/drawingml/2006/main" w="0">
-            <a:noFill/>
-          </a:ln>
-        </p:spPr>
-        <p:txBody>
-          <a:bodyPr xmlns:a="http://schemas.openxmlformats.org/drawingml/2006/main" wrap="square" lIns="0" tIns="0" rIns="0" bIns="0" anchor="t">
-            <a:noAutofit/>
-          </a:bodyPr>
-          <a:lstStyle xmlns:a="http://schemas.openxmlformats.org/drawingml/2006/main"/>
-          <a:p xmlns:a="http://schemas.openxmlformats.org/drawingml/2006/main">
-            <a:pPr algn="ctr">
-              <a:buNone/>
-              <a:defRPr sz="1763" b="0">
-                <a:solidFill>
-                  <a:srgbClr val="111111"/>
-                </a:solidFill>
-                <a:latin typeface="Calibri"/>
-                <a:ea typeface="Calibri"/>
-                <a:cs typeface="Calibri"/>
-              </a:defRPr>
-            </a:pPr>
-            <a:r>
-              <a:rPr sz="1763" b="0">
-                <a:solidFill>
-                  <a:srgbClr val="111111"/>
-                </a:solidFill>
-                <a:latin typeface="Calibri"/>
-                <a:ea typeface="Calibri"/>
-                <a:cs typeface="Calibri"/>
-              </a:rPr>
-              <a:t>L3</a:t>
-            </a:r>
-          </a:p>
-        </p:txBody>
-      </p:sp>
-      <p:sp>
-        <p:nvSpPr>
-          <p:cNvPr id="27" name="">
-            <a:extLst xmlns:a="http://schemas.openxmlformats.org/drawingml/2006/main">
-              <a:ext uri="{FF2B5EF4-FFF2-40B4-BE49-F238E27FC236}">
-                <a16:creationId xmlns:a16="http://schemas.microsoft.com/office/drawing/2014/main" id="{BE13C0DD-ACE0-43AB-BDE3-ED24DE728881}"/>
-              </a:ext>
-            </a:extLst>
-          </p:cNvPr>
-          <p:cNvSpPr>
-            <a:spLocks xmlns:a="http://schemas.openxmlformats.org/drawingml/2006/main" noGrp="1"/>
-          </p:cNvSpPr>
-          <p:nvPr/>
-        </p:nvSpPr>
-        <p:spPr>
-          <a:xfrm xmlns:a="http://schemas.openxmlformats.org/drawingml/2006/main" flipH="0" flipV="0">
-            <a:off x="1913930" y="3845917"/>
-            <a:ext cx="652859" cy="0"/>
-          </a:xfrm>
-          <a:prstGeom xmlns:a="http://schemas.openxmlformats.org/drawingml/2006/main" prst="line">
-            <a:avLst/>
-          </a:prstGeom>
-          <a:noFill xmlns:a="http://schemas.openxmlformats.org/drawingml/2006/main"/>
-          <a:ln xmlns:a="http://schemas.openxmlformats.org/drawingml/2006/main" w="20955">
-            <a:solidFill>
-              <a:srgbClr val="111111"/>
-            </a:solidFill>
-          </a:ln>
-        </p:spPr>
-      </p:sp>
-      <p:sp>
-        <p:nvSpPr>
-          <p:cNvPr id="28" name="">
-            <a:extLst xmlns:a="http://schemas.openxmlformats.org/drawingml/2006/main">
-              <a:ext uri="{FF2B5EF4-FFF2-40B4-BE49-F238E27FC236}">
-                <a16:creationId xmlns:a16="http://schemas.microsoft.com/office/drawing/2014/main" id="{7FC8429F-C197-4A2D-AC81-1801023C56B7}"/>
-              </a:ext>
-            </a:extLst>
-          </p:cNvPr>
-          <p:cNvSpPr>
-            <a:spLocks xmlns:a="http://schemas.openxmlformats.org/drawingml/2006/main" noGrp="1"/>
-          </p:cNvSpPr>
-          <p:nvPr/>
-        </p:nvSpPr>
-        <p:spPr>
-          <a:xfrm xmlns:a="http://schemas.openxmlformats.org/drawingml/2006/main">
-            <a:off x="2566789" y="3761978"/>
-            <a:ext cx="419695" cy="167878"/>
-          </a:xfrm>
-          <a:prstGeom xmlns:a="http://schemas.openxmlformats.org/drawingml/2006/main" prst="rect">
-            <a:avLst/>
-          </a:prstGeom>
-          <a:solidFill xmlns:a="http://schemas.openxmlformats.org/drawingml/2006/main">
-            <a:srgbClr val="FFFFFF"/>
-          </a:solidFill>
-          <a:ln xmlns:a="http://schemas.openxmlformats.org/drawingml/2006/main" w="19050">
-            <a:solidFill>
-              <a:srgbClr val="111111"/>
-            </a:solidFill>
-          </a:ln>
-        </p:spPr>
-      </p:sp>
-      <p:sp>
-        <p:nvSpPr>
-          <p:cNvPr id="29" name="">
-            <a:extLst xmlns:a="http://schemas.openxmlformats.org/drawingml/2006/main">
-              <a:ext uri="{FF2B5EF4-FFF2-40B4-BE49-F238E27FC236}">
-                <a16:creationId xmlns:a16="http://schemas.microsoft.com/office/drawing/2014/main" id="{A70AC01F-602E-4373-8697-9E5AF783B289}"/>
-              </a:ext>
-            </a:extLst>
-          </p:cNvPr>
-          <p:cNvSpPr>
-            <a:spLocks xmlns:a="http://schemas.openxmlformats.org/drawingml/2006/main" noGrp="1"/>
-          </p:cNvSpPr>
-          <p:nvPr/>
-        </p:nvSpPr>
-        <p:spPr>
-          <a:xfrm xmlns:a="http://schemas.openxmlformats.org/drawingml/2006/main" flipH="0" flipV="0">
-            <a:off x="2566789" y="3845917"/>
-            <a:ext cx="419695" cy="0"/>
-          </a:xfrm>
-          <a:prstGeom xmlns:a="http://schemas.openxmlformats.org/drawingml/2006/main" prst="line">
-            <a:avLst/>
-          </a:prstGeom>
-          <a:noFill xmlns:a="http://schemas.openxmlformats.org/drawingml/2006/main"/>
-          <a:ln xmlns:a="http://schemas.openxmlformats.org/drawingml/2006/main" w="20955">
-            <a:solidFill>
-              <a:srgbClr val="111111"/>
-            </a:solidFill>
-          </a:ln>
-        </p:spPr>
-      </p:sp>
-      <p:sp>
-        <p:nvSpPr>
-          <p:cNvPr id="30" name="">
-            <a:extLst xmlns:a="http://schemas.openxmlformats.org/drawingml/2006/main">
-              <a:ext uri="{FF2B5EF4-FFF2-40B4-BE49-F238E27FC236}">
-                <a16:creationId xmlns:a16="http://schemas.microsoft.com/office/drawing/2014/main" id="{B52F940F-1AC3-407A-A678-C1B2D6CFFD52}"/>
-              </a:ext>
-            </a:extLst>
-          </p:cNvPr>
-          <p:cNvSpPr>
-            <a:spLocks xmlns:a="http://schemas.openxmlformats.org/drawingml/2006/main" noGrp="1"/>
-          </p:cNvSpPr>
-          <p:nvPr/>
-        </p:nvSpPr>
-        <p:spPr>
-          <a:xfrm xmlns:a="http://schemas.openxmlformats.org/drawingml/2006/main" flipH="0" flipV="0">
-            <a:off x="2986484" y="3845917"/>
-            <a:ext cx="979289" cy="0"/>
-          </a:xfrm>
-          <a:prstGeom xmlns:a="http://schemas.openxmlformats.org/drawingml/2006/main" prst="line">
-            <a:avLst/>
-          </a:prstGeom>
-          <a:noFill xmlns:a="http://schemas.openxmlformats.org/drawingml/2006/main"/>
-          <a:ln xmlns:a="http://schemas.openxmlformats.org/drawingml/2006/main" w="20955">
-            <a:solidFill>
-              <a:srgbClr val="111111"/>
-            </a:solidFill>
-          </a:ln>
-        </p:spPr>
-      </p:sp>
-      <p:sp>
-        <p:nvSpPr>
-          <p:cNvPr id="31" name="">
-            <a:extLst xmlns:a="http://schemas.openxmlformats.org/drawingml/2006/main">
-              <a:ext uri="{FF2B5EF4-FFF2-40B4-BE49-F238E27FC236}">
-                <a16:creationId xmlns:a16="http://schemas.microsoft.com/office/drawing/2014/main" id="{10C223D7-3D40-44E2-8DC4-A2FFF1033DB5}"/>
-              </a:ext>
-            </a:extLst>
-          </p:cNvPr>
-          <p:cNvSpPr>
-            <a:spLocks xmlns:a="http://schemas.openxmlformats.org/drawingml/2006/main" noGrp="1"/>
-          </p:cNvSpPr>
-          <p:nvPr/>
-        </p:nvSpPr>
-        <p:spPr>
-          <a:xfrm xmlns:a="http://schemas.openxmlformats.org/drawingml/2006/main">
-            <a:off x="3928467" y="3808611"/>
-            <a:ext cx="74613" cy="74613"/>
-          </a:xfrm>
-          <a:prstGeom xmlns:a="http://schemas.openxmlformats.org/drawingml/2006/main" prst="ellipse">
-            <a:avLst/>
-          </a:prstGeom>
-          <a:solidFill xmlns:a="http://schemas.openxmlformats.org/drawingml/2006/main">
-            <a:srgbClr val="111111"/>
-          </a:solidFill>
-          <a:ln xmlns:a="http://schemas.openxmlformats.org/drawingml/2006/main" w="0">
-            <a:solidFill>
-              <a:srgbClr val="111111"/>
-            </a:solidFill>
-          </a:ln>
-        </p:spPr>
-      </p:sp>
-      <p:sp>
-        <p:nvSpPr>
-          <p:cNvPr id="32" name="">
-            <a:extLst xmlns:a="http://schemas.openxmlformats.org/drawingml/2006/main">
-              <a:ext uri="{FF2B5EF4-FFF2-40B4-BE49-F238E27FC236}">
-                <a16:creationId xmlns:a16="http://schemas.microsoft.com/office/drawing/2014/main" id="{0524EDBC-6F58-4A63-AA0D-4259BE79AC25}"/>
-              </a:ext>
-            </a:extLst>
-          </p:cNvPr>
-          <p:cNvSpPr>
-            <a:spLocks xmlns:a="http://schemas.openxmlformats.org/drawingml/2006/main" noGrp="1"/>
-          </p:cNvSpPr>
-          <p:nvPr/>
-        </p:nvSpPr>
-        <p:spPr>
-          <a:xfrm xmlns:a="http://schemas.openxmlformats.org/drawingml/2006/main">
-            <a:off x="4348163" y="3808611"/>
-            <a:ext cx="74613" cy="74613"/>
-          </a:xfrm>
-          <a:prstGeom xmlns:a="http://schemas.openxmlformats.org/drawingml/2006/main" prst="ellipse">
-            <a:avLst/>
-          </a:prstGeom>
-          <a:solidFill xmlns:a="http://schemas.openxmlformats.org/drawingml/2006/main">
-            <a:srgbClr val="111111"/>
-          </a:solidFill>
-          <a:ln xmlns:a="http://schemas.openxmlformats.org/drawingml/2006/main" w="0">
-            <a:solidFill>
-              <a:srgbClr val="111111"/>
-            </a:solidFill>
-          </a:ln>
-        </p:spPr>
-      </p:sp>
-      <p:sp>
-        <p:nvSpPr>
-          <p:cNvPr id="33" name="">
-            <a:extLst xmlns:a="http://schemas.openxmlformats.org/drawingml/2006/main">
-              <a:ext uri="{FF2B5EF4-FFF2-40B4-BE49-F238E27FC236}">
-                <a16:creationId xmlns:a16="http://schemas.microsoft.com/office/drawing/2014/main" id="{9D00BAF4-506E-4848-B755-6411C9DA502C}"/>
-              </a:ext>
-            </a:extLst>
-          </p:cNvPr>
-          <p:cNvSpPr>
-            <a:spLocks xmlns:a="http://schemas.openxmlformats.org/drawingml/2006/main" noGrp="1"/>
-          </p:cNvSpPr>
-          <p:nvPr/>
-        </p:nvSpPr>
-        <p:spPr>
-          <a:xfrm xmlns:a="http://schemas.openxmlformats.org/drawingml/2006/main" flipH="0" flipV="1">
-            <a:off x="3965773" y="3640733"/>
-            <a:ext cx="419695" cy="205184"/>
-          </a:xfrm>
-          <a:prstGeom xmlns:a="http://schemas.openxmlformats.org/drawingml/2006/main" prst="line">
-            <a:avLst/>
-          </a:prstGeom>
-          <a:noFill xmlns:a="http://schemas.openxmlformats.org/drawingml/2006/main"/>
-          <a:ln xmlns:a="http://schemas.openxmlformats.org/drawingml/2006/main" w="20955">
-            <a:solidFill>
-              <a:srgbClr val="111111"/>
-            </a:solidFill>
-          </a:ln>
-        </p:spPr>
-      </p:sp>
-      <p:sp>
-        <p:nvSpPr>
-          <p:cNvPr id="34" name="">
-            <a:extLst xmlns:a="http://schemas.openxmlformats.org/drawingml/2006/main">
-              <a:ext uri="{FF2B5EF4-FFF2-40B4-BE49-F238E27FC236}">
-                <a16:creationId xmlns:a16="http://schemas.microsoft.com/office/drawing/2014/main" id="{3593E4C2-8032-41B4-B5C9-9BC46DDD9B9C}"/>
-              </a:ext>
-            </a:extLst>
-          </p:cNvPr>
-          <p:cNvSpPr>
-            <a:spLocks xmlns:a="http://schemas.openxmlformats.org/drawingml/2006/main" noGrp="1"/>
-          </p:cNvSpPr>
-          <p:nvPr/>
-        </p:nvSpPr>
-        <p:spPr>
-          <a:xfrm xmlns:a="http://schemas.openxmlformats.org/drawingml/2006/main" flipH="0" flipV="0">
-            <a:off x="4385469" y="3845917"/>
-            <a:ext cx="559594" cy="0"/>
-          </a:xfrm>
-          <a:prstGeom xmlns:a="http://schemas.openxmlformats.org/drawingml/2006/main" prst="line">
-            <a:avLst/>
-          </a:prstGeom>
-          <a:noFill xmlns:a="http://schemas.openxmlformats.org/drawingml/2006/main"/>
-          <a:ln xmlns:a="http://schemas.openxmlformats.org/drawingml/2006/main" w="20955">
-            <a:solidFill>
-              <a:srgbClr val="111111"/>
-            </a:solidFill>
-          </a:ln>
-        </p:spPr>
-      </p:sp>
-      <p:sp>
-        <p:nvSpPr>
-          <p:cNvPr id="35" name="">
-            <a:extLst xmlns:a="http://schemas.openxmlformats.org/drawingml/2006/main">
-              <a:ext uri="{FF2B5EF4-FFF2-40B4-BE49-F238E27FC236}">
-                <a16:creationId xmlns:a16="http://schemas.microsoft.com/office/drawing/2014/main" id="{1B175972-CABB-4F05-880C-D70ADC07AD6C}"/>
-              </a:ext>
-            </a:extLst>
-          </p:cNvPr>
-          <p:cNvSpPr>
-            <a:spLocks xmlns:a="http://schemas.openxmlformats.org/drawingml/2006/main" noGrp="1"/>
-          </p:cNvSpPr>
-          <p:nvPr/>
-        </p:nvSpPr>
-        <p:spPr>
-          <a:xfrm xmlns:a="http://schemas.openxmlformats.org/drawingml/2006/main">
-            <a:off x="4945063" y="3743325"/>
-            <a:ext cx="512961" cy="205184"/>
-          </a:xfrm>
-          <a:prstGeom xmlns:a="http://schemas.openxmlformats.org/drawingml/2006/main" prst="rect">
-            <a:avLst/>
-          </a:prstGeom>
-          <a:solidFill xmlns:a="http://schemas.openxmlformats.org/drawingml/2006/main">
-            <a:srgbClr val="FFFFFF"/>
-          </a:solidFill>
-          <a:ln xmlns:a="http://schemas.openxmlformats.org/drawingml/2006/main" w="19050">
-            <a:solidFill>
-              <a:srgbClr val="111111"/>
-            </a:solidFill>
-          </a:ln>
-        </p:spPr>
-      </p:sp>
-      <p:sp>
-        <p:nvSpPr>
-          <p:cNvPr id="36" name="">
-            <a:extLst xmlns:a="http://schemas.openxmlformats.org/drawingml/2006/main">
-              <a:ext uri="{FF2B5EF4-FFF2-40B4-BE49-F238E27FC236}">
-                <a16:creationId xmlns:a16="http://schemas.microsoft.com/office/drawing/2014/main" id="{2A440362-1E81-4AD8-AA36-5C3B13AAC749}"/>
-              </a:ext>
-            </a:extLst>
-          </p:cNvPr>
-          <p:cNvSpPr>
-            <a:spLocks xmlns:a="http://schemas.openxmlformats.org/drawingml/2006/main" noGrp="1"/>
-          </p:cNvSpPr>
-          <p:nvPr/>
-        </p:nvSpPr>
-        <p:spPr>
-          <a:xfrm xmlns:a="http://schemas.openxmlformats.org/drawingml/2006/main" flipH="0" flipV="0">
-            <a:off x="5458023" y="3845917"/>
-            <a:ext cx="1072555" cy="0"/>
-          </a:xfrm>
-          <a:prstGeom xmlns:a="http://schemas.openxmlformats.org/drawingml/2006/main" prst="line">
-            <a:avLst/>
-          </a:prstGeom>
-          <a:noFill xmlns:a="http://schemas.openxmlformats.org/drawingml/2006/main"/>
-          <a:ln xmlns:a="http://schemas.openxmlformats.org/drawingml/2006/main" w="20955">
-            <a:solidFill>
-              <a:srgbClr val="111111"/>
-            </a:solidFill>
-          </a:ln>
-        </p:spPr>
-      </p:sp>
-      <p:sp>
-        <p:nvSpPr>
-          <p:cNvPr id="37" name="">
-            <a:extLst xmlns:a="http://schemas.openxmlformats.org/drawingml/2006/main">
-              <a:ext uri="{FF2B5EF4-FFF2-40B4-BE49-F238E27FC236}">
-                <a16:creationId xmlns:a16="http://schemas.microsoft.com/office/drawing/2014/main" id="{2DD3F1BD-EDF0-4A4F-9198-CE8A9717995F}"/>
-              </a:ext>
-            </a:extLst>
-          </p:cNvPr>
-          <p:cNvSpPr>
-            <a:spLocks xmlns:a="http://schemas.openxmlformats.org/drawingml/2006/main" noGrp="1"/>
-          </p:cNvSpPr>
-          <p:nvPr/>
-        </p:nvSpPr>
-        <p:spPr>
-          <a:xfrm xmlns:a="http://schemas.openxmlformats.org/drawingml/2006/main">
-            <a:off x="6204148" y="2680097"/>
-            <a:ext cx="1305719" cy="1305719"/>
-          </a:xfrm>
-          <a:prstGeom xmlns:a="http://schemas.openxmlformats.org/drawingml/2006/main" prst="ellipse">
-            <a:avLst/>
-          </a:prstGeom>
-          <a:solidFill xmlns:a="http://schemas.openxmlformats.org/drawingml/2006/main">
-            <a:srgbClr val="FFFFFF"/>
-          </a:solidFill>
-          <a:ln xmlns:a="http://schemas.openxmlformats.org/drawingml/2006/main" w="19050">
-            <a:solidFill>
-              <a:srgbClr val="111111"/>
-            </a:solidFill>
-          </a:ln>
-        </p:spPr>
-      </p:sp>
-      <p:sp>
-        <p:nvSpPr>
-          <p:cNvPr id="38" name="M">
-            <a:extLst xmlns:a="http://schemas.openxmlformats.org/drawingml/2006/main">
-              <a:ext uri="{FF2B5EF4-FFF2-40B4-BE49-F238E27FC236}">
-                <a16:creationId xmlns:a16="http://schemas.microsoft.com/office/drawing/2014/main" id="{2CCC5672-B86A-4AD6-A1B3-E9BD8A33EC61}"/>
-              </a:ext>
-            </a:extLst>
-          </p:cNvPr>
-          <p:cNvSpPr>
-            <a:spLocks xmlns:a="http://schemas.openxmlformats.org/drawingml/2006/main" noGrp="1"/>
-          </p:cNvSpPr>
-          <p:nvPr/>
-        </p:nvSpPr>
-        <p:spPr>
-          <a:xfrm xmlns:a="http://schemas.openxmlformats.org/drawingml/2006/main">
-            <a:off x="6390680" y="2987873"/>
-            <a:ext cx="932656" cy="335756"/>
-          </a:xfrm>
-          <a:prstGeom xmlns:a="http://schemas.openxmlformats.org/drawingml/2006/main" prst="rect">
-            <a:avLst/>
-          </a:prstGeom>
-          <a:noFill xmlns:a="http://schemas.openxmlformats.org/drawingml/2006/main"/>
-          <a:ln xmlns:a="http://schemas.openxmlformats.org/drawingml/2006/main" w="0">
-            <a:noFill/>
-          </a:ln>
-        </p:spPr>
-        <p:txBody>
-          <a:bodyPr xmlns:a="http://schemas.openxmlformats.org/drawingml/2006/main" wrap="square" lIns="0" tIns="0" rIns="0" bIns="0" anchor="t">
-            <a:noAutofit/>
-          </a:bodyPr>
-          <a:lstStyle xmlns:a="http://schemas.openxmlformats.org/drawingml/2006/main"/>
-          <a:p xmlns:a="http://schemas.openxmlformats.org/drawingml/2006/main">
-            <a:pPr algn="ctr">
-              <a:buNone/>
-              <a:defRPr sz="2497" b="0">
-                <a:solidFill>
-                  <a:srgbClr val="111111"/>
-                </a:solidFill>
-                <a:latin typeface="Calibri"/>
-                <a:ea typeface="Calibri"/>
-                <a:cs typeface="Calibri"/>
-              </a:defRPr>
-            </a:pPr>
-            <a:r>
-              <a:rPr sz="2497" b="0">
-                <a:solidFill>
-                  <a:srgbClr val="111111"/>
-                </a:solidFill>
-                <a:latin typeface="Calibri"/>
-                <a:ea typeface="Calibri"/>
-                <a:cs typeface="Calibri"/>
-              </a:rPr>
-              <a:t>M</a:t>
-            </a:r>
-          </a:p>
-        </p:txBody>
-      </p:sp>
-      <p:sp>
-        <p:nvSpPr>
-          <p:cNvPr id="39" name="3~">
-            <a:extLst xmlns:a="http://schemas.openxmlformats.org/drawingml/2006/main">
-              <a:ext uri="{FF2B5EF4-FFF2-40B4-BE49-F238E27FC236}">
-                <a16:creationId xmlns:a16="http://schemas.microsoft.com/office/drawing/2014/main" id="{C77CEDB4-5D05-48CF-A88D-E2B9718ED778}"/>
-              </a:ext>
-            </a:extLst>
-          </p:cNvPr>
-          <p:cNvSpPr>
-            <a:spLocks xmlns:a="http://schemas.openxmlformats.org/drawingml/2006/main" noGrp="1"/>
-          </p:cNvSpPr>
-          <p:nvPr/>
-        </p:nvSpPr>
-        <p:spPr>
-          <a:xfrm xmlns:a="http://schemas.openxmlformats.org/drawingml/2006/main">
-            <a:off x="6455966" y="3398242"/>
-            <a:ext cx="839391" cy="335756"/>
-          </a:xfrm>
-          <a:prstGeom xmlns:a="http://schemas.openxmlformats.org/drawingml/2006/main" prst="rect">
-            <a:avLst/>
-          </a:prstGeom>
-          <a:noFill xmlns:a="http://schemas.openxmlformats.org/drawingml/2006/main"/>
-          <a:ln xmlns:a="http://schemas.openxmlformats.org/drawingml/2006/main" w="0">
-            <a:noFill/>
-          </a:ln>
-        </p:spPr>
-        <p:txBody>
-          <a:bodyPr xmlns:a="http://schemas.openxmlformats.org/drawingml/2006/main" wrap="square" lIns="0" tIns="0" rIns="0" bIns="0" anchor="t">
-            <a:noAutofit/>
-          </a:bodyPr>
-          <a:lstStyle xmlns:a="http://schemas.openxmlformats.org/drawingml/2006/main"/>
-          <a:p xmlns:a="http://schemas.openxmlformats.org/drawingml/2006/main">
-            <a:pPr algn="ctr">
-              <a:buNone/>
-              <a:defRPr sz="1909" b="0">
-                <a:solidFill>
-                  <a:srgbClr val="111111"/>
-                </a:solidFill>
-                <a:latin typeface="Calibri"/>
-                <a:ea typeface="Calibri"/>
-                <a:cs typeface="Calibri"/>
-              </a:defRPr>
-            </a:pPr>
-            <a:r>
-              <a:rPr sz="1909" b="0">
-                <a:solidFill>
-                  <a:srgbClr val="111111"/>
-                </a:solidFill>
-                <a:latin typeface="Calibri"/>
-                <a:ea typeface="Calibri"/>
-                <a:cs typeface="Calibri"/>
-              </a:rPr>
-              <a:t>3~</a:t>
-            </a:r>
-          </a:p>
-        </p:txBody>
-      </p:sp>
-      <p:sp>
-        <p:nvSpPr>
-          <p:cNvPr id="40" name="F1">
-            <a:extLst xmlns:a="http://schemas.openxmlformats.org/drawingml/2006/main">
-              <a:ext uri="{FF2B5EF4-FFF2-40B4-BE49-F238E27FC236}">
-                <a16:creationId xmlns:a16="http://schemas.microsoft.com/office/drawing/2014/main" id="{3F8CFE81-7338-46EB-BE89-525529166E26}"/>
-              </a:ext>
-            </a:extLst>
-          </p:cNvPr>
-          <p:cNvSpPr>
-            <a:spLocks xmlns:a="http://schemas.openxmlformats.org/drawingml/2006/main" noGrp="1"/>
-          </p:cNvSpPr>
-          <p:nvPr/>
-        </p:nvSpPr>
-        <p:spPr>
-          <a:xfrm xmlns:a="http://schemas.openxmlformats.org/drawingml/2006/main">
-            <a:off x="2417564" y="4116387"/>
-            <a:ext cx="699492" cy="335756"/>
-          </a:xfrm>
-          <a:prstGeom xmlns:a="http://schemas.openxmlformats.org/drawingml/2006/main" prst="rect">
-            <a:avLst/>
-          </a:prstGeom>
-          <a:noFill xmlns:a="http://schemas.openxmlformats.org/drawingml/2006/main"/>
-          <a:ln xmlns:a="http://schemas.openxmlformats.org/drawingml/2006/main" w="0">
-            <a:noFill/>
-          </a:ln>
-        </p:spPr>
-        <p:txBody>
-          <a:bodyPr xmlns:a="http://schemas.openxmlformats.org/drawingml/2006/main" wrap="square" lIns="0" tIns="0" rIns="0" bIns="0" anchor="t">
-            <a:noAutofit/>
-          </a:bodyPr>
-          <a:lstStyle xmlns:a="http://schemas.openxmlformats.org/drawingml/2006/main"/>
-          <a:p xmlns:a="http://schemas.openxmlformats.org/drawingml/2006/main">
-            <a:pPr algn="ctr">
-              <a:buNone/>
-              <a:defRPr sz="1763" b="0">
-                <a:solidFill>
-                  <a:srgbClr val="111111"/>
-                </a:solidFill>
-                <a:latin typeface="Calibri"/>
-                <a:ea typeface="Calibri"/>
-                <a:cs typeface="Calibri"/>
-              </a:defRPr>
-            </a:pPr>
-            <a:r>
-              <a:rPr sz="1763" b="0">
-                <a:solidFill>
-                  <a:srgbClr val="111111"/>
-                </a:solidFill>
-                <a:latin typeface="Calibri"/>
-                <a:ea typeface="Calibri"/>
-                <a:cs typeface="Calibri"/>
-              </a:rPr>
-              <a:t>F1</a:t>
-            </a:r>
-          </a:p>
-        </p:txBody>
-      </p:sp>
-      <p:sp>
-        <p:nvSpPr>
-          <p:cNvPr id="41" name="K1">
-            <a:extLst xmlns:a="http://schemas.openxmlformats.org/drawingml/2006/main">
-              <a:ext uri="{FF2B5EF4-FFF2-40B4-BE49-F238E27FC236}">
-                <a16:creationId xmlns:a16="http://schemas.microsoft.com/office/drawing/2014/main" id="{A3228A42-D65A-46D8-A29D-5CD6B577F752}"/>
-              </a:ext>
-            </a:extLst>
-          </p:cNvPr>
-          <p:cNvSpPr>
-            <a:spLocks xmlns:a="http://schemas.openxmlformats.org/drawingml/2006/main" noGrp="1"/>
-          </p:cNvSpPr>
-          <p:nvPr/>
-        </p:nvSpPr>
-        <p:spPr>
-          <a:xfrm xmlns:a="http://schemas.openxmlformats.org/drawingml/2006/main">
-            <a:off x="3863181" y="4116387"/>
-            <a:ext cx="699492" cy="335756"/>
-          </a:xfrm>
-          <a:prstGeom xmlns:a="http://schemas.openxmlformats.org/drawingml/2006/main" prst="rect">
-            <a:avLst/>
-          </a:prstGeom>
-          <a:noFill xmlns:a="http://schemas.openxmlformats.org/drawingml/2006/main"/>
-          <a:ln xmlns:a="http://schemas.openxmlformats.org/drawingml/2006/main" w="0">
-            <a:noFill/>
-          </a:ln>
-        </p:spPr>
-        <p:txBody>
-          <a:bodyPr xmlns:a="http://schemas.openxmlformats.org/drawingml/2006/main" wrap="square" lIns="0" tIns="0" rIns="0" bIns="0" anchor="t">
-            <a:noAutofit/>
-          </a:bodyPr>
-          <a:lstStyle xmlns:a="http://schemas.openxmlformats.org/drawingml/2006/main"/>
-          <a:p xmlns:a="http://schemas.openxmlformats.org/drawingml/2006/main">
-            <a:pPr algn="ctr">
-              <a:buNone/>
-              <a:defRPr sz="1763" b="0">
-                <a:solidFill>
-                  <a:srgbClr val="111111"/>
-                </a:solidFill>
-                <a:latin typeface="Calibri"/>
-                <a:ea typeface="Calibri"/>
-                <a:cs typeface="Calibri"/>
-              </a:defRPr>
-            </a:pPr>
-            <a:r>
-              <a:rPr sz="1763" b="0">
-                <a:solidFill>
-                  <a:srgbClr val="111111"/>
-                </a:solidFill>
-                <a:latin typeface="Calibri"/>
-                <a:ea typeface="Calibri"/>
-                <a:cs typeface="Calibri"/>
-              </a:rPr>
-              <a:t>K1</a:t>
-            </a:r>
-          </a:p>
-        </p:txBody>
-      </p:sp>
-      <p:sp>
-        <p:nvSpPr>
-          <p:cNvPr id="42" name="F2">
-            <a:extLst xmlns:a="http://schemas.openxmlformats.org/drawingml/2006/main">
-              <a:ext uri="{FF2B5EF4-FFF2-40B4-BE49-F238E27FC236}">
-                <a16:creationId xmlns:a16="http://schemas.microsoft.com/office/drawing/2014/main" id="{EC9BA63E-BAAE-4557-AE57-87EEA8FEE135}"/>
-              </a:ext>
-            </a:extLst>
-          </p:cNvPr>
-          <p:cNvSpPr>
-            <a:spLocks xmlns:a="http://schemas.openxmlformats.org/drawingml/2006/main" noGrp="1"/>
-          </p:cNvSpPr>
-          <p:nvPr/>
-        </p:nvSpPr>
-        <p:spPr>
-          <a:xfrm xmlns:a="http://schemas.openxmlformats.org/drawingml/2006/main">
-            <a:off x="4851797" y="4116387"/>
-            <a:ext cx="699492" cy="335756"/>
-          </a:xfrm>
-          <a:prstGeom xmlns:a="http://schemas.openxmlformats.org/drawingml/2006/main" prst="rect">
-            <a:avLst/>
-          </a:prstGeom>
-          <a:noFill xmlns:a="http://schemas.openxmlformats.org/drawingml/2006/main"/>
-          <a:ln xmlns:a="http://schemas.openxmlformats.org/drawingml/2006/main" w="0">
-            <a:noFill/>
-          </a:ln>
-        </p:spPr>
-        <p:txBody>
-          <a:bodyPr xmlns:a="http://schemas.openxmlformats.org/drawingml/2006/main" wrap="square" lIns="0" tIns="0" rIns="0" bIns="0" anchor="t">
-            <a:noAutofit/>
-          </a:bodyPr>
-          <a:lstStyle xmlns:a="http://schemas.openxmlformats.org/drawingml/2006/main"/>
-          <a:p xmlns:a="http://schemas.openxmlformats.org/drawingml/2006/main">
-            <a:pPr algn="ctr">
-              <a:buNone/>
-              <a:defRPr sz="1763" b="0">
-                <a:solidFill>
-                  <a:srgbClr val="111111"/>
-                </a:solidFill>
-                <a:latin typeface="Calibri"/>
-                <a:ea typeface="Calibri"/>
-                <a:cs typeface="Calibri"/>
-              </a:defRPr>
-            </a:pPr>
-            <a:r>
-              <a:rPr sz="1763" b="0">
-                <a:solidFill>
-                  <a:srgbClr val="111111"/>
-                </a:solidFill>
-                <a:latin typeface="Calibri"/>
-                <a:ea typeface="Calibri"/>
-                <a:cs typeface="Calibri"/>
-              </a:rPr>
-              <a:t>F2</a:t>
-            </a:r>
-          </a:p>
-        </p:txBody>
-      </p:sp>
-      <p:sp>
-        <p:nvSpPr>
-          <p:cNvPr id="43" name="Säkringar">
-            <a:extLst xmlns:a="http://schemas.openxmlformats.org/drawingml/2006/main">
-              <a:ext uri="{FF2B5EF4-FFF2-40B4-BE49-F238E27FC236}">
-                <a16:creationId xmlns:a16="http://schemas.microsoft.com/office/drawing/2014/main" id="{B62A3351-0D95-4854-9B88-D0181AA0CF9A}"/>
-              </a:ext>
-            </a:extLst>
-          </p:cNvPr>
-          <p:cNvSpPr>
-            <a:spLocks xmlns:a="http://schemas.openxmlformats.org/drawingml/2006/main" noGrp="1"/>
-          </p:cNvSpPr>
-          <p:nvPr/>
-        </p:nvSpPr>
-        <p:spPr>
-          <a:xfrm xmlns:a="http://schemas.openxmlformats.org/drawingml/2006/main">
-            <a:off x="2165747" y="4386858"/>
-            <a:ext cx="1212453" cy="335756"/>
-          </a:xfrm>
-          <a:prstGeom xmlns:a="http://schemas.openxmlformats.org/drawingml/2006/main" prst="rect">
-            <a:avLst/>
-          </a:prstGeom>
-          <a:noFill xmlns:a="http://schemas.openxmlformats.org/drawingml/2006/main"/>
-          <a:ln xmlns:a="http://schemas.openxmlformats.org/drawingml/2006/main" w="0">
-            <a:noFill/>
-          </a:ln>
-        </p:spPr>
-        <p:txBody>
-          <a:bodyPr xmlns:a="http://schemas.openxmlformats.org/drawingml/2006/main" wrap="square" lIns="0" tIns="0" rIns="0" bIns="0" anchor="t">
-            <a:noAutofit/>
-          </a:bodyPr>
-          <a:lstStyle xmlns:a="http://schemas.openxmlformats.org/drawingml/2006/main"/>
-          <a:p xmlns:a="http://schemas.openxmlformats.org/drawingml/2006/main">
-            <a:pPr algn="ctr">
-              <a:buNone/>
-              <a:defRPr sz="1542" b="0">
-                <a:solidFill>
-                  <a:srgbClr val="111111"/>
-                </a:solidFill>
-                <a:latin typeface="Calibri"/>
-                <a:ea typeface="Calibri"/>
-                <a:cs typeface="Calibri"/>
-              </a:defRPr>
-            </a:pPr>
-            <a:r>
-              <a:rPr sz="1542" b="0">
-                <a:solidFill>
-                  <a:srgbClr val="111111"/>
-                </a:solidFill>
-                <a:latin typeface="Calibri"/>
-                <a:ea typeface="Calibri"/>
-                <a:cs typeface="Calibri"/>
-              </a:rPr>
-              <a:t>Säkringar</a:t>
-            </a:r>
-          </a:p>
-        </p:txBody>
-      </p:sp>
-      <p:sp>
-        <p:nvSpPr>
-          <p:cNvPr id="44" name="Kontaktor">
-            <a:extLst xmlns:a="http://schemas.openxmlformats.org/drawingml/2006/main">
-              <a:ext uri="{FF2B5EF4-FFF2-40B4-BE49-F238E27FC236}">
-                <a16:creationId xmlns:a16="http://schemas.microsoft.com/office/drawing/2014/main" id="{7699EEB4-F587-4850-9936-B3AC5F2900B0}"/>
-              </a:ext>
-            </a:extLst>
-          </p:cNvPr>
-          <p:cNvSpPr>
-            <a:spLocks xmlns:a="http://schemas.openxmlformats.org/drawingml/2006/main" noGrp="1"/>
-          </p:cNvSpPr>
-          <p:nvPr/>
-        </p:nvSpPr>
-        <p:spPr>
-          <a:xfrm xmlns:a="http://schemas.openxmlformats.org/drawingml/2006/main">
-            <a:off x="3676650" y="4386858"/>
-            <a:ext cx="1212453" cy="335756"/>
-          </a:xfrm>
-          <a:prstGeom xmlns:a="http://schemas.openxmlformats.org/drawingml/2006/main" prst="rect">
-            <a:avLst/>
-          </a:prstGeom>
-          <a:noFill xmlns:a="http://schemas.openxmlformats.org/drawingml/2006/main"/>
-          <a:ln xmlns:a="http://schemas.openxmlformats.org/drawingml/2006/main" w="0">
-            <a:noFill/>
-          </a:ln>
-        </p:spPr>
-        <p:txBody>
-          <a:bodyPr xmlns:a="http://schemas.openxmlformats.org/drawingml/2006/main" wrap="square" lIns="0" tIns="0" rIns="0" bIns="0" anchor="t">
-            <a:noAutofit/>
-          </a:bodyPr>
-          <a:lstStyle xmlns:a="http://schemas.openxmlformats.org/drawingml/2006/main"/>
-          <a:p xmlns:a="http://schemas.openxmlformats.org/drawingml/2006/main">
-            <a:pPr algn="ctr">
-              <a:buNone/>
-              <a:defRPr sz="1542" b="0">
-                <a:solidFill>
-                  <a:srgbClr val="111111"/>
-                </a:solidFill>
-                <a:latin typeface="Calibri"/>
-                <a:ea typeface="Calibri"/>
-                <a:cs typeface="Calibri"/>
-              </a:defRPr>
-            </a:pPr>
-            <a:r>
-              <a:rPr sz="1542" b="0">
-                <a:solidFill>
-                  <a:srgbClr val="111111"/>
-                </a:solidFill>
-                <a:latin typeface="Calibri"/>
-                <a:ea typeface="Calibri"/>
-                <a:cs typeface="Calibri"/>
-              </a:rPr>
-              <a:t>Kontaktor</a:t>
-            </a:r>
-          </a:p>
-        </p:txBody>
-      </p:sp>
-      <p:sp>
-        <p:nvSpPr>
-          <p:cNvPr id="45" name="Överlastskydd">
-            <a:extLst xmlns:a="http://schemas.openxmlformats.org/drawingml/2006/main">
-              <a:ext uri="{FF2B5EF4-FFF2-40B4-BE49-F238E27FC236}">
-                <a16:creationId xmlns:a16="http://schemas.microsoft.com/office/drawing/2014/main" id="{F768072B-7ADA-4183-81D4-0B151B6A5F8E}"/>
-              </a:ext>
-            </a:extLst>
-          </p:cNvPr>
-          <p:cNvSpPr>
-            <a:spLocks xmlns:a="http://schemas.openxmlformats.org/drawingml/2006/main" noGrp="1"/>
-          </p:cNvSpPr>
-          <p:nvPr/>
-        </p:nvSpPr>
-        <p:spPr>
-          <a:xfrm xmlns:a="http://schemas.openxmlformats.org/drawingml/2006/main">
-            <a:off x="4627959" y="4386858"/>
-            <a:ext cx="1538883" cy="335756"/>
-          </a:xfrm>
-          <a:prstGeom xmlns:a="http://schemas.openxmlformats.org/drawingml/2006/main" prst="rect">
-            <a:avLst/>
-          </a:prstGeom>
-          <a:noFill xmlns:a="http://schemas.openxmlformats.org/drawingml/2006/main"/>
-          <a:ln xmlns:a="http://schemas.openxmlformats.org/drawingml/2006/main" w="0">
-            <a:noFill/>
-          </a:ln>
-        </p:spPr>
-        <p:txBody>
-          <a:bodyPr xmlns:a="http://schemas.openxmlformats.org/drawingml/2006/main" wrap="square" lIns="0" tIns="0" rIns="0" bIns="0" anchor="t">
-            <a:noAutofit/>
-          </a:bodyPr>
-          <a:lstStyle xmlns:a="http://schemas.openxmlformats.org/drawingml/2006/main"/>
-          <a:p xmlns:a="http://schemas.openxmlformats.org/drawingml/2006/main">
-            <a:pPr algn="ctr">
-              <a:buNone/>
-              <a:defRPr sz="1542" b="0">
-                <a:solidFill>
-                  <a:srgbClr val="111111"/>
-                </a:solidFill>
-                <a:latin typeface="Calibri"/>
-                <a:ea typeface="Calibri"/>
-                <a:cs typeface="Calibri"/>
-              </a:defRPr>
-            </a:pPr>
-            <a:r>
-              <a:rPr sz="1542" b="0">
-                <a:solidFill>
-                  <a:srgbClr val="111111"/>
-                </a:solidFill>
-                <a:latin typeface="Calibri"/>
-                <a:ea typeface="Calibri"/>
-                <a:cs typeface="Calibri"/>
-              </a:rPr>
-              <a:t>Överlastskydd</a:t>
-            </a:r>
-          </a:p>
-        </p:txBody>
-      </p:sp>
-      <p:sp>
-        <p:nvSpPr>
           <p:cNvPr id="46" name="Kraftdelens förenklade funktionsschema">
             <a:extLst xmlns:a="http://schemas.openxmlformats.org/drawingml/2006/main">
               <a:ext uri="{FF2B5EF4-FFF2-40B4-BE49-F238E27FC236}">
@@ -18944,6 +16452,30 @@
           </a:p>
         </p:txBody>
       </p:sp>
+      <p:pic xmlns:a="http://schemas.openxmlformats.org/drawingml/2006/main" xmlns:r="http://schemas.openxmlformats.org/officeDocument/2006/relationships">
+        <p:nvPicPr>
+          <p:cNvPr id="51" name="schema-huvudstrom" descr="Huvudströmsschema: L1–L3 genom säkringar F1, kontaktor K1 och överlastskydd F2 till motorn M 3~."/>
+          <p:cNvPicPr>
+            <a:picLocks noChangeAspect="1"/>
+          </p:cNvPicPr>
+          <p:nvPr/>
+        </p:nvPicPr>
+        <p:blipFill>
+          <a:blip r:embed="rId3"/>
+          <a:stretch>
+            <a:fillRect/>
+          </a:stretch>
+        </p:blipFill>
+        <p:spPr>
+          <a:xfrm>
+            <a:off x="1450848" y="2395728"/>
+            <a:ext cx="6242304" cy="2340864"/>
+          </a:xfrm>
+          <a:prstGeom prst="rect">
+            <a:avLst/>
+          </a:prstGeom>
+        </p:spPr>
+      </p:pic>
     </p:spTree>
     <p:extLst>
       <p:ext uri="{BB962C8B-B14F-4D97-AF65-F5344CB8AC3E}">
@@ -19132,1062 +16664,6 @@
       </p:sp>
       <p:sp>
         <p:nvSpPr>
-          <p:cNvPr id="4" name="">
-            <a:extLst xmlns:a="http://schemas.openxmlformats.org/drawingml/2006/main">
-              <a:ext uri="{FF2B5EF4-FFF2-40B4-BE49-F238E27FC236}">
-                <a16:creationId xmlns:a16="http://schemas.microsoft.com/office/drawing/2014/main" id="{9BF1E5F8-7AFD-438D-A34A-D7EC0FEFDBB2}"/>
-              </a:ext>
-            </a:extLst>
-          </p:cNvPr>
-          <p:cNvSpPr>
-            <a:spLocks xmlns:a="http://schemas.openxmlformats.org/drawingml/2006/main" noGrp="1"/>
-          </p:cNvSpPr>
-          <p:nvPr/>
-        </p:nvSpPr>
-        <p:spPr>
-          <a:xfrm xmlns:a="http://schemas.openxmlformats.org/drawingml/2006/main" flipH="0" flipV="0">
-            <a:off x="1960562" y="3146425"/>
-            <a:ext cx="746125" cy="0"/>
-          </a:xfrm>
-          <a:prstGeom xmlns:a="http://schemas.openxmlformats.org/drawingml/2006/main" prst="line">
-            <a:avLst/>
-          </a:prstGeom>
-          <a:noFill xmlns:a="http://schemas.openxmlformats.org/drawingml/2006/main"/>
-          <a:ln xmlns:a="http://schemas.openxmlformats.org/drawingml/2006/main" w="20955">
-            <a:solidFill>
-              <a:srgbClr val="111111"/>
-            </a:solidFill>
-          </a:ln>
-        </p:spPr>
-      </p:sp>
-      <p:sp>
-        <p:nvSpPr>
-          <p:cNvPr id="5" name="+12 V">
-            <a:extLst xmlns:a="http://schemas.openxmlformats.org/drawingml/2006/main">
-              <a:ext uri="{FF2B5EF4-FFF2-40B4-BE49-F238E27FC236}">
-                <a16:creationId xmlns:a16="http://schemas.microsoft.com/office/drawing/2014/main" id="{696163E5-6C24-4B4E-88DA-F05E48206AB4}"/>
-              </a:ext>
-            </a:extLst>
-          </p:cNvPr>
-          <p:cNvSpPr>
-            <a:spLocks xmlns:a="http://schemas.openxmlformats.org/drawingml/2006/main" noGrp="1"/>
-          </p:cNvSpPr>
-          <p:nvPr/>
-        </p:nvSpPr>
-        <p:spPr>
-          <a:xfrm xmlns:a="http://schemas.openxmlformats.org/drawingml/2006/main">
-            <a:off x="1494234" y="2726730"/>
-            <a:ext cx="932656" cy="335756"/>
-          </a:xfrm>
-          <a:prstGeom xmlns:a="http://schemas.openxmlformats.org/drawingml/2006/main" prst="rect">
-            <a:avLst/>
-          </a:prstGeom>
-          <a:noFill xmlns:a="http://schemas.openxmlformats.org/drawingml/2006/main"/>
-          <a:ln xmlns:a="http://schemas.openxmlformats.org/drawingml/2006/main" w="0">
-            <a:noFill/>
-          </a:ln>
-        </p:spPr>
-        <p:txBody>
-          <a:bodyPr xmlns:a="http://schemas.openxmlformats.org/drawingml/2006/main" wrap="square" lIns="0" tIns="0" rIns="0" bIns="0" anchor="t">
-            <a:noAutofit/>
-          </a:bodyPr>
-          <a:lstStyle xmlns:a="http://schemas.openxmlformats.org/drawingml/2006/main"/>
-          <a:p xmlns:a="http://schemas.openxmlformats.org/drawingml/2006/main">
-            <a:pPr algn="ctr">
-              <a:buNone/>
-              <a:defRPr sz="1763" b="0">
-                <a:solidFill>
-                  <a:srgbClr val="111111"/>
-                </a:solidFill>
-                <a:latin typeface="Calibri"/>
-                <a:ea typeface="Calibri"/>
-                <a:cs typeface="Calibri"/>
-              </a:defRPr>
-            </a:pPr>
-            <a:r>
-              <a:rPr sz="1763" b="0">
-                <a:solidFill>
-                  <a:srgbClr val="111111"/>
-                </a:solidFill>
-                <a:latin typeface="Calibri"/>
-                <a:ea typeface="Calibri"/>
-                <a:cs typeface="Calibri"/>
-              </a:rPr>
-              <a:t>+12 V</a:t>
-            </a:r>
-          </a:p>
-        </p:txBody>
-      </p:sp>
-      <p:sp>
-        <p:nvSpPr>
-          <p:cNvPr id="6" name="">
-            <a:extLst xmlns:a="http://schemas.openxmlformats.org/drawingml/2006/main">
-              <a:ext uri="{FF2B5EF4-FFF2-40B4-BE49-F238E27FC236}">
-                <a16:creationId xmlns:a16="http://schemas.microsoft.com/office/drawing/2014/main" id="{6428EA94-B750-4595-8172-9949F6AEE392}"/>
-              </a:ext>
-            </a:extLst>
-          </p:cNvPr>
-          <p:cNvSpPr>
-            <a:spLocks xmlns:a="http://schemas.openxmlformats.org/drawingml/2006/main" noGrp="1"/>
-          </p:cNvSpPr>
-          <p:nvPr/>
-        </p:nvSpPr>
-        <p:spPr>
-          <a:xfrm xmlns:a="http://schemas.openxmlformats.org/drawingml/2006/main">
-            <a:off x="2669381" y="3109119"/>
-            <a:ext cx="74613" cy="74613"/>
-          </a:xfrm>
-          <a:prstGeom xmlns:a="http://schemas.openxmlformats.org/drawingml/2006/main" prst="ellipse">
-            <a:avLst/>
-          </a:prstGeom>
-          <a:solidFill xmlns:a="http://schemas.openxmlformats.org/drawingml/2006/main">
-            <a:srgbClr val="111111"/>
-          </a:solidFill>
-          <a:ln xmlns:a="http://schemas.openxmlformats.org/drawingml/2006/main" w="0">
-            <a:solidFill>
-              <a:srgbClr val="111111"/>
-            </a:solidFill>
-          </a:ln>
-        </p:spPr>
-      </p:sp>
-      <p:sp>
-        <p:nvSpPr>
-          <p:cNvPr id="7" name="">
-            <a:extLst xmlns:a="http://schemas.openxmlformats.org/drawingml/2006/main">
-              <a:ext uri="{FF2B5EF4-FFF2-40B4-BE49-F238E27FC236}">
-                <a16:creationId xmlns:a16="http://schemas.microsoft.com/office/drawing/2014/main" id="{DC7A58BB-A64D-4ED3-B489-D884D7550E01}"/>
-              </a:ext>
-            </a:extLst>
-          </p:cNvPr>
-          <p:cNvSpPr>
-            <a:spLocks xmlns:a="http://schemas.openxmlformats.org/drawingml/2006/main" noGrp="1"/>
-          </p:cNvSpPr>
-          <p:nvPr/>
-        </p:nvSpPr>
-        <p:spPr>
-          <a:xfrm xmlns:a="http://schemas.openxmlformats.org/drawingml/2006/main">
-            <a:off x="3135709" y="3109119"/>
-            <a:ext cx="74613" cy="74613"/>
-          </a:xfrm>
-          <a:prstGeom xmlns:a="http://schemas.openxmlformats.org/drawingml/2006/main" prst="ellipse">
-            <a:avLst/>
-          </a:prstGeom>
-          <a:solidFill xmlns:a="http://schemas.openxmlformats.org/drawingml/2006/main">
-            <a:srgbClr val="111111"/>
-          </a:solidFill>
-          <a:ln xmlns:a="http://schemas.openxmlformats.org/drawingml/2006/main" w="0">
-            <a:solidFill>
-              <a:srgbClr val="111111"/>
-            </a:solidFill>
-          </a:ln>
-        </p:spPr>
-      </p:sp>
-      <p:sp>
-        <p:nvSpPr>
-          <p:cNvPr id="8" name="">
-            <a:extLst xmlns:a="http://schemas.openxmlformats.org/drawingml/2006/main">
-              <a:ext uri="{FF2B5EF4-FFF2-40B4-BE49-F238E27FC236}">
-                <a16:creationId xmlns:a16="http://schemas.microsoft.com/office/drawing/2014/main" id="{821F235B-DC76-4E38-80B0-F703C3A99CEA}"/>
-              </a:ext>
-            </a:extLst>
-          </p:cNvPr>
-          <p:cNvSpPr>
-            <a:spLocks xmlns:a="http://schemas.openxmlformats.org/drawingml/2006/main" noGrp="1"/>
-          </p:cNvSpPr>
-          <p:nvPr/>
-        </p:nvSpPr>
-        <p:spPr>
-          <a:xfrm xmlns:a="http://schemas.openxmlformats.org/drawingml/2006/main" flipH="0" flipV="0">
-            <a:off x="2706687" y="3146425"/>
-            <a:ext cx="466328" cy="0"/>
-          </a:xfrm>
-          <a:prstGeom xmlns:a="http://schemas.openxmlformats.org/drawingml/2006/main" prst="line">
-            <a:avLst/>
-          </a:prstGeom>
-          <a:noFill xmlns:a="http://schemas.openxmlformats.org/drawingml/2006/main"/>
-          <a:ln xmlns:a="http://schemas.openxmlformats.org/drawingml/2006/main" w="20955">
-            <a:solidFill>
-              <a:srgbClr val="111111"/>
-            </a:solidFill>
-          </a:ln>
-        </p:spPr>
-      </p:sp>
-      <p:sp>
-        <p:nvSpPr>
-          <p:cNvPr id="9" name="">
-            <a:extLst xmlns:a="http://schemas.openxmlformats.org/drawingml/2006/main">
-              <a:ext uri="{FF2B5EF4-FFF2-40B4-BE49-F238E27FC236}">
-                <a16:creationId xmlns:a16="http://schemas.microsoft.com/office/drawing/2014/main" id="{B6DFF5C2-5CAE-4647-B1DC-B5C5E5A26049}"/>
-              </a:ext>
-            </a:extLst>
-          </p:cNvPr>
-          <p:cNvSpPr>
-            <a:spLocks xmlns:a="http://schemas.openxmlformats.org/drawingml/2006/main" noGrp="1"/>
-          </p:cNvSpPr>
-          <p:nvPr/>
-        </p:nvSpPr>
-        <p:spPr>
-          <a:xfrm xmlns:a="http://schemas.openxmlformats.org/drawingml/2006/main" flipH="0" flipV="0">
-            <a:off x="3173016" y="3034506"/>
-            <a:ext cx="0" cy="223838"/>
-          </a:xfrm>
-          <a:prstGeom xmlns:a="http://schemas.openxmlformats.org/drawingml/2006/main" prst="line">
-            <a:avLst/>
-          </a:prstGeom>
-          <a:noFill xmlns:a="http://schemas.openxmlformats.org/drawingml/2006/main"/>
-          <a:ln xmlns:a="http://schemas.openxmlformats.org/drawingml/2006/main" w="20955">
-            <a:solidFill>
-              <a:srgbClr val="111111"/>
-            </a:solidFill>
-          </a:ln>
-        </p:spPr>
-      </p:sp>
-      <p:sp>
-        <p:nvSpPr>
-          <p:cNvPr id="10" name="S0 NC">
-            <a:extLst xmlns:a="http://schemas.openxmlformats.org/drawingml/2006/main">
-              <a:ext uri="{FF2B5EF4-FFF2-40B4-BE49-F238E27FC236}">
-                <a16:creationId xmlns:a16="http://schemas.microsoft.com/office/drawing/2014/main" id="{C85896E9-7185-48D7-80C0-2874FBF31B1E}"/>
-              </a:ext>
-            </a:extLst>
-          </p:cNvPr>
-          <p:cNvSpPr>
-            <a:spLocks xmlns:a="http://schemas.openxmlformats.org/drawingml/2006/main" noGrp="1"/>
-          </p:cNvSpPr>
-          <p:nvPr/>
-        </p:nvSpPr>
-        <p:spPr>
-          <a:xfrm xmlns:a="http://schemas.openxmlformats.org/drawingml/2006/main">
-            <a:off x="2501503" y="2493566"/>
-            <a:ext cx="932656" cy="335756"/>
-          </a:xfrm>
-          <a:prstGeom xmlns:a="http://schemas.openxmlformats.org/drawingml/2006/main" prst="rect">
-            <a:avLst/>
-          </a:prstGeom>
-          <a:noFill xmlns:a="http://schemas.openxmlformats.org/drawingml/2006/main"/>
-          <a:ln xmlns:a="http://schemas.openxmlformats.org/drawingml/2006/main" w="0">
-            <a:noFill/>
-          </a:ln>
-        </p:spPr>
-        <p:txBody>
-          <a:bodyPr xmlns:a="http://schemas.openxmlformats.org/drawingml/2006/main" wrap="square" lIns="0" tIns="0" rIns="0" bIns="0" anchor="t">
-            <a:noAutofit/>
-          </a:bodyPr>
-          <a:lstStyle xmlns:a="http://schemas.openxmlformats.org/drawingml/2006/main"/>
-          <a:p xmlns:a="http://schemas.openxmlformats.org/drawingml/2006/main">
-            <a:pPr algn="ctr">
-              <a:buNone/>
-              <a:defRPr sz="1763" b="0">
-                <a:solidFill>
-                  <a:srgbClr val="111111"/>
-                </a:solidFill>
-                <a:latin typeface="Calibri"/>
-                <a:ea typeface="Calibri"/>
-                <a:cs typeface="Calibri"/>
-              </a:defRPr>
-            </a:pPr>
-            <a:r>
-              <a:rPr sz="1763" b="0">
-                <a:solidFill>
-                  <a:srgbClr val="111111"/>
-                </a:solidFill>
-                <a:latin typeface="Calibri"/>
-                <a:ea typeface="Calibri"/>
-                <a:cs typeface="Calibri"/>
-              </a:rPr>
-              <a:t>S0 NC</a:t>
-            </a:r>
-          </a:p>
-        </p:txBody>
-      </p:sp>
-      <p:sp>
-        <p:nvSpPr>
-          <p:cNvPr id="11" name="">
-            <a:extLst xmlns:a="http://schemas.openxmlformats.org/drawingml/2006/main">
-              <a:ext uri="{FF2B5EF4-FFF2-40B4-BE49-F238E27FC236}">
-                <a16:creationId xmlns:a16="http://schemas.microsoft.com/office/drawing/2014/main" id="{B1811251-21F8-4F38-B16A-283C31729C97}"/>
-              </a:ext>
-            </a:extLst>
-          </p:cNvPr>
-          <p:cNvSpPr>
-            <a:spLocks xmlns:a="http://schemas.openxmlformats.org/drawingml/2006/main" noGrp="1"/>
-          </p:cNvSpPr>
-          <p:nvPr/>
-        </p:nvSpPr>
-        <p:spPr>
-          <a:xfrm xmlns:a="http://schemas.openxmlformats.org/drawingml/2006/main" flipH="0" flipV="0">
-            <a:off x="3173016" y="3146425"/>
-            <a:ext cx="559594" cy="0"/>
-          </a:xfrm>
-          <a:prstGeom xmlns:a="http://schemas.openxmlformats.org/drawingml/2006/main" prst="line">
-            <a:avLst/>
-          </a:prstGeom>
-          <a:noFill xmlns:a="http://schemas.openxmlformats.org/drawingml/2006/main"/>
-          <a:ln xmlns:a="http://schemas.openxmlformats.org/drawingml/2006/main" w="20955">
-            <a:solidFill>
-              <a:srgbClr val="111111"/>
-            </a:solidFill>
-          </a:ln>
-        </p:spPr>
-      </p:sp>
-      <p:sp>
-        <p:nvSpPr>
-          <p:cNvPr id="12" name="">
-            <a:extLst xmlns:a="http://schemas.openxmlformats.org/drawingml/2006/main">
-              <a:ext uri="{FF2B5EF4-FFF2-40B4-BE49-F238E27FC236}">
-                <a16:creationId xmlns:a16="http://schemas.microsoft.com/office/drawing/2014/main" id="{963E0BB0-A592-40C1-8B17-F1CE94DD4D87}"/>
-              </a:ext>
-            </a:extLst>
-          </p:cNvPr>
-          <p:cNvSpPr>
-            <a:spLocks xmlns:a="http://schemas.openxmlformats.org/drawingml/2006/main" noGrp="1"/>
-          </p:cNvSpPr>
-          <p:nvPr/>
-        </p:nvSpPr>
-        <p:spPr>
-          <a:xfrm xmlns:a="http://schemas.openxmlformats.org/drawingml/2006/main">
-            <a:off x="3695303" y="3109119"/>
-            <a:ext cx="74613" cy="74613"/>
-          </a:xfrm>
-          <a:prstGeom xmlns:a="http://schemas.openxmlformats.org/drawingml/2006/main" prst="ellipse">
-            <a:avLst/>
-          </a:prstGeom>
-          <a:solidFill xmlns:a="http://schemas.openxmlformats.org/drawingml/2006/main">
-            <a:srgbClr val="111111"/>
-          </a:solidFill>
-          <a:ln xmlns:a="http://schemas.openxmlformats.org/drawingml/2006/main" w="0">
-            <a:solidFill>
-              <a:srgbClr val="111111"/>
-            </a:solidFill>
-          </a:ln>
-        </p:spPr>
-      </p:sp>
-      <p:sp>
-        <p:nvSpPr>
-          <p:cNvPr id="13" name="">
-            <a:extLst xmlns:a="http://schemas.openxmlformats.org/drawingml/2006/main">
-              <a:ext uri="{FF2B5EF4-FFF2-40B4-BE49-F238E27FC236}">
-                <a16:creationId xmlns:a16="http://schemas.microsoft.com/office/drawing/2014/main" id="{A9F4D3A2-FBD0-45F7-910A-23E24D60CEC6}"/>
-              </a:ext>
-            </a:extLst>
-          </p:cNvPr>
-          <p:cNvSpPr>
-            <a:spLocks xmlns:a="http://schemas.openxmlformats.org/drawingml/2006/main" noGrp="1"/>
-          </p:cNvSpPr>
-          <p:nvPr/>
-        </p:nvSpPr>
-        <p:spPr>
-          <a:xfrm xmlns:a="http://schemas.openxmlformats.org/drawingml/2006/main" flipH="0" flipV="0">
-            <a:off x="3732609" y="3146425"/>
-            <a:ext cx="419695" cy="0"/>
-          </a:xfrm>
-          <a:prstGeom xmlns:a="http://schemas.openxmlformats.org/drawingml/2006/main" prst="line">
-            <a:avLst/>
-          </a:prstGeom>
-          <a:noFill xmlns:a="http://schemas.openxmlformats.org/drawingml/2006/main"/>
-          <a:ln xmlns:a="http://schemas.openxmlformats.org/drawingml/2006/main" w="20955">
-            <a:solidFill>
-              <a:srgbClr val="111111"/>
-            </a:solidFill>
-          </a:ln>
-        </p:spPr>
-      </p:sp>
-      <p:sp>
-        <p:nvSpPr>
-          <p:cNvPr id="14" name="">
-            <a:extLst xmlns:a="http://schemas.openxmlformats.org/drawingml/2006/main">
-              <a:ext uri="{FF2B5EF4-FFF2-40B4-BE49-F238E27FC236}">
-                <a16:creationId xmlns:a16="http://schemas.microsoft.com/office/drawing/2014/main" id="{E445264C-1798-49DA-B73F-E4B0AC918697}"/>
-              </a:ext>
-            </a:extLst>
-          </p:cNvPr>
-          <p:cNvSpPr>
-            <a:spLocks xmlns:a="http://schemas.openxmlformats.org/drawingml/2006/main" noGrp="1"/>
-          </p:cNvSpPr>
-          <p:nvPr/>
-        </p:nvSpPr>
-        <p:spPr>
-          <a:xfrm xmlns:a="http://schemas.openxmlformats.org/drawingml/2006/main">
-            <a:off x="4114998" y="3109119"/>
-            <a:ext cx="74613" cy="74613"/>
-          </a:xfrm>
-          <a:prstGeom xmlns:a="http://schemas.openxmlformats.org/drawingml/2006/main" prst="ellipse">
-            <a:avLst/>
-          </a:prstGeom>
-          <a:solidFill xmlns:a="http://schemas.openxmlformats.org/drawingml/2006/main">
-            <a:srgbClr val="111111"/>
-          </a:solidFill>
-          <a:ln xmlns:a="http://schemas.openxmlformats.org/drawingml/2006/main" w="0">
-            <a:solidFill>
-              <a:srgbClr val="111111"/>
-            </a:solidFill>
-          </a:ln>
-        </p:spPr>
-      </p:sp>
-      <p:sp>
-        <p:nvSpPr>
-          <p:cNvPr id="15" name="">
-            <a:extLst xmlns:a="http://schemas.openxmlformats.org/drawingml/2006/main">
-              <a:ext uri="{FF2B5EF4-FFF2-40B4-BE49-F238E27FC236}">
-                <a16:creationId xmlns:a16="http://schemas.microsoft.com/office/drawing/2014/main" id="{FEEE06FE-7554-488C-947F-E6F4CE111493}"/>
-              </a:ext>
-            </a:extLst>
-          </p:cNvPr>
-          <p:cNvSpPr>
-            <a:spLocks xmlns:a="http://schemas.openxmlformats.org/drawingml/2006/main" noGrp="1"/>
-          </p:cNvSpPr>
-          <p:nvPr/>
-        </p:nvSpPr>
-        <p:spPr>
-          <a:xfrm xmlns:a="http://schemas.openxmlformats.org/drawingml/2006/main">
-            <a:off x="4627959" y="3109119"/>
-            <a:ext cx="74613" cy="74613"/>
-          </a:xfrm>
-          <a:prstGeom xmlns:a="http://schemas.openxmlformats.org/drawingml/2006/main" prst="ellipse">
-            <a:avLst/>
-          </a:prstGeom>
-          <a:solidFill xmlns:a="http://schemas.openxmlformats.org/drawingml/2006/main">
-            <a:srgbClr val="111111"/>
-          </a:solidFill>
-          <a:ln xmlns:a="http://schemas.openxmlformats.org/drawingml/2006/main" w="0">
-            <a:solidFill>
-              <a:srgbClr val="111111"/>
-            </a:solidFill>
-          </a:ln>
-        </p:spPr>
-      </p:sp>
-      <p:sp>
-        <p:nvSpPr>
-          <p:cNvPr id="16" name="">
-            <a:extLst xmlns:a="http://schemas.openxmlformats.org/drawingml/2006/main">
-              <a:ext uri="{FF2B5EF4-FFF2-40B4-BE49-F238E27FC236}">
-                <a16:creationId xmlns:a16="http://schemas.microsoft.com/office/drawing/2014/main" id="{D45BA9D4-3E20-4ADB-A238-F7A1587A0D44}"/>
-              </a:ext>
-            </a:extLst>
-          </p:cNvPr>
-          <p:cNvSpPr>
-            <a:spLocks xmlns:a="http://schemas.openxmlformats.org/drawingml/2006/main" noGrp="1"/>
-          </p:cNvSpPr>
-          <p:nvPr/>
-        </p:nvSpPr>
-        <p:spPr>
-          <a:xfrm xmlns:a="http://schemas.openxmlformats.org/drawingml/2006/main" flipH="0" flipV="1">
-            <a:off x="4152305" y="2866628"/>
-            <a:ext cx="512961" cy="279797"/>
-          </a:xfrm>
-          <a:prstGeom xmlns:a="http://schemas.openxmlformats.org/drawingml/2006/main" prst="line">
-            <a:avLst/>
-          </a:prstGeom>
-          <a:noFill xmlns:a="http://schemas.openxmlformats.org/drawingml/2006/main"/>
-          <a:ln xmlns:a="http://schemas.openxmlformats.org/drawingml/2006/main" w="20955">
-            <a:solidFill>
-              <a:srgbClr val="111111"/>
-            </a:solidFill>
-          </a:ln>
-        </p:spPr>
-      </p:sp>
-      <p:sp>
-        <p:nvSpPr>
-          <p:cNvPr id="17" name="S1 NO">
-            <a:extLst xmlns:a="http://schemas.openxmlformats.org/drawingml/2006/main">
-              <a:ext uri="{FF2B5EF4-FFF2-40B4-BE49-F238E27FC236}">
-                <a16:creationId xmlns:a16="http://schemas.microsoft.com/office/drawing/2014/main" id="{5534321D-F66C-47A6-8A40-DA30DB01A6C7}"/>
-              </a:ext>
-            </a:extLst>
-          </p:cNvPr>
-          <p:cNvSpPr>
-            <a:spLocks xmlns:a="http://schemas.openxmlformats.org/drawingml/2006/main" noGrp="1"/>
-          </p:cNvSpPr>
-          <p:nvPr/>
-        </p:nvSpPr>
-        <p:spPr>
-          <a:xfrm xmlns:a="http://schemas.openxmlformats.org/drawingml/2006/main">
-            <a:off x="4031059" y="2400300"/>
-            <a:ext cx="1025922" cy="335756"/>
-          </a:xfrm>
-          <a:prstGeom xmlns:a="http://schemas.openxmlformats.org/drawingml/2006/main" prst="rect">
-            <a:avLst/>
-          </a:prstGeom>
-          <a:noFill xmlns:a="http://schemas.openxmlformats.org/drawingml/2006/main"/>
-          <a:ln xmlns:a="http://schemas.openxmlformats.org/drawingml/2006/main" w="0">
-            <a:noFill/>
-          </a:ln>
-        </p:spPr>
-        <p:txBody>
-          <a:bodyPr xmlns:a="http://schemas.openxmlformats.org/drawingml/2006/main" wrap="square" lIns="0" tIns="0" rIns="0" bIns="0" anchor="t">
-            <a:noAutofit/>
-          </a:bodyPr>
-          <a:lstStyle xmlns:a="http://schemas.openxmlformats.org/drawingml/2006/main"/>
-          <a:p xmlns:a="http://schemas.openxmlformats.org/drawingml/2006/main">
-            <a:pPr algn="ctr">
-              <a:buNone/>
-              <a:defRPr sz="1763" b="0">
-                <a:solidFill>
-                  <a:srgbClr val="111111"/>
-                </a:solidFill>
-                <a:latin typeface="Calibri"/>
-                <a:ea typeface="Calibri"/>
-                <a:cs typeface="Calibri"/>
-              </a:defRPr>
-            </a:pPr>
-            <a:r>
-              <a:rPr sz="1763" b="0">
-                <a:solidFill>
-                  <a:srgbClr val="111111"/>
-                </a:solidFill>
-                <a:latin typeface="Calibri"/>
-                <a:ea typeface="Calibri"/>
-                <a:cs typeface="Calibri"/>
-              </a:rPr>
-              <a:t>S1 NO</a:t>
-            </a:r>
-          </a:p>
-        </p:txBody>
-      </p:sp>
-      <p:sp>
-        <p:nvSpPr>
-          <p:cNvPr id="18" name="">
-            <a:extLst xmlns:a="http://schemas.openxmlformats.org/drawingml/2006/main">
-              <a:ext uri="{FF2B5EF4-FFF2-40B4-BE49-F238E27FC236}">
-                <a16:creationId xmlns:a16="http://schemas.microsoft.com/office/drawing/2014/main" id="{AA3B93AE-0C13-4A61-A083-C6BACF977F60}"/>
-              </a:ext>
-            </a:extLst>
-          </p:cNvPr>
-          <p:cNvSpPr>
-            <a:spLocks xmlns:a="http://schemas.openxmlformats.org/drawingml/2006/main" noGrp="1"/>
-          </p:cNvSpPr>
-          <p:nvPr/>
-        </p:nvSpPr>
-        <p:spPr>
-          <a:xfrm xmlns:a="http://schemas.openxmlformats.org/drawingml/2006/main" flipH="0" flipV="0">
-            <a:off x="4665266" y="3146425"/>
-            <a:ext cx="839391" cy="0"/>
-          </a:xfrm>
-          <a:prstGeom xmlns:a="http://schemas.openxmlformats.org/drawingml/2006/main" prst="line">
-            <a:avLst/>
-          </a:prstGeom>
-          <a:noFill xmlns:a="http://schemas.openxmlformats.org/drawingml/2006/main"/>
-          <a:ln xmlns:a="http://schemas.openxmlformats.org/drawingml/2006/main" w="20955">
-            <a:solidFill>
-              <a:srgbClr val="111111"/>
-            </a:solidFill>
-          </a:ln>
-        </p:spPr>
-      </p:sp>
-      <p:sp>
-        <p:nvSpPr>
-          <p:cNvPr id="19" name="">
-            <a:extLst xmlns:a="http://schemas.openxmlformats.org/drawingml/2006/main">
-              <a:ext uri="{FF2B5EF4-FFF2-40B4-BE49-F238E27FC236}">
-                <a16:creationId xmlns:a16="http://schemas.microsoft.com/office/drawing/2014/main" id="{EDFB94FB-4718-403F-AB8C-0D07D079986C}"/>
-              </a:ext>
-            </a:extLst>
-          </p:cNvPr>
-          <p:cNvSpPr>
-            <a:spLocks xmlns:a="http://schemas.openxmlformats.org/drawingml/2006/main" noGrp="1"/>
-          </p:cNvSpPr>
-          <p:nvPr/>
-        </p:nvSpPr>
-        <p:spPr>
-          <a:xfrm xmlns:a="http://schemas.openxmlformats.org/drawingml/2006/main">
-            <a:off x="5467350" y="3109119"/>
-            <a:ext cx="74613" cy="74613"/>
-          </a:xfrm>
-          <a:prstGeom xmlns:a="http://schemas.openxmlformats.org/drawingml/2006/main" prst="ellipse">
-            <a:avLst/>
-          </a:prstGeom>
-          <a:solidFill xmlns:a="http://schemas.openxmlformats.org/drawingml/2006/main">
-            <a:srgbClr val="111111"/>
-          </a:solidFill>
-          <a:ln xmlns:a="http://schemas.openxmlformats.org/drawingml/2006/main" w="0">
-            <a:solidFill>
-              <a:srgbClr val="111111"/>
-            </a:solidFill>
-          </a:ln>
-        </p:spPr>
-      </p:sp>
-      <p:sp>
-        <p:nvSpPr>
-          <p:cNvPr id="20" name="">
-            <a:extLst xmlns:a="http://schemas.openxmlformats.org/drawingml/2006/main">
-              <a:ext uri="{FF2B5EF4-FFF2-40B4-BE49-F238E27FC236}">
-                <a16:creationId xmlns:a16="http://schemas.microsoft.com/office/drawing/2014/main" id="{718EB342-2E3E-4F4D-ACE6-D2AE75F5D789}"/>
-              </a:ext>
-            </a:extLst>
-          </p:cNvPr>
-          <p:cNvSpPr>
-            <a:spLocks xmlns:a="http://schemas.openxmlformats.org/drawingml/2006/main" noGrp="1"/>
-          </p:cNvSpPr>
-          <p:nvPr/>
-        </p:nvSpPr>
-        <p:spPr>
-          <a:xfrm xmlns:a="http://schemas.openxmlformats.org/drawingml/2006/main" flipH="0" flipV="0">
-            <a:off x="3732609" y="3146425"/>
-            <a:ext cx="0" cy="932656"/>
-          </a:xfrm>
-          <a:prstGeom xmlns:a="http://schemas.openxmlformats.org/drawingml/2006/main" prst="line">
-            <a:avLst/>
-          </a:prstGeom>
-          <a:noFill xmlns:a="http://schemas.openxmlformats.org/drawingml/2006/main"/>
-          <a:ln xmlns:a="http://schemas.openxmlformats.org/drawingml/2006/main" w="20955">
-            <a:solidFill>
-              <a:srgbClr val="111111"/>
-            </a:solidFill>
-          </a:ln>
-        </p:spPr>
-      </p:sp>
-      <p:sp>
-        <p:nvSpPr>
-          <p:cNvPr id="21" name="">
-            <a:extLst xmlns:a="http://schemas.openxmlformats.org/drawingml/2006/main">
-              <a:ext uri="{FF2B5EF4-FFF2-40B4-BE49-F238E27FC236}">
-                <a16:creationId xmlns:a16="http://schemas.microsoft.com/office/drawing/2014/main" id="{24A3531F-48D4-4E96-B394-E3A32C229C90}"/>
-              </a:ext>
-            </a:extLst>
-          </p:cNvPr>
-          <p:cNvSpPr>
-            <a:spLocks xmlns:a="http://schemas.openxmlformats.org/drawingml/2006/main" noGrp="1"/>
-          </p:cNvSpPr>
-          <p:nvPr/>
-        </p:nvSpPr>
-        <p:spPr>
-          <a:xfrm xmlns:a="http://schemas.openxmlformats.org/drawingml/2006/main" flipH="0" flipV="0">
-            <a:off x="3732609" y="4079081"/>
-            <a:ext cx="419695" cy="0"/>
-          </a:xfrm>
-          <a:prstGeom xmlns:a="http://schemas.openxmlformats.org/drawingml/2006/main" prst="line">
-            <a:avLst/>
-          </a:prstGeom>
-          <a:noFill xmlns:a="http://schemas.openxmlformats.org/drawingml/2006/main"/>
-          <a:ln xmlns:a="http://schemas.openxmlformats.org/drawingml/2006/main" w="20955">
-            <a:solidFill>
-              <a:srgbClr val="111111"/>
-            </a:solidFill>
-          </a:ln>
-        </p:spPr>
-      </p:sp>
-      <p:sp>
-        <p:nvSpPr>
-          <p:cNvPr id="22" name="">
-            <a:extLst xmlns:a="http://schemas.openxmlformats.org/drawingml/2006/main">
-              <a:ext uri="{FF2B5EF4-FFF2-40B4-BE49-F238E27FC236}">
-                <a16:creationId xmlns:a16="http://schemas.microsoft.com/office/drawing/2014/main" id="{998FBF18-9321-40C5-9194-2E609716619E}"/>
-              </a:ext>
-            </a:extLst>
-          </p:cNvPr>
-          <p:cNvSpPr>
-            <a:spLocks xmlns:a="http://schemas.openxmlformats.org/drawingml/2006/main" noGrp="1"/>
-          </p:cNvSpPr>
-          <p:nvPr/>
-        </p:nvSpPr>
-        <p:spPr>
-          <a:xfrm xmlns:a="http://schemas.openxmlformats.org/drawingml/2006/main">
-            <a:off x="4114998" y="4041775"/>
-            <a:ext cx="74613" cy="74613"/>
-          </a:xfrm>
-          <a:prstGeom xmlns:a="http://schemas.openxmlformats.org/drawingml/2006/main" prst="ellipse">
-            <a:avLst/>
-          </a:prstGeom>
-          <a:solidFill xmlns:a="http://schemas.openxmlformats.org/drawingml/2006/main">
-            <a:srgbClr val="111111"/>
-          </a:solidFill>
-          <a:ln xmlns:a="http://schemas.openxmlformats.org/drawingml/2006/main" w="0">
-            <a:solidFill>
-              <a:srgbClr val="111111"/>
-            </a:solidFill>
-          </a:ln>
-        </p:spPr>
-      </p:sp>
-      <p:sp>
-        <p:nvSpPr>
-          <p:cNvPr id="23" name="">
-            <a:extLst xmlns:a="http://schemas.openxmlformats.org/drawingml/2006/main">
-              <a:ext uri="{FF2B5EF4-FFF2-40B4-BE49-F238E27FC236}">
-                <a16:creationId xmlns:a16="http://schemas.microsoft.com/office/drawing/2014/main" id="{BCD6166A-C1D8-4FEF-8FCC-ED801AD16192}"/>
-              </a:ext>
-            </a:extLst>
-          </p:cNvPr>
-          <p:cNvSpPr>
-            <a:spLocks xmlns:a="http://schemas.openxmlformats.org/drawingml/2006/main" noGrp="1"/>
-          </p:cNvSpPr>
-          <p:nvPr/>
-        </p:nvSpPr>
-        <p:spPr>
-          <a:xfrm xmlns:a="http://schemas.openxmlformats.org/drawingml/2006/main">
-            <a:off x="4627959" y="4041775"/>
-            <a:ext cx="74613" cy="74613"/>
-          </a:xfrm>
-          <a:prstGeom xmlns:a="http://schemas.openxmlformats.org/drawingml/2006/main" prst="ellipse">
-            <a:avLst/>
-          </a:prstGeom>
-          <a:solidFill xmlns:a="http://schemas.openxmlformats.org/drawingml/2006/main">
-            <a:srgbClr val="111111"/>
-          </a:solidFill>
-          <a:ln xmlns:a="http://schemas.openxmlformats.org/drawingml/2006/main" w="0">
-            <a:solidFill>
-              <a:srgbClr val="111111"/>
-            </a:solidFill>
-          </a:ln>
-        </p:spPr>
-      </p:sp>
-      <p:sp>
-        <p:nvSpPr>
-          <p:cNvPr id="24" name="">
-            <a:extLst xmlns:a="http://schemas.openxmlformats.org/drawingml/2006/main">
-              <a:ext uri="{FF2B5EF4-FFF2-40B4-BE49-F238E27FC236}">
-                <a16:creationId xmlns:a16="http://schemas.microsoft.com/office/drawing/2014/main" id="{22D30A06-8F0A-4ACB-95AE-CB08FDDA95C2}"/>
-              </a:ext>
-            </a:extLst>
-          </p:cNvPr>
-          <p:cNvSpPr>
-            <a:spLocks xmlns:a="http://schemas.openxmlformats.org/drawingml/2006/main" noGrp="1"/>
-          </p:cNvSpPr>
-          <p:nvPr/>
-        </p:nvSpPr>
-        <p:spPr>
-          <a:xfrm xmlns:a="http://schemas.openxmlformats.org/drawingml/2006/main" flipH="0" flipV="1">
-            <a:off x="4152305" y="3799284"/>
-            <a:ext cx="512961" cy="279797"/>
-          </a:xfrm>
-          <a:prstGeom xmlns:a="http://schemas.openxmlformats.org/drawingml/2006/main" prst="line">
-            <a:avLst/>
-          </a:prstGeom>
-          <a:noFill xmlns:a="http://schemas.openxmlformats.org/drawingml/2006/main"/>
-          <a:ln xmlns:a="http://schemas.openxmlformats.org/drawingml/2006/main" w="20955">
-            <a:solidFill>
-              <a:srgbClr val="111111"/>
-            </a:solidFill>
-          </a:ln>
-        </p:spPr>
-      </p:sp>
-      <p:sp>
-        <p:nvSpPr>
-          <p:cNvPr id="25" name="">
-            <a:extLst xmlns:a="http://schemas.openxmlformats.org/drawingml/2006/main">
-              <a:ext uri="{FF2B5EF4-FFF2-40B4-BE49-F238E27FC236}">
-                <a16:creationId xmlns:a16="http://schemas.microsoft.com/office/drawing/2014/main" id="{70C673FA-B8FB-4978-A7DF-02CB4A48935C}"/>
-              </a:ext>
-            </a:extLst>
-          </p:cNvPr>
-          <p:cNvSpPr>
-            <a:spLocks xmlns:a="http://schemas.openxmlformats.org/drawingml/2006/main" noGrp="1"/>
-          </p:cNvSpPr>
-          <p:nvPr/>
-        </p:nvSpPr>
-        <p:spPr>
-          <a:xfrm xmlns:a="http://schemas.openxmlformats.org/drawingml/2006/main" flipH="0" flipV="0">
-            <a:off x="4665266" y="4079081"/>
-            <a:ext cx="839391" cy="0"/>
-          </a:xfrm>
-          <a:prstGeom xmlns:a="http://schemas.openxmlformats.org/drawingml/2006/main" prst="line">
-            <a:avLst/>
-          </a:prstGeom>
-          <a:noFill xmlns:a="http://schemas.openxmlformats.org/drawingml/2006/main"/>
-          <a:ln xmlns:a="http://schemas.openxmlformats.org/drawingml/2006/main" w="20955">
-            <a:solidFill>
-              <a:srgbClr val="111111"/>
-            </a:solidFill>
-          </a:ln>
-        </p:spPr>
-      </p:sp>
-      <p:sp>
-        <p:nvSpPr>
-          <p:cNvPr id="26" name="">
-            <a:extLst xmlns:a="http://schemas.openxmlformats.org/drawingml/2006/main">
-              <a:ext uri="{FF2B5EF4-FFF2-40B4-BE49-F238E27FC236}">
-                <a16:creationId xmlns:a16="http://schemas.microsoft.com/office/drawing/2014/main" id="{508221A5-6BF5-4370-907E-D1A7EB8E3553}"/>
-              </a:ext>
-            </a:extLst>
-          </p:cNvPr>
-          <p:cNvSpPr>
-            <a:spLocks xmlns:a="http://schemas.openxmlformats.org/drawingml/2006/main" noGrp="1"/>
-          </p:cNvSpPr>
-          <p:nvPr/>
-        </p:nvSpPr>
-        <p:spPr>
-          <a:xfrm xmlns:a="http://schemas.openxmlformats.org/drawingml/2006/main" flipH="0" flipV="1">
-            <a:off x="5504656" y="3146425"/>
-            <a:ext cx="0" cy="932656"/>
-          </a:xfrm>
-          <a:prstGeom xmlns:a="http://schemas.openxmlformats.org/drawingml/2006/main" prst="line">
-            <a:avLst/>
-          </a:prstGeom>
-          <a:noFill xmlns:a="http://schemas.openxmlformats.org/drawingml/2006/main"/>
-          <a:ln xmlns:a="http://schemas.openxmlformats.org/drawingml/2006/main" w="20955">
-            <a:solidFill>
-              <a:srgbClr val="111111"/>
-            </a:solidFill>
-          </a:ln>
-        </p:spPr>
-      </p:sp>
-      <p:sp>
-        <p:nvSpPr>
-          <p:cNvPr id="27" name="K1 NO">
-            <a:extLst xmlns:a="http://schemas.openxmlformats.org/drawingml/2006/main">
-              <a:ext uri="{FF2B5EF4-FFF2-40B4-BE49-F238E27FC236}">
-                <a16:creationId xmlns:a16="http://schemas.microsoft.com/office/drawing/2014/main" id="{B81C396B-B8F0-48C8-A90E-7AED746C4A58}"/>
-              </a:ext>
-            </a:extLst>
-          </p:cNvPr>
-          <p:cNvSpPr>
-            <a:spLocks xmlns:a="http://schemas.openxmlformats.org/drawingml/2006/main" noGrp="1"/>
-          </p:cNvSpPr>
-          <p:nvPr/>
-        </p:nvSpPr>
-        <p:spPr>
-          <a:xfrm xmlns:a="http://schemas.openxmlformats.org/drawingml/2006/main">
-            <a:off x="4012406" y="4302919"/>
-            <a:ext cx="1119188" cy="335756"/>
-          </a:xfrm>
-          <a:prstGeom xmlns:a="http://schemas.openxmlformats.org/drawingml/2006/main" prst="rect">
-            <a:avLst/>
-          </a:prstGeom>
-          <a:noFill xmlns:a="http://schemas.openxmlformats.org/drawingml/2006/main"/>
-          <a:ln xmlns:a="http://schemas.openxmlformats.org/drawingml/2006/main" w="0">
-            <a:noFill/>
-          </a:ln>
-        </p:spPr>
-        <p:txBody>
-          <a:bodyPr xmlns:a="http://schemas.openxmlformats.org/drawingml/2006/main" wrap="square" lIns="0" tIns="0" rIns="0" bIns="0" anchor="t">
-            <a:noAutofit/>
-          </a:bodyPr>
-          <a:lstStyle xmlns:a="http://schemas.openxmlformats.org/drawingml/2006/main"/>
-          <a:p xmlns:a="http://schemas.openxmlformats.org/drawingml/2006/main">
-            <a:pPr algn="ctr">
-              <a:buNone/>
-              <a:defRPr sz="1763" b="0">
-                <a:solidFill>
-                  <a:srgbClr val="111111"/>
-                </a:solidFill>
-                <a:latin typeface="Calibri"/>
-                <a:ea typeface="Calibri"/>
-                <a:cs typeface="Calibri"/>
-              </a:defRPr>
-            </a:pPr>
-            <a:r>
-              <a:rPr sz="1763" b="0">
-                <a:solidFill>
-                  <a:srgbClr val="111111"/>
-                </a:solidFill>
-                <a:latin typeface="Calibri"/>
-                <a:ea typeface="Calibri"/>
-                <a:cs typeface="Calibri"/>
-              </a:rPr>
-              <a:t>K1 NO</a:t>
-            </a:r>
-          </a:p>
-        </p:txBody>
-      </p:sp>
-      <p:sp>
-        <p:nvSpPr>
-          <p:cNvPr id="28" name="">
-            <a:extLst xmlns:a="http://schemas.openxmlformats.org/drawingml/2006/main">
-              <a:ext uri="{FF2B5EF4-FFF2-40B4-BE49-F238E27FC236}">
-                <a16:creationId xmlns:a16="http://schemas.microsoft.com/office/drawing/2014/main" id="{AFA770A7-F899-4ECF-8C01-C852D23B361C}"/>
-              </a:ext>
-            </a:extLst>
-          </p:cNvPr>
-          <p:cNvSpPr>
-            <a:spLocks xmlns:a="http://schemas.openxmlformats.org/drawingml/2006/main" noGrp="1"/>
-          </p:cNvSpPr>
-          <p:nvPr/>
-        </p:nvSpPr>
-        <p:spPr>
-          <a:xfrm xmlns:a="http://schemas.openxmlformats.org/drawingml/2006/main" flipH="0" flipV="0">
-            <a:off x="5504656" y="3146425"/>
-            <a:ext cx="512961" cy="0"/>
-          </a:xfrm>
-          <a:prstGeom xmlns:a="http://schemas.openxmlformats.org/drawingml/2006/main" prst="line">
-            <a:avLst/>
-          </a:prstGeom>
-          <a:noFill xmlns:a="http://schemas.openxmlformats.org/drawingml/2006/main"/>
-          <a:ln xmlns:a="http://schemas.openxmlformats.org/drawingml/2006/main" w="20955">
-            <a:solidFill>
-              <a:srgbClr val="111111"/>
-            </a:solidFill>
-          </a:ln>
-        </p:spPr>
-      </p:sp>
-      <p:sp>
-        <p:nvSpPr>
-          <p:cNvPr id="29" name="">
-            <a:extLst xmlns:a="http://schemas.openxmlformats.org/drawingml/2006/main">
-              <a:ext uri="{FF2B5EF4-FFF2-40B4-BE49-F238E27FC236}">
-                <a16:creationId xmlns:a16="http://schemas.microsoft.com/office/drawing/2014/main" id="{0EB5C729-206F-4E68-BDBD-D23E1DC76AB3}"/>
-              </a:ext>
-            </a:extLst>
-          </p:cNvPr>
-          <p:cNvSpPr>
-            <a:spLocks xmlns:a="http://schemas.openxmlformats.org/drawingml/2006/main" noGrp="1"/>
-          </p:cNvSpPr>
-          <p:nvPr/>
-        </p:nvSpPr>
-        <p:spPr>
-          <a:xfrm xmlns:a="http://schemas.openxmlformats.org/drawingml/2006/main">
-            <a:off x="6017617" y="2866628"/>
-            <a:ext cx="746125" cy="559594"/>
-          </a:xfrm>
-          <a:prstGeom xmlns:a="http://schemas.openxmlformats.org/drawingml/2006/main" prst="rect">
-            <a:avLst/>
-          </a:prstGeom>
-          <a:solidFill xmlns:a="http://schemas.openxmlformats.org/drawingml/2006/main">
-            <a:srgbClr val="FFFFFF"/>
-          </a:solidFill>
-          <a:ln xmlns:a="http://schemas.openxmlformats.org/drawingml/2006/main" w="19050">
-            <a:solidFill>
-              <a:srgbClr val="111111"/>
-            </a:solidFill>
-          </a:ln>
-        </p:spPr>
-      </p:sp>
-      <p:sp>
-        <p:nvSpPr>
-          <p:cNvPr id="30" name="K1">
-            <a:extLst xmlns:a="http://schemas.openxmlformats.org/drawingml/2006/main">
-              <a:ext uri="{FF2B5EF4-FFF2-40B4-BE49-F238E27FC236}">
-                <a16:creationId xmlns:a16="http://schemas.microsoft.com/office/drawing/2014/main" id="{CFC486BA-AD17-4975-9F95-E8548D381956}"/>
-              </a:ext>
-            </a:extLst>
-          </p:cNvPr>
-          <p:cNvSpPr>
-            <a:spLocks xmlns:a="http://schemas.openxmlformats.org/drawingml/2006/main" noGrp="1"/>
-          </p:cNvSpPr>
-          <p:nvPr/>
-        </p:nvSpPr>
-        <p:spPr>
-          <a:xfrm xmlns:a="http://schemas.openxmlformats.org/drawingml/2006/main">
-            <a:off x="6110883" y="2997200"/>
-            <a:ext cx="559594" cy="335756"/>
-          </a:xfrm>
-          <a:prstGeom xmlns:a="http://schemas.openxmlformats.org/drawingml/2006/main" prst="rect">
-            <a:avLst/>
-          </a:prstGeom>
-          <a:noFill xmlns:a="http://schemas.openxmlformats.org/drawingml/2006/main"/>
-          <a:ln xmlns:a="http://schemas.openxmlformats.org/drawingml/2006/main" w="0">
-            <a:noFill/>
-          </a:ln>
-        </p:spPr>
-        <p:txBody>
-          <a:bodyPr xmlns:a="http://schemas.openxmlformats.org/drawingml/2006/main" wrap="square" lIns="0" tIns="0" rIns="0" bIns="0" anchor="t">
-            <a:noAutofit/>
-          </a:bodyPr>
-          <a:lstStyle xmlns:a="http://schemas.openxmlformats.org/drawingml/2006/main"/>
-          <a:p xmlns:a="http://schemas.openxmlformats.org/drawingml/2006/main">
-            <a:pPr algn="ctr">
-              <a:buNone/>
-              <a:defRPr sz="1763" b="0">
-                <a:solidFill>
-                  <a:srgbClr val="111111"/>
-                </a:solidFill>
-                <a:latin typeface="Calibri"/>
-                <a:ea typeface="Calibri"/>
-                <a:cs typeface="Calibri"/>
-              </a:defRPr>
-            </a:pPr>
-            <a:r>
-              <a:rPr sz="1763" b="0">
-                <a:solidFill>
-                  <a:srgbClr val="111111"/>
-                </a:solidFill>
-                <a:latin typeface="Calibri"/>
-                <a:ea typeface="Calibri"/>
-                <a:cs typeface="Calibri"/>
-              </a:rPr>
-              <a:t>K1</a:t>
-            </a:r>
-          </a:p>
-        </p:txBody>
-      </p:sp>
-      <p:sp>
-        <p:nvSpPr>
-          <p:cNvPr id="31" name="">
-            <a:extLst xmlns:a="http://schemas.openxmlformats.org/drawingml/2006/main">
-              <a:ext uri="{FF2B5EF4-FFF2-40B4-BE49-F238E27FC236}">
-                <a16:creationId xmlns:a16="http://schemas.microsoft.com/office/drawing/2014/main" id="{81DBB9A1-9520-4FED-940C-D392223AFB52}"/>
-              </a:ext>
-            </a:extLst>
-          </p:cNvPr>
-          <p:cNvSpPr>
-            <a:spLocks xmlns:a="http://schemas.openxmlformats.org/drawingml/2006/main" noGrp="1"/>
-          </p:cNvSpPr>
-          <p:nvPr/>
-        </p:nvSpPr>
-        <p:spPr>
-          <a:xfrm xmlns:a="http://schemas.openxmlformats.org/drawingml/2006/main" flipH="0" flipV="0">
-            <a:off x="6763742" y="3146425"/>
-            <a:ext cx="512961" cy="0"/>
-          </a:xfrm>
-          <a:prstGeom xmlns:a="http://schemas.openxmlformats.org/drawingml/2006/main" prst="line">
-            <a:avLst/>
-          </a:prstGeom>
-          <a:noFill xmlns:a="http://schemas.openxmlformats.org/drawingml/2006/main"/>
-          <a:ln xmlns:a="http://schemas.openxmlformats.org/drawingml/2006/main" w="20955">
-            <a:solidFill>
-              <a:srgbClr val="111111"/>
-            </a:solidFill>
-          </a:ln>
-        </p:spPr>
-      </p:sp>
-      <p:sp>
-        <p:nvSpPr>
-          <p:cNvPr id="32" name="0 V">
-            <a:extLst xmlns:a="http://schemas.openxmlformats.org/drawingml/2006/main">
-              <a:ext uri="{FF2B5EF4-FFF2-40B4-BE49-F238E27FC236}">
-                <a16:creationId xmlns:a16="http://schemas.microsoft.com/office/drawing/2014/main" id="{BEBB373B-7B66-4C04-ABC4-B5E1DAD62D73}"/>
-              </a:ext>
-            </a:extLst>
-          </p:cNvPr>
-          <p:cNvSpPr>
-            <a:spLocks xmlns:a="http://schemas.openxmlformats.org/drawingml/2006/main" noGrp="1"/>
-          </p:cNvSpPr>
-          <p:nvPr/>
-        </p:nvSpPr>
-        <p:spPr>
-          <a:xfrm xmlns:a="http://schemas.openxmlformats.org/drawingml/2006/main">
-            <a:off x="6922294" y="2726730"/>
-            <a:ext cx="652859" cy="335756"/>
-          </a:xfrm>
-          <a:prstGeom xmlns:a="http://schemas.openxmlformats.org/drawingml/2006/main" prst="rect">
-            <a:avLst/>
-          </a:prstGeom>
-          <a:noFill xmlns:a="http://schemas.openxmlformats.org/drawingml/2006/main"/>
-          <a:ln xmlns:a="http://schemas.openxmlformats.org/drawingml/2006/main" w="0">
-            <a:noFill/>
-          </a:ln>
-        </p:spPr>
-        <p:txBody>
-          <a:bodyPr xmlns:a="http://schemas.openxmlformats.org/drawingml/2006/main" wrap="square" lIns="0" tIns="0" rIns="0" bIns="0" anchor="t">
-            <a:noAutofit/>
-          </a:bodyPr>
-          <a:lstStyle xmlns:a="http://schemas.openxmlformats.org/drawingml/2006/main"/>
-          <a:p xmlns:a="http://schemas.openxmlformats.org/drawingml/2006/main">
-            <a:pPr algn="ctr">
-              <a:buNone/>
-              <a:defRPr sz="1763" b="0">
-                <a:solidFill>
-                  <a:srgbClr val="111111"/>
-                </a:solidFill>
-                <a:latin typeface="Calibri"/>
-                <a:ea typeface="Calibri"/>
-                <a:cs typeface="Calibri"/>
-              </a:defRPr>
-            </a:pPr>
-            <a:r>
-              <a:rPr sz="1763" b="0">
-                <a:solidFill>
-                  <a:srgbClr val="111111"/>
-                </a:solidFill>
-                <a:latin typeface="Calibri"/>
-                <a:ea typeface="Calibri"/>
-                <a:cs typeface="Calibri"/>
-              </a:rPr>
-              <a:t>0 V</a:t>
-            </a:r>
-          </a:p>
-        </p:txBody>
-      </p:sp>
-      <p:sp>
-        <p:nvSpPr>
           <p:cNvPr id="33" name="S0 i serie med (S1 parallellt med K1)">
             <a:extLst xmlns:a="http://schemas.openxmlformats.org/drawingml/2006/main">
               <a:ext uri="{FF2B5EF4-FFF2-40B4-BE49-F238E27FC236}">
@@ -20384,6 +16860,30 @@
           </a:p>
         </p:txBody>
       </p:sp>
+      <p:pic xmlns:a="http://schemas.openxmlformats.org/drawingml/2006/main" xmlns:r="http://schemas.openxmlformats.org/officeDocument/2006/relationships">
+        <p:nvPicPr>
+          <p:cNvPr id="38" name="schema-hallkrets" descr="+12 V – S0 STOPP (NC) – S1 START (NO) parallellt med K1 (NO) – spolen K1 – 0 V."/>
+          <p:cNvPicPr>
+            <a:picLocks noChangeAspect="1"/>
+          </p:cNvPicPr>
+          <p:nvPr/>
+        </p:nvPicPr>
+        <p:blipFill>
+          <a:blip r:embed="rId3"/>
+          <a:stretch>
+            <a:fillRect/>
+          </a:stretch>
+        </p:blipFill>
+        <p:spPr>
+          <a:xfrm>
+            <a:off x="1138733" y="2395728"/>
+            <a:ext cx="6866534" cy="2340864"/>
+          </a:xfrm>
+          <a:prstGeom prst="rect">
+            <a:avLst/>
+          </a:prstGeom>
+        </p:spPr>
+      </p:pic>
     </p:spTree>
     <p:extLst>
       <p:ext uri="{BB962C8B-B14F-4D97-AF65-F5344CB8AC3E}">

--- a/sjoskolan/vecka-43/aktuell/v43_03_Elscheman_och_dokumentation_elev.pptx
+++ b/sjoskolan/vecka-43/aktuell/v43_03_Elscheman_och_dokumentation_elev.pptx
@@ -3846,7 +3846,7 @@
                 <a:ea typeface="Calibri"/>
                 <a:cs typeface="Calibri"/>
               </a:rPr>
-              <a:t>NO = normalt öppen; NC = normalt sluten</a:t>
+              <a:t>Kontakter ritas i opåverkat läge (ingen trycker, spolen strömlös)</a:t>
             </a:r>
           </a:p>
         </p:txBody>
@@ -5018,7 +5018,7 @@
                 <a:ea typeface="Calibri"/>
                 <a:cs typeface="Calibri"/>
               </a:rPr>
-              <a:t>K1 står vid en spole och vid en kontakt på en annan schemasida. Vad ska beteckningen hjälpa dig att förstå?</a:t>
+              <a:t>K1 står vid en spole på en sida och vid en kontakt på en annan sida i schemat. Vad betyder det att båda heter K1? Hur hittar du den andra delen?</a:t>
             </a:r>
           </a:p>
         </p:txBody>
@@ -5351,7 +5351,7 @@
                 <a:ea typeface="Calibri"/>
                 <a:cs typeface="Calibri"/>
               </a:rPr>
-              <a:t>När K1 drar sluter dess NO-kontakt, och den kan hålla kvar matningen när START går tillbaka till öppet läge.</a:t>
+              <a:t>Vad händer med strömvägen till spolen när du släpper START? Vilken kontakt ändrar läge när K1 drar?</a:t>
             </a:r>
           </a:p>
         </p:txBody>
@@ -6075,7 +6075,7 @@
                 <a:ea typeface="Calibri"/>
                 <a:cs typeface="Calibri"/>
               </a:rPr>
-              <a:t>Om S0 ligger före förgreningen måste både START-vägen och hållvägen gå genom S0.</a:t>
+              <a:t>Rita de två vägarna till spolen. Vilka kontakter passerar varje väg?</a:t>
             </a:r>
           </a:p>
         </p:txBody>
@@ -9974,7 +9974,29 @@
                 <a:ea typeface="Calibri"/>
                 <a:cs typeface="Calibri"/>
               </a:rPr>
-              <a:t>Öppen matningsväg ger Ispole = 0</a:t>
+              <a:t>Öppen matningsväg ger I</a:t>
+            </a:r>
+            <a:r>
+              <a:rPr sz="2400" b="1" baseline="-25000">
+                <a:solidFill>
+                  <a:srgbClr val="064F91"/>
+                </a:solidFill>
+                <a:latin typeface="Calibri"/>
+                <a:ea typeface="Calibri"/>
+                <a:cs typeface="Calibri"/>
+              </a:rPr>
+              <a:t>spole</a:t>
+            </a:r>
+            <a:r>
+              <a:rPr sz="2400" b="1">
+                <a:solidFill>
+                  <a:srgbClr val="064F91"/>
+                </a:solidFill>
+                <a:latin typeface="Calibri"/>
+                <a:ea typeface="Calibri"/>
+                <a:cs typeface="Calibri"/>
+              </a:rPr>
+              <a:t> = 0</a:t>
             </a:r>
           </a:p>
           <a:p xmlns:a="http://schemas.openxmlformats.org/drawingml/2006/main">
@@ -9997,7 +10019,62 @@
                 <a:ea typeface="Calibri"/>
                 <a:cs typeface="Calibri"/>
               </a:rPr>
-              <a:t>Uspole = Rspole · Ispole</a:t>
+              <a:t>U</a:t>
+            </a:r>
+            <a:r>
+              <a:rPr sz="2400" b="1" baseline="-25000">
+                <a:solidFill>
+                  <a:srgbClr val="064F91"/>
+                </a:solidFill>
+                <a:latin typeface="Calibri"/>
+                <a:ea typeface="Calibri"/>
+                <a:cs typeface="Calibri"/>
+              </a:rPr>
+              <a:t>spole</a:t>
+            </a:r>
+            <a:r>
+              <a:rPr sz="2400" b="1">
+                <a:solidFill>
+                  <a:srgbClr val="064F91"/>
+                </a:solidFill>
+                <a:latin typeface="Calibri"/>
+                <a:ea typeface="Calibri"/>
+                <a:cs typeface="Calibri"/>
+              </a:rPr>
+              <a:t> = R</a:t>
+            </a:r>
+            <a:r>
+              <a:rPr sz="2400" b="1" baseline="-25000">
+                <a:solidFill>
+                  <a:srgbClr val="064F91"/>
+                </a:solidFill>
+                <a:latin typeface="Calibri"/>
+                <a:ea typeface="Calibri"/>
+                <a:cs typeface="Calibri"/>
+              </a:rPr>
+              <a:t>spole</a:t>
+            </a:r>
+            <a:r>
+              <a:rPr sz="2400" b="1">
+                <a:solidFill>
+                  <a:srgbClr val="064F91"/>
+                </a:solidFill>
+                <a:latin typeface="Calibri"/>
+                <a:ea typeface="Calibri"/>
+                <a:cs typeface="Calibri"/>
+              </a:rPr>
+              <a:t> · I</a:t>
+            </a:r>
+            <a:r>
+              <a:rPr sz="2400" b="1" baseline="-25000">
+                <a:solidFill>
+                  <a:srgbClr val="064F91"/>
+                </a:solidFill>
+                <a:latin typeface="Calibri"/>
+                <a:ea typeface="Calibri"/>
+                <a:cs typeface="Calibri"/>
+              </a:rPr>
+              <a:t>spole</a:t>
             </a:r>
           </a:p>
         </p:txBody>
@@ -10745,7 +10822,62 @@
                 <a:ea typeface="Calibri"/>
                 <a:cs typeface="Calibri"/>
               </a:rPr>
-              <a:t>Uspole = Vmatningssida − Vretur</a:t>
+              <a:t>U</a:t>
+            </a:r>
+            <a:r>
+              <a:rPr sz="2400" b="1" baseline="-25000">
+                <a:solidFill>
+                  <a:srgbClr val="064F91"/>
+                </a:solidFill>
+                <a:latin typeface="Calibri"/>
+                <a:ea typeface="Calibri"/>
+                <a:cs typeface="Calibri"/>
+              </a:rPr>
+              <a:t>spole</a:t>
+            </a:r>
+            <a:r>
+              <a:rPr sz="2400" b="1">
+                <a:solidFill>
+                  <a:srgbClr val="064F91"/>
+                </a:solidFill>
+                <a:latin typeface="Calibri"/>
+                <a:ea typeface="Calibri"/>
+                <a:cs typeface="Calibri"/>
+              </a:rPr>
+              <a:t> = V</a:t>
+            </a:r>
+            <a:r>
+              <a:rPr sz="2400" b="1" baseline="-25000">
+                <a:solidFill>
+                  <a:srgbClr val="064F91"/>
+                </a:solidFill>
+                <a:latin typeface="Calibri"/>
+                <a:ea typeface="Calibri"/>
+                <a:cs typeface="Calibri"/>
+              </a:rPr>
+              <a:t>matning</a:t>
+            </a:r>
+            <a:r>
+              <a:rPr sz="2400" b="1">
+                <a:solidFill>
+                  <a:srgbClr val="064F91"/>
+                </a:solidFill>
+                <a:latin typeface="Calibri"/>
+                <a:ea typeface="Calibri"/>
+                <a:cs typeface="Calibri"/>
+              </a:rPr>
+              <a:t> − V</a:t>
+            </a:r>
+            <a:r>
+              <a:rPr sz="2400" b="1" baseline="-25000">
+                <a:solidFill>
+                  <a:srgbClr val="064F91"/>
+                </a:solidFill>
+                <a:latin typeface="Calibri"/>
+                <a:ea typeface="Calibri"/>
+                <a:cs typeface="Calibri"/>
+              </a:rPr>
+              <a:t>retur</a:t>
             </a:r>
           </a:p>
         </p:txBody>
@@ -11493,7 +11625,62 @@
                 <a:ea typeface="Calibri"/>
                 <a:cs typeface="Calibri"/>
               </a:rPr>
-              <a:t>Uöppen kontakt = Vföre − Vefter</a:t>
+              <a:t>U</a:t>
+            </a:r>
+            <a:r>
+              <a:rPr sz="2400" b="1" baseline="-25000">
+                <a:solidFill>
+                  <a:srgbClr val="064F91"/>
+                </a:solidFill>
+                <a:latin typeface="Calibri"/>
+                <a:ea typeface="Calibri"/>
+                <a:cs typeface="Calibri"/>
+              </a:rPr>
+              <a:t>kontakt</a:t>
+            </a:r>
+            <a:r>
+              <a:rPr sz="2400" b="1">
+                <a:solidFill>
+                  <a:srgbClr val="064F91"/>
+                </a:solidFill>
+                <a:latin typeface="Calibri"/>
+                <a:ea typeface="Calibri"/>
+                <a:cs typeface="Calibri"/>
+              </a:rPr>
+              <a:t> = V</a:t>
+            </a:r>
+            <a:r>
+              <a:rPr sz="2400" b="1" baseline="-25000">
+                <a:solidFill>
+                  <a:srgbClr val="064F91"/>
+                </a:solidFill>
+                <a:latin typeface="Calibri"/>
+                <a:ea typeface="Calibri"/>
+                <a:cs typeface="Calibri"/>
+              </a:rPr>
+              <a:t>före</a:t>
+            </a:r>
+            <a:r>
+              <a:rPr sz="2400" b="1">
+                <a:solidFill>
+                  <a:srgbClr val="064F91"/>
+                </a:solidFill>
+                <a:latin typeface="Calibri"/>
+                <a:ea typeface="Calibri"/>
+                <a:cs typeface="Calibri"/>
+              </a:rPr>
+              <a:t> − V</a:t>
+            </a:r>
+            <a:r>
+              <a:rPr sz="2400" b="1" baseline="-25000">
+                <a:solidFill>
+                  <a:srgbClr val="064F91"/>
+                </a:solidFill>
+                <a:latin typeface="Calibri"/>
+                <a:ea typeface="Calibri"/>
+                <a:cs typeface="Calibri"/>
+              </a:rPr>
+              <a:t>efter</a:t>
             </a:r>
           </a:p>
         </p:txBody>
@@ -13593,7 +13780,7 @@
                 <a:ea typeface="Calibri"/>
                 <a:cs typeface="Calibri"/>
               </a:rPr>
-              <a:t>Förutsättningar: STOPP-knappen S0 (NC) ligger i serie med START-knappen S1, som i sin tur ligger parallellt med K1:s hållkontakt (NO). Returen är hel.</a:t>
+              <a:t>Förutsättningar: STOPP-knappen S0 är NC. START-knappen S1 är NO. K1:s hållkontakt (NO) ligger parallellt med S1. S0 ligger i serie före båda. Returen är hel.</a:t>
             </a:r>
           </a:p>
         </p:txBody>

--- a/sjoskolan/vecka-43/aktuell/v43_03_Elscheman_och_dokumentation_elev.pptx
+++ b/sjoskolan/vecka-43/aktuell/v43_03_Elscheman_och_dokumentation_elev.pptx
@@ -4645,7 +4645,7 @@
                 </a:solidFill>
                 <a:latin typeface="Calibri"/>
               </a:rPr>
-              <a:t>I inlämningen ingår funktion, komponenter och förväntade mätvärden vid definierade mätpunkter.</a:t>
+              <a:t>Inlämning 3 bygger på hållkretsen: nödstoppet, lampan, kretsens fem lägen och en felsökningsrad.</a:t>
             </a:r>
           </a:p>
         </p:txBody>
@@ -5979,7 +5979,7 @@
                 </a:solidFill>
                 <a:latin typeface="Calibri"/>
               </a:rPr>
-              <a:t>Inlämning 3 bygger på hållkretsen: redovisa funktion, komponenter och förväntade mätvärden vid definierade mätpunkter. Inlämningen senast i dag, fredag 23 oktober.</a:t>
+              <a:t>Inlämning 3 bygger på hållkretsen: nödstoppet S2, lampan H1, kretsens fem lägen och en felsökningsrad. Inlämningen senast i dag, fredag 23 oktober.</a:t>
             </a:r>
           </a:p>
         </p:txBody>
@@ -6578,7 +6578,7 @@
                 </a:solidFill>
                 <a:latin typeface="Calibri"/>
               </a:rPr>
-              <a:t>Inlämningen och felsökningsrapporten senast i dag, fredag 23 oktober. Allt finns på veckosidan.</a:t>
+              <a:t>Inlämningen, uppgift 1–4, senast i dag, fredag 23 oktober. Allt finns på veckosidan.</a:t>
             </a:r>
           </a:p>
         </p:txBody>

--- a/sjoskolan/vecka-43/aktuell/v43_03_Elscheman_och_dokumentation_elev.pptx
+++ b/sjoskolan/vecka-43/aktuell/v43_03_Elscheman_och_dokumentation_elev.pptx
@@ -5631,14 +5631,140 @@
       </p:sp>
       <p:sp>
         <p:nvSpPr>
-          <p:cNvPr id="11" name="TextBox 10"/>
+          <p:cNvPr id="11" name="Rectangle 10"/>
+          <p:cNvSpPr/>
+          <p:nvPr/>
+        </p:nvSpPr>
+        <p:spPr>
+          <a:xfrm>
+            <a:off x="548640" y="3410712"/>
+            <a:ext cx="8046720" cy="566928"/>
+          </a:xfrm>
+          <a:prstGeom prst="rect">
+            <a:avLst/>
+          </a:prstGeom>
+          <a:solidFill>
+            <a:srgbClr val="F2F5F9"/>
+          </a:solidFill>
+          <a:ln>
+            <a:noFill/>
+          </a:ln>
+          <a:effectLst/>
+        </p:spPr>
+        <p:style>
+          <a:lnRef idx="1">
+            <a:schemeClr val="accent1"/>
+          </a:lnRef>
+          <a:fillRef idx="3">
+            <a:schemeClr val="accent1"/>
+          </a:fillRef>
+          <a:effectRef idx="2">
+            <a:schemeClr val="accent1"/>
+          </a:effectRef>
+          <a:fontRef idx="minor">
+            <a:schemeClr val="lt1"/>
+          </a:fontRef>
+        </p:style>
+        <p:txBody>
+          <a:bodyPr rtlCol="0" anchor="ctr"/>
+          <a:lstStyle/>
+          <a:p/>
+        </p:txBody>
+      </p:sp>
+      <p:sp>
+        <p:nvSpPr>
+          <p:cNvPr id="12" name="TextBox 11"/>
           <p:cNvSpPr txBox="1"/>
           <p:nvPr/>
         </p:nvSpPr>
         <p:spPr>
           <a:xfrm>
-            <a:off x="548640" y="3547872"/>
-            <a:ext cx="8046720" cy="2350008"/>
+            <a:off x="685800" y="3410712"/>
+            <a:ext cx="1737360" cy="566928"/>
+          </a:xfrm>
+          <a:prstGeom prst="rect">
+            <a:avLst/>
+          </a:prstGeom>
+          <a:noFill/>
+        </p:spPr>
+        <p:txBody>
+          <a:bodyPr wrap="square" anchor="ctr" lIns="27432" rIns="27432" tIns="18288" bIns="18288">
+            <a:spAutoFit/>
+          </a:bodyPr>
+          <a:lstStyle/>
+          <a:p>
+            <a:pPr algn="l">
+              <a:lnSpc>
+                <a:spcPct val="108000"/>
+              </a:lnSpc>
+              <a:spcAft>
+                <a:spcPts val="0"/>
+              </a:spcAft>
+            </a:pPr>
+            <a:r>
+              <a:rPr sz="2000" b="1" i="0">
+                <a:solidFill>
+                  <a:srgbClr val="111111"/>
+                </a:solidFill>
+                <a:latin typeface="Calibri"/>
+              </a:rPr>
+              <a:t>Övning 3.9</a:t>
+            </a:r>
+          </a:p>
+        </p:txBody>
+      </p:sp>
+      <p:sp>
+        <p:nvSpPr>
+          <p:cNvPr id="13" name="TextBox 12"/>
+          <p:cNvSpPr txBox="1"/>
+          <p:nvPr/>
+        </p:nvSpPr>
+        <p:spPr>
+          <a:xfrm>
+            <a:off x="2468880" y="3410712"/>
+            <a:ext cx="6035040" cy="566928"/>
+          </a:xfrm>
+          <a:prstGeom prst="rect">
+            <a:avLst/>
+          </a:prstGeom>
+          <a:noFill/>
+        </p:spPr>
+        <p:txBody>
+          <a:bodyPr wrap="square" anchor="ctr" lIns="27432" rIns="27432" tIns="18288" bIns="18288">
+            <a:spAutoFit/>
+          </a:bodyPr>
+          <a:lstStyle/>
+          <a:p>
+            <a:pPr algn="l">
+              <a:lnSpc>
+                <a:spcPct val="108000"/>
+              </a:lnSpc>
+              <a:spcAft>
+                <a:spcPts val="0"/>
+              </a:spcAft>
+            </a:pPr>
+            <a:r>
+              <a:rPr sz="2000" b="0" i="0">
+                <a:solidFill>
+                  <a:srgbClr val="111111"/>
+                </a:solidFill>
+                <a:latin typeface="Calibri"/>
+              </a:rPr>
+              <a:t>Brist i en ritning</a:t>
+            </a:r>
+          </a:p>
+        </p:txBody>
+      </p:sp>
+      <p:sp>
+        <p:nvSpPr>
+          <p:cNvPr id="14" name="TextBox 13"/>
+          <p:cNvSpPr txBox="1"/>
+          <p:nvPr/>
+        </p:nvSpPr>
+        <p:spPr>
+          <a:xfrm>
+            <a:off x="548640" y="4224528"/>
+            <a:ext cx="8046720" cy="1673351"/>
           </a:xfrm>
           <a:prstGeom prst="rect">
             <a:avLst/>
@@ -5666,7 +5792,7 @@
                 </a:solidFill>
                 <a:latin typeface="Calibri"/>
               </a:rPr>
-              <a:t>Fem minuter per övning. Skriv ditt svar i chatten. Övning 3.8–3.10 gör du själv efter lektionen.</a:t>
+              <a:t>Fem minuter per övning: försök själv, använd ledtråd vid behov och jämför sedan med facit. Ange mätpunkter och driftläge i 3.6–3.7. Spara din motivering.</a:t>
             </a:r>
           </a:p>
           <a:p>
@@ -5692,7 +5818,7 @@
       </p:sp>
       <p:pic>
         <p:nvPicPr>
-          <p:cNvPr id="12" name="Picture 11" descr="sidfot.jpg"/>
+          <p:cNvPr id="15" name="Picture 14" descr="sidfot.jpg"/>
           <p:cNvPicPr>
             <a:picLocks noChangeAspect="1"/>
           </p:cNvPicPr>
@@ -5716,7 +5842,7 @@
       </p:pic>
       <p:sp>
         <p:nvSpPr>
-          <p:cNvPr id="13" name="TextBox 12"/>
+          <p:cNvPr id="16" name="TextBox 15"/>
           <p:cNvSpPr txBox="1"/>
           <p:nvPr/>
         </p:nvSpPr>
@@ -5758,7 +5884,7 @@
       </p:sp>
       <p:sp>
         <p:nvSpPr>
-          <p:cNvPr id="14" name="TextBox 13"/>
+          <p:cNvPr id="17" name="TextBox 16"/>
           <p:cNvSpPr txBox="1"/>
           <p:nvPr/>
         </p:nvSpPr>
@@ -6521,7 +6647,7 @@
                 </a:solidFill>
                 <a:latin typeface="Calibri"/>
               </a:rPr>
-              <a:t>1. Gör övning 3.8–3.10 på delsidan. Ledtrådar och facit finns där.</a:t>
+              <a:t>1. Frivillig extra träning: övning 3.8 och 3.10. Prioritera inlämningen. Ledtrådar och facit finns på delsidan.</a:t>
             </a:r>
           </a:p>
           <a:p>
@@ -8297,7 +8423,7 @@
                 </a:solidFill>
                 <a:latin typeface="Calibri"/>
               </a:rPr>
-              <a:t>Pass 1: Genomgång av del 3 med era frågor (avsnitt 1–7)</a:t>
+              <a:t>Pass 1: Era frågor om scheman och mätpunkter (avsnitt 1–7)</a:t>
             </a:r>
           </a:p>
         </p:txBody>
@@ -8339,7 +8465,7 @@
                 </a:solidFill>
                 <a:latin typeface="Calibri"/>
               </a:rPr>
-              <a:t>09.30</a:t>
+              <a:t>09.20</a:t>
             </a:r>
           </a:p>
         </p:txBody>
@@ -8381,7 +8507,7 @@
                 </a:solidFill>
                 <a:latin typeface="Calibri"/>
               </a:rPr>
-              <a:t>Övning 3.6 och 3.7 tillsammans</a:t>
+              <a:t>Eget försök: övning 3.6, 3.7 och 3.9</a:t>
             </a:r>
           </a:p>
         </p:txBody>
@@ -8423,7 +8549,7 @@
                 </a:solidFill>
                 <a:latin typeface="Calibri"/>
               </a:rPr>
-              <a:t>09.40</a:t>
+              <a:t>09.35</a:t>
             </a:r>
           </a:p>
         </p:txBody>
@@ -8465,20 +8591,104 @@
                 </a:solidFill>
                 <a:latin typeface="Calibri"/>
               </a:rPr>
-              <a:t>Avslutsfråga, sammanfattning och det här gör du nu</a:t>
-            </a:r>
-          </a:p>
-        </p:txBody>
-      </p:sp>
-      <p:sp>
-        <p:nvSpPr>
-          <p:cNvPr id="12" name="Rectangle 11"/>
+              <a:t>Jämför resonemang och avslutsfråga</a:t>
+            </a:r>
+          </a:p>
+        </p:txBody>
+      </p:sp>
+      <p:sp>
+        <p:nvSpPr>
+          <p:cNvPr id="12" name="TextBox 11"/>
+          <p:cNvSpPr txBox="1"/>
+          <p:nvPr/>
+        </p:nvSpPr>
+        <p:spPr>
+          <a:xfrm>
+            <a:off x="640080" y="3685032"/>
+            <a:ext cx="1005840" cy="512064"/>
+          </a:xfrm>
+          <a:prstGeom prst="rect">
+            <a:avLst/>
+          </a:prstGeom>
+          <a:noFill/>
+        </p:spPr>
+        <p:txBody>
+          <a:bodyPr wrap="square" anchor="ctr" lIns="27432" rIns="27432" tIns="18288" bIns="18288">
+            <a:spAutoFit/>
+          </a:bodyPr>
+          <a:lstStyle/>
+          <a:p>
+            <a:pPr algn="l">
+              <a:lnSpc>
+                <a:spcPct val="108000"/>
+              </a:lnSpc>
+              <a:spcAft>
+                <a:spcPts val="0"/>
+              </a:spcAft>
+            </a:pPr>
+            <a:r>
+              <a:rPr sz="1800" b="1" i="0">
+                <a:solidFill>
+                  <a:srgbClr val="064F91"/>
+                </a:solidFill>
+                <a:latin typeface="Calibri"/>
+              </a:rPr>
+              <a:t>09.45</a:t>
+            </a:r>
+          </a:p>
+        </p:txBody>
+      </p:sp>
+      <p:sp>
+        <p:nvSpPr>
+          <p:cNvPr id="13" name="TextBox 12"/>
+          <p:cNvSpPr txBox="1"/>
+          <p:nvPr/>
+        </p:nvSpPr>
+        <p:spPr>
+          <a:xfrm>
+            <a:off x="1783080" y="3685032"/>
+            <a:ext cx="6720840" cy="512064"/>
+          </a:xfrm>
+          <a:prstGeom prst="rect">
+            <a:avLst/>
+          </a:prstGeom>
+          <a:noFill/>
+        </p:spPr>
+        <p:txBody>
+          <a:bodyPr wrap="square" anchor="ctr" lIns="27432" rIns="27432" tIns="18288" bIns="18288">
+            <a:spAutoFit/>
+          </a:bodyPr>
+          <a:lstStyle/>
+          <a:p>
+            <a:pPr algn="l">
+              <a:lnSpc>
+                <a:spcPct val="108000"/>
+              </a:lnSpc>
+              <a:spcAft>
+                <a:spcPts val="0"/>
+              </a:spcAft>
+            </a:pPr>
+            <a:r>
+              <a:rPr sz="1800" b="0" i="0">
+                <a:solidFill>
+                  <a:srgbClr val="111111"/>
+                </a:solidFill>
+                <a:latin typeface="Calibri"/>
+              </a:rPr>
+              <a:t>Frågor och nästa steg</a:t>
+            </a:r>
+          </a:p>
+        </p:txBody>
+      </p:sp>
+      <p:sp>
+        <p:nvSpPr>
+          <p:cNvPr id="14" name="Rectangle 13"/>
           <p:cNvSpPr/>
           <p:nvPr/>
         </p:nvSpPr>
         <p:spPr>
           <a:xfrm>
-            <a:off x="548640" y="3685032"/>
+            <a:off x="548640" y="4251960"/>
             <a:ext cx="8046720" cy="512064"/>
           </a:xfrm>
           <a:prstGeom prst="rect">
@@ -8514,13 +8724,13 @@
       </p:sp>
       <p:sp>
         <p:nvSpPr>
-          <p:cNvPr id="13" name="TextBox 12"/>
+          <p:cNvPr id="15" name="TextBox 14"/>
           <p:cNvSpPr txBox="1"/>
           <p:nvPr/>
         </p:nvSpPr>
         <p:spPr>
           <a:xfrm>
-            <a:off x="640080" y="3685032"/>
+            <a:off x="640080" y="4251960"/>
             <a:ext cx="1005840" cy="512064"/>
           </a:xfrm>
           <a:prstGeom prst="rect">
@@ -8556,13 +8766,13 @@
       </p:sp>
       <p:sp>
         <p:nvSpPr>
-          <p:cNvPr id="14" name="TextBox 13"/>
+          <p:cNvPr id="16" name="TextBox 15"/>
           <p:cNvSpPr txBox="1"/>
           <p:nvPr/>
         </p:nvSpPr>
         <p:spPr>
           <a:xfrm>
-            <a:off x="1783080" y="3685032"/>
+            <a:off x="1783080" y="4251960"/>
             <a:ext cx="6720840" cy="512064"/>
           </a:xfrm>
           <a:prstGeom prst="rect">
@@ -8598,7 +8808,7 @@
       </p:sp>
       <p:pic>
         <p:nvPicPr>
-          <p:cNvPr id="15" name="Picture 14" descr="sidfot.jpg"/>
+          <p:cNvPr id="17" name="Picture 16" descr="sidfot.jpg"/>
           <p:cNvPicPr>
             <a:picLocks noChangeAspect="1"/>
           </p:cNvPicPr>
@@ -8622,7 +8832,7 @@
       </p:pic>
       <p:sp>
         <p:nvSpPr>
-          <p:cNvPr id="16" name="TextBox 15"/>
+          <p:cNvPr id="18" name="TextBox 17"/>
           <p:cNvSpPr txBox="1"/>
           <p:nvPr/>
         </p:nvSpPr>
@@ -8664,7 +8874,7 @@
       </p:sp>
       <p:sp>
         <p:nvSpPr>
-          <p:cNvPr id="17" name="TextBox 16"/>
+          <p:cNvPr id="19" name="TextBox 18"/>
           <p:cNvSpPr txBox="1"/>
           <p:nvPr/>
         </p:nvSpPr>
